--- a/fsrpb_presentation.pptx
+++ b/fsrpb_presentation.pptx
@@ -25,6 +25,16 @@
     <p:sldId id="273" r:id="rId24"/>
     <p:sldId id="274" r:id="rId25"/>
     <p:sldId id="275" r:id="rId26"/>
+    <p:sldId id="276" r:id="rId27"/>
+    <p:sldId id="277" r:id="rId28"/>
+    <p:sldId id="278" r:id="rId29"/>
+    <p:sldId id="279" r:id="rId30"/>
+    <p:sldId id="280" r:id="rId31"/>
+    <p:sldId id="281" r:id="rId32"/>
+    <p:sldId id="282" r:id="rId33"/>
+    <p:sldId id="283" r:id="rId34"/>
+    <p:sldId id="284" r:id="rId35"/>
+    <p:sldId id="285" r:id="rId36"/>
   </p:sldIdLst>
   <p:sldSz cx="12191695" cy="6858000" type="screen4x3"/>
   <p:notesSz cx="6858000" cy="9144000"/>
@@ -3223,7 +3233,7 @@
                 </a:solidFill>
                 <a:latin typeface="Helvetica"/>
               </a:rPr>
-              <a:t>A YAML IR + a deterministic compiler + an MCP toolbelt — any LLM can drive it</a:t>
+              <a:t>AI is the driver — but the deterministic cornerstones are why it works</a:t>
             </a:r>
           </a:p>
         </p:txBody>
@@ -3362,7 +3372,7 @@
                 </a:solidFill>
                 <a:latin typeface="Helvetica"/>
               </a:rPr>
-              <a:t>The success ladder</a:t>
+              <a:t>Design 2 — Library-first compiler</a:t>
             </a:r>
           </a:p>
         </p:txBody>
@@ -3401,467 +3411,55 @@
                 </a:solidFill>
                 <a:latin typeface="Helvetica"/>
               </a:rPr>
-              <a:t>•  L1 Compile — structurally valid YAML</a:t>
-            </a:r>
-          </a:p>
-          <a:p>
-            <a:pPr algn="l">
-              <a:spcAft>
-                <a:spcPts val="800"/>
-              </a:spcAft>
-            </a:pPr>
-            <a:r>
-              <a:rPr sz="2000">
-                <a:solidFill>
-                  <a:srgbClr val="4A4A4A"/>
-                </a:solidFill>
-                <a:latin typeface="Helvetica"/>
-              </a:rPr>
-              <a:t>•  L2 Static-resolve — connectors / ops / picklists / step-types / Jinja vars all exist</a:t>
-            </a:r>
-          </a:p>
-          <a:p>
-            <a:pPr algn="l">
-              <a:spcAft>
-                <a:spcPts val="800"/>
-              </a:spcAft>
-            </a:pPr>
-            <a:r>
-              <a:rPr sz="2000">
-                <a:solidFill>
-                  <a:srgbClr val="4A4A4A"/>
-                </a:solidFill>
-                <a:latin typeface="Helvetica"/>
-              </a:rPr>
-              <a:t>•  L3 Dry-run — step args render against expected upstream context</a:t>
-            </a:r>
-          </a:p>
-          <a:p>
-            <a:pPr algn="l">
-              <a:spcAft>
-                <a:spcPts val="800"/>
-              </a:spcAft>
-            </a:pPr>
-            <a:r>
-              <a:rPr sz="2000">
-                <a:solidFill>
-                  <a:srgbClr val="4A4A4A"/>
-                </a:solidFill>
-                <a:latin typeface="Helvetica"/>
-              </a:rPr>
-              <a:t>•  L4 Live single-step — step N actually executes on real FSR</a:t>
-            </a:r>
-          </a:p>
-          <a:p>
-            <a:pPr algn="l">
-              <a:spcAft>
-                <a:spcPts val="800"/>
-              </a:spcAft>
-            </a:pPr>
-            <a:r>
-              <a:rPr sz="2000">
-                <a:solidFill>
-                  <a:srgbClr val="4A4A4A"/>
-                </a:solidFill>
-                <a:latin typeface="Helvetica"/>
-              </a:rPr>
-              <a:t>•  L5 Post-run assert — playbook produced the asked-for outcome</a:t>
-            </a:r>
-          </a:p>
-          <a:p>
-            <a:pPr algn="l">
-              <a:spcAft>
-                <a:spcPts val="800"/>
-              </a:spcAft>
-            </a:pPr>
-            <a:r>
-              <a:rPr sz="2000">
-                <a:solidFill>
-                  <a:srgbClr val="4A4A4A"/>
-                </a:solidFill>
-                <a:latin typeface="Helvetica"/>
-              </a:rPr>
-              <a:t>•  Each rung is deterministic + an MCP tool; failure returns structured {ok, code, suggestions}</a:t>
-            </a:r>
-          </a:p>
-        </p:txBody>
-      </p:sp>
-      <p:sp>
-        <p:nvSpPr>
-          <p:cNvPr id="5" name="Rounded Rectangle 4"/>
-          <p:cNvSpPr/>
-          <p:nvPr/>
-        </p:nvSpPr>
-        <p:spPr>
-          <a:xfrm>
-            <a:off x="563727" y="4572000"/>
-            <a:ext cx="2103120" cy="914400"/>
-          </a:xfrm>
-          <a:prstGeom prst="roundRect">
-            <a:avLst/>
-          </a:prstGeom>
-          <a:solidFill>
-            <a:srgbClr val="0F1E3D"/>
-          </a:solidFill>
-          <a:ln>
-            <a:noFill/>
-          </a:ln>
-        </p:spPr>
-        <p:style>
-          <a:lnRef idx="1">
-            <a:schemeClr val="accent1"/>
-          </a:lnRef>
-          <a:fillRef idx="3">
-            <a:schemeClr val="accent1"/>
-          </a:fillRef>
-          <a:effectRef idx="2">
-            <a:schemeClr val="accent1"/>
-          </a:effectRef>
-          <a:fontRef idx="minor">
-            <a:schemeClr val="lt1"/>
-          </a:fontRef>
-        </p:style>
-        <p:txBody>
-          <a:bodyPr rtlCol="0" anchor="ctr" wrap="square"/>
-          <a:lstStyle/>
-          <a:p>
-            <a:pPr algn="ctr"/>
-            <a:r>
-              <a:rPr sz="1200">
-                <a:solidFill>
-                  <a:srgbClr val="FFFFFF"/>
-                </a:solidFill>
-                <a:latin typeface="Helvetica"/>
-              </a:rPr>
-              <a:t>L1</a:t>
-            </a:r>
-          </a:p>
-          <a:p>
-            <a:pPr algn="ctr"/>
-            <a:r>
-              <a:rPr sz="1200">
-                <a:solidFill>
-                  <a:srgbClr val="FFFFFF"/>
-                </a:solidFill>
-                <a:latin typeface="Helvetica"/>
-              </a:rPr>
-              <a:t>Compile</a:t>
-            </a:r>
-          </a:p>
-          <a:p>
-            <a:pPr algn="ctr"/>
-            <a:r>
-              <a:rPr sz="1200">
-                <a:solidFill>
-                  <a:srgbClr val="FFFFFF"/>
-                </a:solidFill>
-                <a:latin typeface="Helvetica"/>
-              </a:rPr>
-              <a:t>[done]</a:t>
-            </a:r>
-          </a:p>
-        </p:txBody>
-      </p:sp>
-      <p:sp>
-        <p:nvSpPr>
-          <p:cNvPr id="6" name="Rounded Rectangle 5"/>
-          <p:cNvSpPr/>
-          <p:nvPr/>
-        </p:nvSpPr>
-        <p:spPr>
-          <a:xfrm>
-            <a:off x="2804007" y="4572000"/>
-            <a:ext cx="2103120" cy="914400"/>
-          </a:xfrm>
-          <a:prstGeom prst="roundRect">
-            <a:avLst/>
-          </a:prstGeom>
-          <a:solidFill>
-            <a:srgbClr val="C88600"/>
-          </a:solidFill>
-          <a:ln>
-            <a:noFill/>
-          </a:ln>
-        </p:spPr>
-        <p:style>
-          <a:lnRef idx="1">
-            <a:schemeClr val="accent1"/>
-          </a:lnRef>
-          <a:fillRef idx="3">
-            <a:schemeClr val="accent1"/>
-          </a:fillRef>
-          <a:effectRef idx="2">
-            <a:schemeClr val="accent1"/>
-          </a:effectRef>
-          <a:fontRef idx="minor">
-            <a:schemeClr val="lt1"/>
-          </a:fontRef>
-        </p:style>
-        <p:txBody>
-          <a:bodyPr rtlCol="0" anchor="ctr" wrap="square"/>
-          <a:lstStyle/>
-          <a:p>
-            <a:pPr algn="ctr"/>
-            <a:r>
-              <a:rPr sz="1200">
-                <a:solidFill>
-                  <a:srgbClr val="FFFFFF"/>
-                </a:solidFill>
-                <a:latin typeface="Helvetica"/>
-              </a:rPr>
-              <a:t>L2</a:t>
-            </a:r>
-          </a:p>
-          <a:p>
-            <a:pPr algn="ctr"/>
-            <a:r>
-              <a:rPr sz="1200">
-                <a:solidFill>
-                  <a:srgbClr val="FFFFFF"/>
-                </a:solidFill>
-                <a:latin typeface="Helvetica"/>
-              </a:rPr>
-              <a:t>Static-resolve</a:t>
-            </a:r>
-          </a:p>
-          <a:p>
-            <a:pPr algn="ctr"/>
-            <a:r>
-              <a:rPr sz="1200">
-                <a:solidFill>
-                  <a:srgbClr val="FFFFFF"/>
-                </a:solidFill>
-                <a:latin typeface="Helvetica"/>
-              </a:rPr>
-              <a:t>[partial]</a:t>
-            </a:r>
-          </a:p>
-        </p:txBody>
-      </p:sp>
-      <p:sp>
-        <p:nvSpPr>
-          <p:cNvPr id="7" name="Rounded Rectangle 6"/>
-          <p:cNvSpPr/>
-          <p:nvPr/>
-        </p:nvSpPr>
-        <p:spPr>
-          <a:xfrm>
-            <a:off x="5044287" y="4572000"/>
-            <a:ext cx="2103120" cy="914400"/>
-          </a:xfrm>
-          <a:prstGeom prst="roundRect">
-            <a:avLst/>
-          </a:prstGeom>
-          <a:solidFill>
-            <a:srgbClr val="E83E3E"/>
-          </a:solidFill>
-          <a:ln>
-            <a:noFill/>
-          </a:ln>
-        </p:spPr>
-        <p:style>
-          <a:lnRef idx="1">
-            <a:schemeClr val="accent1"/>
-          </a:lnRef>
-          <a:fillRef idx="3">
-            <a:schemeClr val="accent1"/>
-          </a:fillRef>
-          <a:effectRef idx="2">
-            <a:schemeClr val="accent1"/>
-          </a:effectRef>
-          <a:fontRef idx="minor">
-            <a:schemeClr val="lt1"/>
-          </a:fontRef>
-        </p:style>
-        <p:txBody>
-          <a:bodyPr rtlCol="0" anchor="ctr" wrap="square"/>
-          <a:lstStyle/>
-          <a:p>
-            <a:pPr algn="ctr"/>
-            <a:r>
-              <a:rPr sz="1200">
-                <a:solidFill>
-                  <a:srgbClr val="FFFFFF"/>
-                </a:solidFill>
-                <a:latin typeface="Helvetica"/>
-              </a:rPr>
-              <a:t>L3</a:t>
-            </a:r>
-          </a:p>
-          <a:p>
-            <a:pPr algn="ctr"/>
-            <a:r>
-              <a:rPr sz="1200">
-                <a:solidFill>
-                  <a:srgbClr val="FFFFFF"/>
-                </a:solidFill>
-                <a:latin typeface="Helvetica"/>
-              </a:rPr>
-              <a:t>Dry-run</a:t>
-            </a:r>
-          </a:p>
-          <a:p>
-            <a:pPr algn="ctr"/>
-            <a:r>
-              <a:rPr sz="1200">
-                <a:solidFill>
-                  <a:srgbClr val="FFFFFF"/>
-                </a:solidFill>
-                <a:latin typeface="Helvetica"/>
-              </a:rPr>
-              <a:t>[missing]</a:t>
-            </a:r>
-          </a:p>
-        </p:txBody>
-      </p:sp>
-      <p:sp>
-        <p:nvSpPr>
-          <p:cNvPr id="8" name="Rounded Rectangle 7"/>
-          <p:cNvSpPr/>
-          <p:nvPr/>
-        </p:nvSpPr>
-        <p:spPr>
-          <a:xfrm>
-            <a:off x="7284567" y="4572000"/>
-            <a:ext cx="2103120" cy="914400"/>
-          </a:xfrm>
-          <a:prstGeom prst="roundRect">
-            <a:avLst/>
-          </a:prstGeom>
-          <a:solidFill>
-            <a:srgbClr val="C88600"/>
-          </a:solidFill>
-          <a:ln>
-            <a:noFill/>
-          </a:ln>
-        </p:spPr>
-        <p:style>
-          <a:lnRef idx="1">
-            <a:schemeClr val="accent1"/>
-          </a:lnRef>
-          <a:fillRef idx="3">
-            <a:schemeClr val="accent1"/>
-          </a:fillRef>
-          <a:effectRef idx="2">
-            <a:schemeClr val="accent1"/>
-          </a:effectRef>
-          <a:fontRef idx="minor">
-            <a:schemeClr val="lt1"/>
-          </a:fontRef>
-        </p:style>
-        <p:txBody>
-          <a:bodyPr rtlCol="0" anchor="ctr" wrap="square"/>
-          <a:lstStyle/>
-          <a:p>
-            <a:pPr algn="ctr"/>
-            <a:r>
-              <a:rPr sz="1200">
-                <a:solidFill>
-                  <a:srgbClr val="FFFFFF"/>
-                </a:solidFill>
-                <a:latin typeface="Helvetica"/>
-              </a:rPr>
-              <a:t>L4</a:t>
-            </a:r>
-          </a:p>
-          <a:p>
-            <a:pPr algn="ctr"/>
-            <a:r>
-              <a:rPr sz="1200">
-                <a:solidFill>
-                  <a:srgbClr val="FFFFFF"/>
-                </a:solidFill>
-                <a:latin typeface="Helvetica"/>
-              </a:rPr>
-              <a:t>Live step</a:t>
-            </a:r>
-          </a:p>
-          <a:p>
-            <a:pPr algn="ctr"/>
-            <a:r>
-              <a:rPr sz="1200">
-                <a:solidFill>
-                  <a:srgbClr val="FFFFFF"/>
-                </a:solidFill>
-                <a:latin typeface="Helvetica"/>
-              </a:rPr>
-              <a:t>[half]</a:t>
-            </a:r>
-          </a:p>
-        </p:txBody>
-      </p:sp>
-      <p:sp>
-        <p:nvSpPr>
-          <p:cNvPr id="9" name="Rounded Rectangle 8"/>
-          <p:cNvSpPr/>
-          <p:nvPr/>
-        </p:nvSpPr>
-        <p:spPr>
-          <a:xfrm>
-            <a:off x="9524847" y="4572000"/>
-            <a:ext cx="2103120" cy="914400"/>
-          </a:xfrm>
-          <a:prstGeom prst="roundRect">
-            <a:avLst/>
-          </a:prstGeom>
-          <a:solidFill>
-            <a:srgbClr val="E83E3E"/>
-          </a:solidFill>
-          <a:ln>
-            <a:noFill/>
-          </a:ln>
-        </p:spPr>
-        <p:style>
-          <a:lnRef idx="1">
-            <a:schemeClr val="accent1"/>
-          </a:lnRef>
-          <a:fillRef idx="3">
-            <a:schemeClr val="accent1"/>
-          </a:fillRef>
-          <a:effectRef idx="2">
-            <a:schemeClr val="accent1"/>
-          </a:effectRef>
-          <a:fontRef idx="minor">
-            <a:schemeClr val="lt1"/>
-          </a:fontRef>
-        </p:style>
-        <p:txBody>
-          <a:bodyPr rtlCol="0" anchor="ctr" wrap="square"/>
-          <a:lstStyle/>
-          <a:p>
-            <a:pPr algn="ctr"/>
-            <a:r>
-              <a:rPr sz="1200">
-                <a:solidFill>
-                  <a:srgbClr val="FFFFFF"/>
-                </a:solidFill>
-                <a:latin typeface="Helvetica"/>
-              </a:rPr>
-              <a:t>L5</a:t>
-            </a:r>
-          </a:p>
-          <a:p>
-            <a:pPr algn="ctr"/>
-            <a:r>
-              <a:rPr sz="1200">
-                <a:solidFill>
-                  <a:srgbClr val="FFFFFF"/>
-                </a:solidFill>
-                <a:latin typeface="Helvetica"/>
-              </a:rPr>
-              <a:t>Post-run assert</a:t>
-            </a:r>
-          </a:p>
-          <a:p>
-            <a:pPr algn="ctr"/>
-            <a:r>
-              <a:rPr sz="1200">
-                <a:solidFill>
-                  <a:srgbClr val="FFFFFF"/>
-                </a:solidFill>
-                <a:latin typeface="Helvetica"/>
-              </a:rPr>
-              <a:t>[missing]</a:t>
+              <a:t>•  Pipeline: parser → resolver → validator → emitter</a:t>
+            </a:r>
+          </a:p>
+          <a:p>
+            <a:pPr algn="l">
+              <a:spcAft>
+                <a:spcPts val="800"/>
+              </a:spcAft>
+            </a:pPr>
+            <a:r>
+              <a:rPr sz="2000">
+                <a:solidFill>
+                  <a:srgbClr val="4A4A4A"/>
+                </a:solidFill>
+                <a:latin typeface="Helvetica"/>
+              </a:rPr>
+              <a:t>•  Compiler is a Python library; CLI, MCP server, web app are thin wrappers</a:t>
+            </a:r>
+          </a:p>
+          <a:p>
+            <a:pPr algn="l">
+              <a:spcAft>
+                <a:spcPts val="800"/>
+              </a:spcAft>
+            </a:pPr>
+            <a:r>
+              <a:rPr sz="2000">
+                <a:solidFill>
+                  <a:srgbClr val="4A4A4A"/>
+                </a:solidFill>
+                <a:latin typeface="Helvetica"/>
+              </a:rPr>
+              <a:t>•  Errors are data, not strings — every diagnostic has a code, line/col, suggested fix</a:t>
+            </a:r>
+          </a:p>
+          <a:p>
+            <a:pPr algn="l">
+              <a:spcAft>
+                <a:spcPts val="800"/>
+              </a:spcAft>
+            </a:pPr>
+            <a:r>
+              <a:rPr sz="2000">
+                <a:solidFill>
+                  <a:srgbClr val="4A4A4A"/>
+                </a:solidFill>
+                <a:latin typeface="Helvetica"/>
+              </a:rPr>
+              <a:t>•  Round-trip (compile → decompile) is lossless modulo formatting</a:t>
             </a:r>
           </a:p>
         </p:txBody>
@@ -3965,7 +3563,7 @@
                 </a:solidFill>
                 <a:latin typeface="Helvetica"/>
               </a:rPr>
-              <a:t>Recipes — from blank page to working playbook</a:t>
+              <a:t>Cornerstone 3 — Render-path validator</a:t>
             </a:r>
           </a:p>
         </p:txBody>
@@ -4004,71 +3602,87 @@
                 </a:solidFill>
                 <a:latin typeface="Helvetica"/>
               </a:rPr>
-              <a:t>•  Recipe generators emit known-good playbooks for common archetypes</a:t>
-            </a:r>
-          </a:p>
-          <a:p>
-            <a:pPr algn="l">
-              <a:spcAft>
-                <a:spcPts val="800"/>
-              </a:spcAft>
-            </a:pPr>
-            <a:r>
-              <a:rPr sz="2000">
-                <a:solidFill>
-                  <a:srgbClr val="4A4A4A"/>
-                </a:solidFill>
-                <a:latin typeface="Helvetica"/>
-              </a:rPr>
-              <a:t>•  Today: threat-feed ingestion, data ingestion (alerts/incidents)</a:t>
-            </a:r>
-          </a:p>
-          <a:p>
-            <a:pPr algn="l">
-              <a:spcAft>
-                <a:spcPts val="800"/>
-              </a:spcAft>
-            </a:pPr>
-            <a:r>
-              <a:rPr sz="2000">
-                <a:solidFill>
-                  <a:srgbClr val="4A4A4A"/>
-                </a:solidFill>
-                <a:latin typeface="Helvetica"/>
-              </a:rPr>
-              <a:t>•  Roadmap: enrichment, triage, containment, approval-gated actions, orchestration</a:t>
-            </a:r>
-          </a:p>
-          <a:p>
-            <a:pPr algn="l">
-              <a:spcAft>
-                <a:spcPts val="800"/>
-              </a:spcAft>
-            </a:pPr>
-            <a:r>
-              <a:rPr sz="2000">
-                <a:solidFill>
-                  <a:srgbClr val="4A4A4A"/>
-                </a:solidFill>
-                <a:latin typeface="Helvetica"/>
-              </a:rPr>
-              <a:t>•  Each recipe ships compile-clean, with TODO notes only where the user must intervene</a:t>
-            </a:r>
-          </a:p>
-          <a:p>
-            <a:pPr algn="l">
-              <a:spcAft>
-                <a:spcPts val="800"/>
-              </a:spcAft>
-            </a:pPr>
-            <a:r>
-              <a:rPr sz="2000">
-                <a:solidFill>
-                  <a:srgbClr val="4A4A4A"/>
-                </a:solidFill>
-                <a:latin typeface="Helvetica"/>
-              </a:rPr>
-              <a:t>•  Layered ruleset validator enforces archetype-specific rules</a:t>
+              <a:t>•  Simulates the playbook offline before any push: every step's rendered args + output shape</a:t>
+            </a:r>
+          </a:p>
+          <a:p>
+            <a:pPr algn="l">
+              <a:spcAft>
+                <a:spcPts val="800"/>
+              </a:spcAft>
+            </a:pPr>
+            <a:r>
+              <a:rPr sz="2000">
+                <a:solidFill>
+                  <a:srgbClr val="4A4A4A"/>
+                </a:solidFill>
+                <a:latin typeface="Helvetica"/>
+              </a:rPr>
+              <a:t>•  Per-step provenance: mock_result · computed · live_run · default_empty</a:t>
+            </a:r>
+          </a:p>
+          <a:p>
+            <a:pPr algn="l">
+              <a:spcAft>
+                <a:spcPts val="800"/>
+              </a:spcAft>
+            </a:pPr>
+            <a:r>
+              <a:rPr sz="2000">
+                <a:solidFill>
+                  <a:srgbClr val="4A4A4A"/>
+                </a:solidFill>
+                <a:latin typeface="Helvetica"/>
+              </a:rPr>
+              <a:t>•  Catches what validate_yaml can't: vars.steps.X.Y typos, missing keys, type drift</a:t>
+            </a:r>
+          </a:p>
+          <a:p>
+            <a:pPr algn="l">
+              <a:spcAft>
+                <a:spcPts val="800"/>
+              </a:spcAft>
+            </a:pPr>
+            <a:r>
+              <a:rPr sz="2000">
+                <a:solidFill>
+                  <a:srgbClr val="4A4A4A"/>
+                </a:solidFill>
+                <a:latin typeface="Helvetica"/>
+              </a:rPr>
+              <a:t>•  Static extractor finds every vars.…, picklist(), Jinja reference per step</a:t>
+            </a:r>
+          </a:p>
+          <a:p>
+            <a:pPr algn="l">
+              <a:spcAft>
+                <a:spcPts val="800"/>
+              </a:spcAft>
+            </a:pPr>
+            <a:r>
+              <a:rPr sz="2000">
+                <a:solidFill>
+                  <a:srgbClr val="4A4A4A"/>
+                </a:solidFill>
+                <a:latin typeface="Helvetica"/>
+              </a:rPr>
+              <a:t>•  Heuristic checks (C1-C4): unreachable refs, missing keys, required-empty, picklist drift</a:t>
+            </a:r>
+          </a:p>
+          <a:p>
+            <a:pPr algn="l">
+              <a:spcAft>
+                <a:spcPts val="800"/>
+              </a:spcAft>
+            </a:pPr>
+            <a:r>
+              <a:rPr sz="2000">
+                <a:solidFill>
+                  <a:srgbClr val="4A4A4A"/>
+                </a:solidFill>
+                <a:latin typeface="Helvetica"/>
+              </a:rPr>
+              <a:t>•  Surfaces close-key suggestions deterministically — no LLM in the diagnostic itself</a:t>
             </a:r>
           </a:p>
         </p:txBody>
@@ -4172,7 +3786,7 @@
                 </a:solidFill>
                 <a:latin typeface="Helvetica"/>
               </a:rPr>
-              <a:t>HTTP virtual-connector — covering the long tail</a:t>
+              <a:t>Cornerstone 4 — Live-FSR probes ground simulator truth</a:t>
             </a:r>
           </a:p>
         </p:txBody>
@@ -4211,71 +3825,87 @@
                 </a:solidFill>
                 <a:latin typeface="Helvetica"/>
               </a:rPr>
-              <a:t>•  FortiSOAR ships a generic HTTP connector (10 ops, including http_paginate)</a:t>
-            </a:r>
-          </a:p>
-          <a:p>
-            <a:pPr algn="l">
-              <a:spcAft>
-                <a:spcPts val="800"/>
-              </a:spcAft>
-            </a:pPr>
-            <a:r>
-              <a:rPr sz="2000">
-                <a:solidFill>
-                  <a:srgbClr val="4A4A4A"/>
-                </a:solidFill>
-                <a:latin typeface="Helvetica"/>
-              </a:rPr>
-              <a:t>•  We crawled 207,419 API examples across 6,927 third-party products</a:t>
-            </a:r>
-          </a:p>
-          <a:p>
-            <a:pPr algn="l">
-              <a:spcAft>
-                <a:spcPts val="800"/>
-              </a:spcAft>
-            </a:pPr>
-            <a:r>
-              <a:rPr sz="2000">
-                <a:solidFill>
-                  <a:srgbClr val="4A4A4A"/>
-                </a:solidFill>
-                <a:latin typeface="Helvetica"/>
-              </a:rPr>
-              <a:t>•  search_api_examples + synthesize_http_step translate a catalog entry → http_request step</a:t>
-            </a:r>
-          </a:p>
-          <a:p>
-            <a:pPr algn="l">
-              <a:spcAft>
-                <a:spcPts val="800"/>
-              </a:spcAft>
-            </a:pPr>
-            <a:r>
-              <a:rPr sz="2000">
-                <a:solidFill>
-                  <a:srgbClr val="4A4A4A"/>
-                </a:solidFill>
-                <a:latin typeface="Helvetica"/>
-              </a:rPr>
-              <a:t>•  Pre-fills method / path / auth / params from real examples — not LLM guesses</a:t>
-            </a:r>
-          </a:p>
-          <a:p>
-            <a:pPr algn="l">
-              <a:spcAft>
-                <a:spcPts val="800"/>
-              </a:spcAft>
-            </a:pPr>
-            <a:r>
-              <a:rPr sz="2000">
-                <a:solidFill>
-                  <a:srgbClr val="4A4A4A"/>
-                </a:solidFill>
-                <a:latin typeface="Helvetica"/>
-              </a:rPr>
-              <a:t>•  Result: the agent reaches vendors we don't have a native connector for</a:t>
+              <a:t>•  Probes synthesize tiny playbooks, push, fire, capture full run env into JSON fixtures</a:t>
+            </a:r>
+          </a:p>
+          <a:p>
+            <a:pPr algn="l">
+              <a:spcAft>
+                <a:spcPts val="800"/>
+              </a:spcAft>
+            </a:pPr>
+            <a:r>
+              <a:rPr sz="2000">
+                <a:solidFill>
+                  <a:srgbClr val="4A4A4A"/>
+                </a:solidFill>
+                <a:latin typeface="Helvetica"/>
+              </a:rPr>
+              <a:t>•  9 scenarios so far: for_each (sequential / parallel / break / empty / condition), workflow_reference</a:t>
+            </a:r>
+          </a:p>
+          <a:p>
+            <a:pPr algn="l">
+              <a:spcAft>
+                <a:spcPts val="800"/>
+              </a:spcAft>
+            </a:pPr>
+            <a:r>
+              <a:rPr sz="2000">
+                <a:solidFill>
+                  <a:srgbClr val="4A4A4A"/>
+                </a:solidFill>
+                <a:latin typeface="Helvetica"/>
+              </a:rPr>
+              <a:t>•  Catches non-obvious truths: vars.steps.&lt;for_each&gt; is list-of-dicts, not last-value</a:t>
+            </a:r>
+          </a:p>
+          <a:p>
+            <a:pPr algn="l">
+              <a:spcAft>
+                <a:spcPts val="800"/>
+              </a:spcAft>
+            </a:pPr>
+            <a:r>
+              <a:rPr sz="2000">
+                <a:solidFill>
+                  <a:srgbClr val="4A4A4A"/>
+                </a:solidFill>
+                <a:latin typeface="Helvetica"/>
+              </a:rPr>
+              <a:t>•  Pinned in agent prompt as facts the LLM must not invent</a:t>
+            </a:r>
+          </a:p>
+          <a:p>
+            <a:pPr algn="l">
+              <a:spcAft>
+                <a:spcPts val="800"/>
+              </a:spcAft>
+            </a:pPr>
+            <a:r>
+              <a:rPr sz="2000">
+                <a:solidFill>
+                  <a:srgbClr val="4A4A4A"/>
+                </a:solidFill>
+                <a:latin typeface="Helvetica"/>
+              </a:rPr>
+              <a:t>•  Same fixtures back parametrized parity tests — drift on either side surfaces immediately</a:t>
+            </a:r>
+          </a:p>
+          <a:p>
+            <a:pPr algn="l">
+              <a:spcAft>
+                <a:spcPts val="800"/>
+              </a:spcAft>
+            </a:pPr>
+            <a:r>
+              <a:rPr sz="2000">
+                <a:solidFill>
+                  <a:srgbClr val="4A4A4A"/>
+                </a:solidFill>
+                <a:latin typeface="Helvetica"/>
+              </a:rPr>
+              <a:t>•  Re-runnable per scenario; new constructs become probes, not guesses</a:t>
             </a:r>
           </a:p>
         </p:txBody>
@@ -4379,7 +4009,7 @@
                 </a:solidFill>
                 <a:latin typeface="Helvetica"/>
               </a:rPr>
-              <a:t>Live verification loop</a:t>
+              <a:t>Cornerstone 5 — Step-param audit (corpus-driven truth)</a:t>
             </a:r>
           </a:p>
         </p:txBody>
@@ -4418,71 +4048,87 @@
                 </a:solidFill>
                 <a:latin typeface="Helvetica"/>
               </a:rPr>
-              <a:t>•  validate_yaml catches shape errors before push</a:t>
-            </a:r>
-          </a:p>
-          <a:p>
-            <a:pPr algn="l">
-              <a:spcAft>
-                <a:spcPts val="800"/>
-              </a:spcAft>
-            </a:pPr>
-            <a:r>
-              <a:rPr sz="2000">
-                <a:solidFill>
-                  <a:srgbClr val="4A4A4A"/>
-                </a:solidFill>
-                <a:latin typeface="Helvetica"/>
-              </a:rPr>
-              <a:t>•  render_jinja(template, from_pb_execution=&lt;pk&gt;) resolves Jinja against a real past run</a:t>
-            </a:r>
-          </a:p>
-          <a:p>
-            <a:pPr algn="l">
-              <a:spcAft>
-                <a:spcPts val="800"/>
-              </a:spcAft>
-            </a:pPr>
-            <a:r>
-              <a:rPr sz="2000">
-                <a:solidFill>
-                  <a:srgbClr val="4A4A4A"/>
-                </a:solidFill>
-                <a:latin typeface="Helvetica"/>
-              </a:rPr>
-              <a:t>•  run_op executes one connector op live and caches observed output shape in SQLite</a:t>
-            </a:r>
-          </a:p>
-          <a:p>
-            <a:pPr algn="l">
-              <a:spcAft>
-                <a:spcPts val="800"/>
-              </a:spcAft>
-            </a:pPr>
-            <a:r>
-              <a:rPr sz="2000">
-                <a:solidFill>
-                  <a:srgbClr val="4A4A4A"/>
-                </a:solidFill>
-                <a:latin typeface="Helvetica"/>
-              </a:rPr>
-              <a:t>•  dry_run_playbook (in build) imports → executes → cleans up on dev FSR</a:t>
-            </a:r>
-          </a:p>
-          <a:p>
-            <a:pPr algn="l">
-              <a:spcAft>
-                <a:spcPts val="800"/>
-              </a:spcAft>
-            </a:pPr>
-            <a:r>
-              <a:rPr sz="2000">
-                <a:solidFill>
-                  <a:srgbClr val="4A4A4A"/>
-                </a:solidFill>
-                <a:latin typeface="Helvetica"/>
-              </a:rPr>
-              <a:t>•  Failures are evidence — if a demo breaks, that's a real bug to file</a:t>
+              <a:t>•  fsrpb dump-step-params writes one Markdown report per step type</a:t>
+            </a:r>
+          </a:p>
+          <a:p>
+            <a:pPr algn="l">
+              <a:spcAft>
+                <a:spcPts val="800"/>
+              </a:spcAft>
+            </a:pPr>
+            <a:r>
+              <a:rPr sz="2000">
+                <a:solidFill>
+                  <a:srgbClr val="4A4A4A"/>
+                </a:solidFill>
+                <a:latin typeface="Helvetica"/>
+              </a:rPr>
+              <a:t>•  Combines: resolver allowlist + 7,442 corpus rows of real arg keys + frequency</a:t>
+            </a:r>
+          </a:p>
+          <a:p>
+            <a:pPr algn="l">
+              <a:spcAft>
+                <a:spcPts val="800"/>
+              </a:spcAft>
+            </a:pPr>
+            <a:r>
+              <a:rPr sz="2000">
+                <a:solidFill>
+                  <a:srgbClr val="4A4A4A"/>
+                </a:solidFill>
+                <a:latin typeface="Helvetica"/>
+              </a:rPr>
+              <a:t>•  Highlights gaps: resolver doesn't accept a key the corpus uses 305× (e.g. FindRecords.query)</a:t>
+            </a:r>
+          </a:p>
+          <a:p>
+            <a:pPr algn="l">
+              <a:spcAft>
+                <a:spcPts val="800"/>
+              </a:spcAft>
+            </a:pPr>
+            <a:r>
+              <a:rPr sz="2000">
+                <a:solidFill>
+                  <a:srgbClr val="4A4A4A"/>
+                </a:solidFill>
+                <a:latin typeface="Helvetica"/>
+              </a:rPr>
+              <a:t>•  Already surfaced 5+ resolver allowlist holes; each gap is a one-line fix</a:t>
+            </a:r>
+          </a:p>
+          <a:p>
+            <a:pPr algn="l">
+              <a:spcAft>
+                <a:spcPts val="800"/>
+              </a:spcAft>
+            </a:pPr>
+            <a:r>
+              <a:rPr sz="2000">
+                <a:solidFill>
+                  <a:srgbClr val="4A4A4A"/>
+                </a:solidFill>
+                <a:latin typeface="Helvetica"/>
+              </a:rPr>
+              <a:t>•  Lives in docs/step_params/ — agent greps these instead of trusting training intuition</a:t>
+            </a:r>
+          </a:p>
+          <a:p>
+            <a:pPr algn="l">
+              <a:spcAft>
+                <a:spcPts val="800"/>
+              </a:spcAft>
+            </a:pPr>
+            <a:r>
+              <a:rPr sz="2000">
+                <a:solidFill>
+                  <a:srgbClr val="4A4A4A"/>
+                </a:solidFill>
+                <a:latin typeface="Helvetica"/>
+              </a:rPr>
+              <a:t>•  Re-generated on demand; stays aligned as FSR evolves</a:t>
             </a:r>
           </a:p>
         </p:txBody>
@@ -4586,7 +4232,7 @@
                 </a:solidFill>
                 <a:latin typeface="Helvetica"/>
               </a:rPr>
-              <a:t>Demo 1 — vague ask to working playbook</a:t>
+              <a:t>Cornerstone 6 — MCP as the agent contract</a:t>
             </a:r>
           </a:p>
         </p:txBody>
@@ -4625,419 +4271,87 @@
                 </a:solidFill>
                 <a:latin typeface="Helvetica"/>
               </a:rPr>
-              <a:t>•  Prompt: "Look up an IP on VirusTotal and update the alert"</a:t>
-            </a:r>
-          </a:p>
-          <a:p>
-            <a:pPr algn="l">
-              <a:spcAft>
-                <a:spcPts val="800"/>
-              </a:spcAft>
-            </a:pPr>
-            <a:r>
-              <a:rPr sz="2000">
-                <a:solidFill>
-                  <a:srgbClr val="4A4A4A"/>
-                </a:solidFill>
-                <a:latin typeface="Helvetica"/>
-              </a:rPr>
-              <a:t>•  Agent: find_connector → get_op_schema → emit YAML</a:t>
-            </a:r>
-          </a:p>
-          <a:p>
-            <a:pPr algn="l">
-              <a:spcAft>
-                <a:spcPts val="800"/>
-              </a:spcAft>
-            </a:pPr>
-            <a:r>
-              <a:rPr sz="2000">
-                <a:solidFill>
-                  <a:srgbClr val="4A4A4A"/>
-                </a:solidFill>
-                <a:latin typeface="Helvetica"/>
-              </a:rPr>
-              <a:t>•  Then: validate_yaml → resolve_yaml (L2) → compile → push → run → assert</a:t>
-            </a:r>
-          </a:p>
-          <a:p>
-            <a:pPr algn="l">
-              <a:spcAft>
-                <a:spcPts val="800"/>
-              </a:spcAft>
-            </a:pPr>
-            <a:r>
-              <a:rPr sz="2000">
-                <a:solidFill>
-                  <a:srgbClr val="4A4A4A"/>
-                </a:solidFill>
-                <a:latin typeface="Helvetica"/>
-              </a:rPr>
-              <a:t>•  Total time from prompt to passing run: minutes</a:t>
-            </a:r>
-          </a:p>
-        </p:txBody>
-      </p:sp>
-      <p:sp>
-        <p:nvSpPr>
-          <p:cNvPr id="5" name="Rounded Rectangle 4"/>
-          <p:cNvSpPr/>
-          <p:nvPr/>
-        </p:nvSpPr>
-        <p:spPr>
-          <a:xfrm>
-            <a:off x="1821027" y="4389120"/>
-            <a:ext cx="1143000" cy="548640"/>
-          </a:xfrm>
-          <a:prstGeom prst="roundRect">
-            <a:avLst/>
-          </a:prstGeom>
-          <a:solidFill>
-            <a:srgbClr val="0F1E3D"/>
-          </a:solidFill>
-          <a:ln>
-            <a:noFill/>
-          </a:ln>
-        </p:spPr>
-        <p:style>
-          <a:lnRef idx="1">
-            <a:schemeClr val="accent1"/>
-          </a:lnRef>
-          <a:fillRef idx="3">
-            <a:schemeClr val="accent1"/>
-          </a:fillRef>
-          <a:effectRef idx="2">
-            <a:schemeClr val="accent1"/>
-          </a:effectRef>
-          <a:fontRef idx="minor">
-            <a:schemeClr val="lt1"/>
-          </a:fontRef>
-        </p:style>
-        <p:txBody>
-          <a:bodyPr rtlCol="0" anchor="ctr"/>
-          <a:lstStyle/>
-          <a:p>
-            <a:pPr algn="ctr"/>
-            <a:r>
-              <a:rPr sz="1100">
-                <a:solidFill>
-                  <a:srgbClr val="FFFFFF"/>
-                </a:solidFill>
-                <a:latin typeface="Helvetica"/>
-              </a:rPr>
-              <a:t>find_connector</a:t>
-            </a:r>
-          </a:p>
-        </p:txBody>
-      </p:sp>
-      <p:sp>
-        <p:nvSpPr>
-          <p:cNvPr id="6" name="Rounded Rectangle 5"/>
-          <p:cNvSpPr/>
-          <p:nvPr/>
-        </p:nvSpPr>
-        <p:spPr>
-          <a:xfrm>
-            <a:off x="3055467" y="4389120"/>
-            <a:ext cx="1143000" cy="548640"/>
-          </a:xfrm>
-          <a:prstGeom prst="roundRect">
-            <a:avLst/>
-          </a:prstGeom>
-          <a:solidFill>
-            <a:srgbClr val="E83E3E"/>
-          </a:solidFill>
-          <a:ln>
-            <a:noFill/>
-          </a:ln>
-        </p:spPr>
-        <p:style>
-          <a:lnRef idx="1">
-            <a:schemeClr val="accent1"/>
-          </a:lnRef>
-          <a:fillRef idx="3">
-            <a:schemeClr val="accent1"/>
-          </a:fillRef>
-          <a:effectRef idx="2">
-            <a:schemeClr val="accent1"/>
-          </a:effectRef>
-          <a:fontRef idx="minor">
-            <a:schemeClr val="lt1"/>
-          </a:fontRef>
-        </p:style>
-        <p:txBody>
-          <a:bodyPr rtlCol="0" anchor="ctr"/>
-          <a:lstStyle/>
-          <a:p>
-            <a:pPr algn="ctr"/>
-            <a:r>
-              <a:rPr sz="1100">
-                <a:solidFill>
-                  <a:srgbClr val="FFFFFF"/>
-                </a:solidFill>
-                <a:latin typeface="Helvetica"/>
-              </a:rPr>
-              <a:t>get_op_schema</a:t>
-            </a:r>
-          </a:p>
-        </p:txBody>
-      </p:sp>
-      <p:sp>
-        <p:nvSpPr>
-          <p:cNvPr id="7" name="Rounded Rectangle 6"/>
-          <p:cNvSpPr/>
-          <p:nvPr/>
-        </p:nvSpPr>
-        <p:spPr>
-          <a:xfrm>
-            <a:off x="4289907" y="4389120"/>
-            <a:ext cx="1143000" cy="548640"/>
-          </a:xfrm>
-          <a:prstGeom prst="roundRect">
-            <a:avLst/>
-          </a:prstGeom>
-          <a:solidFill>
-            <a:srgbClr val="0F1E3D"/>
-          </a:solidFill>
-          <a:ln>
-            <a:noFill/>
-          </a:ln>
-        </p:spPr>
-        <p:style>
-          <a:lnRef idx="1">
-            <a:schemeClr val="accent1"/>
-          </a:lnRef>
-          <a:fillRef idx="3">
-            <a:schemeClr val="accent1"/>
-          </a:fillRef>
-          <a:effectRef idx="2">
-            <a:schemeClr val="accent1"/>
-          </a:effectRef>
-          <a:fontRef idx="minor">
-            <a:schemeClr val="lt1"/>
-          </a:fontRef>
-        </p:style>
-        <p:txBody>
-          <a:bodyPr rtlCol="0" anchor="ctr"/>
-          <a:lstStyle/>
-          <a:p>
-            <a:pPr algn="ctr"/>
-            <a:r>
-              <a:rPr sz="1100">
-                <a:solidFill>
-                  <a:srgbClr val="FFFFFF"/>
-                </a:solidFill>
-                <a:latin typeface="Helvetica"/>
-              </a:rPr>
-              <a:t>emit YAML</a:t>
-            </a:r>
-          </a:p>
-        </p:txBody>
-      </p:sp>
-      <p:sp>
-        <p:nvSpPr>
-          <p:cNvPr id="8" name="Rounded Rectangle 7"/>
-          <p:cNvSpPr/>
-          <p:nvPr/>
-        </p:nvSpPr>
-        <p:spPr>
-          <a:xfrm>
-            <a:off x="5524347" y="4389120"/>
-            <a:ext cx="1143000" cy="548640"/>
-          </a:xfrm>
-          <a:prstGeom prst="roundRect">
-            <a:avLst/>
-          </a:prstGeom>
-          <a:solidFill>
-            <a:srgbClr val="E83E3E"/>
-          </a:solidFill>
-          <a:ln>
-            <a:noFill/>
-          </a:ln>
-        </p:spPr>
-        <p:style>
-          <a:lnRef idx="1">
-            <a:schemeClr val="accent1"/>
-          </a:lnRef>
-          <a:fillRef idx="3">
-            <a:schemeClr val="accent1"/>
-          </a:fillRef>
-          <a:effectRef idx="2">
-            <a:schemeClr val="accent1"/>
-          </a:effectRef>
-          <a:fontRef idx="minor">
-            <a:schemeClr val="lt1"/>
-          </a:fontRef>
-        </p:style>
-        <p:txBody>
-          <a:bodyPr rtlCol="0" anchor="ctr"/>
-          <a:lstStyle/>
-          <a:p>
-            <a:pPr algn="ctr"/>
-            <a:r>
-              <a:rPr sz="1100">
-                <a:solidFill>
-                  <a:srgbClr val="FFFFFF"/>
-                </a:solidFill>
-                <a:latin typeface="Helvetica"/>
-              </a:rPr>
-              <a:t>validate</a:t>
-            </a:r>
-          </a:p>
-        </p:txBody>
-      </p:sp>
-      <p:sp>
-        <p:nvSpPr>
-          <p:cNvPr id="9" name="Rounded Rectangle 8"/>
-          <p:cNvSpPr/>
-          <p:nvPr/>
-        </p:nvSpPr>
-        <p:spPr>
-          <a:xfrm>
-            <a:off x="6758787" y="4389120"/>
-            <a:ext cx="1143000" cy="548640"/>
-          </a:xfrm>
-          <a:prstGeom prst="roundRect">
-            <a:avLst/>
-          </a:prstGeom>
-          <a:solidFill>
-            <a:srgbClr val="0F1E3D"/>
-          </a:solidFill>
-          <a:ln>
-            <a:noFill/>
-          </a:ln>
-        </p:spPr>
-        <p:style>
-          <a:lnRef idx="1">
-            <a:schemeClr val="accent1"/>
-          </a:lnRef>
-          <a:fillRef idx="3">
-            <a:schemeClr val="accent1"/>
-          </a:fillRef>
-          <a:effectRef idx="2">
-            <a:schemeClr val="accent1"/>
-          </a:effectRef>
-          <a:fontRef idx="minor">
-            <a:schemeClr val="lt1"/>
-          </a:fontRef>
-        </p:style>
-        <p:txBody>
-          <a:bodyPr rtlCol="0" anchor="ctr"/>
-          <a:lstStyle/>
-          <a:p>
-            <a:pPr algn="ctr"/>
-            <a:r>
-              <a:rPr sz="1100">
-                <a:solidFill>
-                  <a:srgbClr val="FFFFFF"/>
-                </a:solidFill>
-                <a:latin typeface="Helvetica"/>
-              </a:rPr>
-              <a:t>compile</a:t>
-            </a:r>
-          </a:p>
-        </p:txBody>
-      </p:sp>
-      <p:sp>
-        <p:nvSpPr>
-          <p:cNvPr id="10" name="Rounded Rectangle 9"/>
-          <p:cNvSpPr/>
-          <p:nvPr/>
-        </p:nvSpPr>
-        <p:spPr>
-          <a:xfrm>
-            <a:off x="7993227" y="4389120"/>
-            <a:ext cx="1143000" cy="548640"/>
-          </a:xfrm>
-          <a:prstGeom prst="roundRect">
-            <a:avLst/>
-          </a:prstGeom>
-          <a:solidFill>
-            <a:srgbClr val="E83E3E"/>
-          </a:solidFill>
-          <a:ln>
-            <a:noFill/>
-          </a:ln>
-        </p:spPr>
-        <p:style>
-          <a:lnRef idx="1">
-            <a:schemeClr val="accent1"/>
-          </a:lnRef>
-          <a:fillRef idx="3">
-            <a:schemeClr val="accent1"/>
-          </a:fillRef>
-          <a:effectRef idx="2">
-            <a:schemeClr val="accent1"/>
-          </a:effectRef>
-          <a:fontRef idx="minor">
-            <a:schemeClr val="lt1"/>
-          </a:fontRef>
-        </p:style>
-        <p:txBody>
-          <a:bodyPr rtlCol="0" anchor="ctr"/>
-          <a:lstStyle/>
-          <a:p>
-            <a:pPr algn="ctr"/>
-            <a:r>
-              <a:rPr sz="1100">
-                <a:solidFill>
-                  <a:srgbClr val="FFFFFF"/>
-                </a:solidFill>
-                <a:latin typeface="Helvetica"/>
-              </a:rPr>
-              <a:t>push</a:t>
-            </a:r>
-          </a:p>
-        </p:txBody>
-      </p:sp>
-      <p:sp>
-        <p:nvSpPr>
-          <p:cNvPr id="11" name="Rounded Rectangle 10"/>
-          <p:cNvSpPr/>
-          <p:nvPr/>
-        </p:nvSpPr>
-        <p:spPr>
-          <a:xfrm>
-            <a:off x="9227667" y="4389120"/>
-            <a:ext cx="1143000" cy="548640"/>
-          </a:xfrm>
-          <a:prstGeom prst="roundRect">
-            <a:avLst/>
-          </a:prstGeom>
-          <a:solidFill>
-            <a:srgbClr val="0F1E3D"/>
-          </a:solidFill>
-          <a:ln>
-            <a:noFill/>
-          </a:ln>
-        </p:spPr>
-        <p:style>
-          <a:lnRef idx="1">
-            <a:schemeClr val="accent1"/>
-          </a:lnRef>
-          <a:fillRef idx="3">
-            <a:schemeClr val="accent1"/>
-          </a:fillRef>
-          <a:effectRef idx="2">
-            <a:schemeClr val="accent1"/>
-          </a:effectRef>
-          <a:fontRef idx="minor">
-            <a:schemeClr val="lt1"/>
-          </a:fontRef>
-        </p:style>
-        <p:txBody>
-          <a:bodyPr rtlCol="0" anchor="ctr"/>
-          <a:lstStyle/>
-          <a:p>
-            <a:pPr algn="ctr"/>
-            <a:r>
-              <a:rPr sz="1100">
-                <a:solidFill>
-                  <a:srgbClr val="FFFFFF"/>
-                </a:solidFill>
-                <a:latin typeface="Helvetica"/>
-              </a:rPr>
-              <a:t>run</a:t>
+              <a:t>•  30+ MCP tools — every cornerstone is callable by name with structured I/O</a:t>
+            </a:r>
+          </a:p>
+          <a:p>
+            <a:pPr algn="l">
+              <a:spcAft>
+                <a:spcPts val="800"/>
+              </a:spcAft>
+            </a:pPr>
+            <a:r>
+              <a:rPr sz="2000">
+                <a:solidFill>
+                  <a:srgbClr val="4A4A4A"/>
+                </a:solidFill>
+                <a:latin typeface="Helvetica"/>
+              </a:rPr>
+              <a:t>•  find_connector · get_op_schema · validate_yaml · compile_yaml · render_jinja</a:t>
+            </a:r>
+          </a:p>
+          <a:p>
+            <a:pPr algn="l">
+              <a:spcAft>
+                <a:spcPts val="800"/>
+              </a:spcAft>
+            </a:pPr>
+            <a:r>
+              <a:rPr sz="2000">
+                <a:solidFill>
+                  <a:srgbClr val="4A4A4A"/>
+                </a:solidFill>
+                <a:latin typeface="Helvetica"/>
+              </a:rPr>
+              <a:t>•  analyze_playbook · suggest_fix_for_diagnostic · step_test · step_through_playbook</a:t>
+            </a:r>
+          </a:p>
+          <a:p>
+            <a:pPr algn="l">
+              <a:spcAft>
+                <a:spcPts val="800"/>
+              </a:spcAft>
+            </a:pPr>
+            <a:r>
+              <a:rPr sz="2000">
+                <a:solidFill>
+                  <a:srgbClr val="4A4A4A"/>
+                </a:solidFill>
+                <a:latin typeface="Helvetica"/>
+              </a:rPr>
+              <a:t>•  run_op · get_run_env · resolve_picklist_value · find_step_examples</a:t>
+            </a:r>
+          </a:p>
+          <a:p>
+            <a:pPr algn="l">
+              <a:spcAft>
+                <a:spcPts val="800"/>
+              </a:spcAft>
+            </a:pPr>
+            <a:r>
+              <a:rPr sz="2000">
+                <a:solidFill>
+                  <a:srgbClr val="4A4A4A"/>
+                </a:solidFill>
+                <a:latin typeface="Helvetica"/>
+              </a:rPr>
+              <a:t>•  search_api_examples · synthesize_http_step · find_recipe</a:t>
+            </a:r>
+          </a:p>
+          <a:p>
+            <a:pPr algn="l">
+              <a:spcAft>
+                <a:spcPts val="800"/>
+              </a:spcAft>
+            </a:pPr>
+            <a:r>
+              <a:rPr sz="2000">
+                <a:solidFill>
+                  <a:srgbClr val="4A4A4A"/>
+                </a:solidFill>
+                <a:latin typeface="Helvetica"/>
+              </a:rPr>
+              <a:t>•  LLM-agnostic by construction: any model that does tool use can drive this</a:t>
             </a:r>
           </a:p>
         </p:txBody>
@@ -5141,7 +4455,7 @@
                 </a:solidFill>
                 <a:latin typeface="Helvetica"/>
               </a:rPr>
-              <a:t>Demo 2 — the killer: triage and fix</a:t>
+              <a:t>The success ladder</a:t>
             </a:r>
           </a:p>
         </p:txBody>
@@ -5180,55 +4494,467 @@
                 </a:solidFill>
                 <a:latin typeface="Helvetica"/>
               </a:rPr>
-              <a:t>•  "My playbook is broken. Figure out which one and fix it."</a:t>
-            </a:r>
-          </a:p>
-          <a:p>
-            <a:pPr algn="l">
-              <a:spcAft>
-                <a:spcPts val="800"/>
-              </a:spcAft>
-            </a:pPr>
-            <a:r>
-              <a:rPr sz="2000">
-                <a:solidFill>
-                  <a:srgbClr val="4A4A4A"/>
-                </a:solidFill>
-                <a:latin typeface="Helvetica"/>
-              </a:rPr>
-              <a:t>•  Agent: list_recent_failed_runs → get_run_env(&lt;pk&gt;) → spots .records vs .data</a:t>
-            </a:r>
-          </a:p>
-          <a:p>
-            <a:pPr algn="l">
-              <a:spcAft>
-                <a:spcPts val="800"/>
-              </a:spcAft>
-            </a:pPr>
-            <a:r>
-              <a:rPr sz="2000">
-                <a:solidFill>
-                  <a:srgbClr val="4A4A4A"/>
-                </a:solidFill>
-                <a:latin typeface="Helvetica"/>
-              </a:rPr>
-              <a:t>•  Pulls YAML, edits, validates, diffs, pushes, re-runs, watches it pass</a:t>
-            </a:r>
-          </a:p>
-          <a:p>
-            <a:pPr algn="l">
-              <a:spcAft>
-                <a:spcPts val="800"/>
-              </a:spcAft>
-            </a:pPr>
-            <a:r>
-              <a:rPr sz="2000">
-                <a:solidFill>
-                  <a:srgbClr val="4A4A4A"/>
-                </a:solidFill>
-                <a:latin typeface="Helvetica"/>
-              </a:rPr>
-              <a:t>•  None of this loop is possible from the FSR Playbook Designer</a:t>
+              <a:t>•  L1 Compile — structurally valid YAML</a:t>
+            </a:r>
+          </a:p>
+          <a:p>
+            <a:pPr algn="l">
+              <a:spcAft>
+                <a:spcPts val="800"/>
+              </a:spcAft>
+            </a:pPr>
+            <a:r>
+              <a:rPr sz="2000">
+                <a:solidFill>
+                  <a:srgbClr val="4A4A4A"/>
+                </a:solidFill>
+                <a:latin typeface="Helvetica"/>
+              </a:rPr>
+              <a:t>•  L2 Static-resolve — connectors / ops / picklists / step-types / Jinja vars all exist</a:t>
+            </a:r>
+          </a:p>
+          <a:p>
+            <a:pPr algn="l">
+              <a:spcAft>
+                <a:spcPts val="800"/>
+              </a:spcAft>
+            </a:pPr>
+            <a:r>
+              <a:rPr sz="2000">
+                <a:solidFill>
+                  <a:srgbClr val="4A4A4A"/>
+                </a:solidFill>
+                <a:latin typeface="Helvetica"/>
+              </a:rPr>
+              <a:t>•  L3 Dry-run — step args render against expected upstream context</a:t>
+            </a:r>
+          </a:p>
+          <a:p>
+            <a:pPr algn="l">
+              <a:spcAft>
+                <a:spcPts val="800"/>
+              </a:spcAft>
+            </a:pPr>
+            <a:r>
+              <a:rPr sz="2000">
+                <a:solidFill>
+                  <a:srgbClr val="4A4A4A"/>
+                </a:solidFill>
+                <a:latin typeface="Helvetica"/>
+              </a:rPr>
+              <a:t>•  L4 Live single-step — step N actually executes on real FSR</a:t>
+            </a:r>
+          </a:p>
+          <a:p>
+            <a:pPr algn="l">
+              <a:spcAft>
+                <a:spcPts val="800"/>
+              </a:spcAft>
+            </a:pPr>
+            <a:r>
+              <a:rPr sz="2000">
+                <a:solidFill>
+                  <a:srgbClr val="4A4A4A"/>
+                </a:solidFill>
+                <a:latin typeface="Helvetica"/>
+              </a:rPr>
+              <a:t>•  L5 Post-run assert — playbook produced the asked-for outcome</a:t>
+            </a:r>
+          </a:p>
+          <a:p>
+            <a:pPr algn="l">
+              <a:spcAft>
+                <a:spcPts val="800"/>
+              </a:spcAft>
+            </a:pPr>
+            <a:r>
+              <a:rPr sz="2000">
+                <a:solidFill>
+                  <a:srgbClr val="4A4A4A"/>
+                </a:solidFill>
+                <a:latin typeface="Helvetica"/>
+              </a:rPr>
+              <a:t>•  Each rung is deterministic + an MCP tool; failure returns structured {ok, code, suggestions}</a:t>
+            </a:r>
+          </a:p>
+        </p:txBody>
+      </p:sp>
+      <p:sp>
+        <p:nvSpPr>
+          <p:cNvPr id="5" name="Rounded Rectangle 4"/>
+          <p:cNvSpPr/>
+          <p:nvPr/>
+        </p:nvSpPr>
+        <p:spPr>
+          <a:xfrm>
+            <a:off x="563727" y="4572000"/>
+            <a:ext cx="2103120" cy="914400"/>
+          </a:xfrm>
+          <a:prstGeom prst="roundRect">
+            <a:avLst/>
+          </a:prstGeom>
+          <a:solidFill>
+            <a:srgbClr val="0F1E3D"/>
+          </a:solidFill>
+          <a:ln>
+            <a:noFill/>
+          </a:ln>
+        </p:spPr>
+        <p:style>
+          <a:lnRef idx="1">
+            <a:schemeClr val="accent1"/>
+          </a:lnRef>
+          <a:fillRef idx="3">
+            <a:schemeClr val="accent1"/>
+          </a:fillRef>
+          <a:effectRef idx="2">
+            <a:schemeClr val="accent1"/>
+          </a:effectRef>
+          <a:fontRef idx="minor">
+            <a:schemeClr val="lt1"/>
+          </a:fontRef>
+        </p:style>
+        <p:txBody>
+          <a:bodyPr rtlCol="0" anchor="ctr" wrap="square"/>
+          <a:lstStyle/>
+          <a:p>
+            <a:pPr algn="ctr"/>
+            <a:r>
+              <a:rPr sz="1200">
+                <a:solidFill>
+                  <a:srgbClr val="FFFFFF"/>
+                </a:solidFill>
+                <a:latin typeface="Helvetica"/>
+              </a:rPr>
+              <a:t>L1</a:t>
+            </a:r>
+          </a:p>
+          <a:p>
+            <a:pPr algn="ctr"/>
+            <a:r>
+              <a:rPr sz="1200">
+                <a:solidFill>
+                  <a:srgbClr val="FFFFFF"/>
+                </a:solidFill>
+                <a:latin typeface="Helvetica"/>
+              </a:rPr>
+              <a:t>Compile</a:t>
+            </a:r>
+          </a:p>
+          <a:p>
+            <a:pPr algn="ctr"/>
+            <a:r>
+              <a:rPr sz="1200">
+                <a:solidFill>
+                  <a:srgbClr val="FFFFFF"/>
+                </a:solidFill>
+                <a:latin typeface="Helvetica"/>
+              </a:rPr>
+              <a:t>[done]</a:t>
+            </a:r>
+          </a:p>
+        </p:txBody>
+      </p:sp>
+      <p:sp>
+        <p:nvSpPr>
+          <p:cNvPr id="6" name="Rounded Rectangle 5"/>
+          <p:cNvSpPr/>
+          <p:nvPr/>
+        </p:nvSpPr>
+        <p:spPr>
+          <a:xfrm>
+            <a:off x="2804007" y="4572000"/>
+            <a:ext cx="2103120" cy="914400"/>
+          </a:xfrm>
+          <a:prstGeom prst="roundRect">
+            <a:avLst/>
+          </a:prstGeom>
+          <a:solidFill>
+            <a:srgbClr val="C88600"/>
+          </a:solidFill>
+          <a:ln>
+            <a:noFill/>
+          </a:ln>
+        </p:spPr>
+        <p:style>
+          <a:lnRef idx="1">
+            <a:schemeClr val="accent1"/>
+          </a:lnRef>
+          <a:fillRef idx="3">
+            <a:schemeClr val="accent1"/>
+          </a:fillRef>
+          <a:effectRef idx="2">
+            <a:schemeClr val="accent1"/>
+          </a:effectRef>
+          <a:fontRef idx="minor">
+            <a:schemeClr val="lt1"/>
+          </a:fontRef>
+        </p:style>
+        <p:txBody>
+          <a:bodyPr rtlCol="0" anchor="ctr" wrap="square"/>
+          <a:lstStyle/>
+          <a:p>
+            <a:pPr algn="ctr"/>
+            <a:r>
+              <a:rPr sz="1200">
+                <a:solidFill>
+                  <a:srgbClr val="FFFFFF"/>
+                </a:solidFill>
+                <a:latin typeface="Helvetica"/>
+              </a:rPr>
+              <a:t>L2</a:t>
+            </a:r>
+          </a:p>
+          <a:p>
+            <a:pPr algn="ctr"/>
+            <a:r>
+              <a:rPr sz="1200">
+                <a:solidFill>
+                  <a:srgbClr val="FFFFFF"/>
+                </a:solidFill>
+                <a:latin typeface="Helvetica"/>
+              </a:rPr>
+              <a:t>Static-resolve</a:t>
+            </a:r>
+          </a:p>
+          <a:p>
+            <a:pPr algn="ctr"/>
+            <a:r>
+              <a:rPr sz="1200">
+                <a:solidFill>
+                  <a:srgbClr val="FFFFFF"/>
+                </a:solidFill>
+                <a:latin typeface="Helvetica"/>
+              </a:rPr>
+              <a:t>[partial]</a:t>
+            </a:r>
+          </a:p>
+        </p:txBody>
+      </p:sp>
+      <p:sp>
+        <p:nvSpPr>
+          <p:cNvPr id="7" name="Rounded Rectangle 6"/>
+          <p:cNvSpPr/>
+          <p:nvPr/>
+        </p:nvSpPr>
+        <p:spPr>
+          <a:xfrm>
+            <a:off x="5044287" y="4572000"/>
+            <a:ext cx="2103120" cy="914400"/>
+          </a:xfrm>
+          <a:prstGeom prst="roundRect">
+            <a:avLst/>
+          </a:prstGeom>
+          <a:solidFill>
+            <a:srgbClr val="E83E3E"/>
+          </a:solidFill>
+          <a:ln>
+            <a:noFill/>
+          </a:ln>
+        </p:spPr>
+        <p:style>
+          <a:lnRef idx="1">
+            <a:schemeClr val="accent1"/>
+          </a:lnRef>
+          <a:fillRef idx="3">
+            <a:schemeClr val="accent1"/>
+          </a:fillRef>
+          <a:effectRef idx="2">
+            <a:schemeClr val="accent1"/>
+          </a:effectRef>
+          <a:fontRef idx="minor">
+            <a:schemeClr val="lt1"/>
+          </a:fontRef>
+        </p:style>
+        <p:txBody>
+          <a:bodyPr rtlCol="0" anchor="ctr" wrap="square"/>
+          <a:lstStyle/>
+          <a:p>
+            <a:pPr algn="ctr"/>
+            <a:r>
+              <a:rPr sz="1200">
+                <a:solidFill>
+                  <a:srgbClr val="FFFFFF"/>
+                </a:solidFill>
+                <a:latin typeface="Helvetica"/>
+              </a:rPr>
+              <a:t>L3</a:t>
+            </a:r>
+          </a:p>
+          <a:p>
+            <a:pPr algn="ctr"/>
+            <a:r>
+              <a:rPr sz="1200">
+                <a:solidFill>
+                  <a:srgbClr val="FFFFFF"/>
+                </a:solidFill>
+                <a:latin typeface="Helvetica"/>
+              </a:rPr>
+              <a:t>Dry-run</a:t>
+            </a:r>
+          </a:p>
+          <a:p>
+            <a:pPr algn="ctr"/>
+            <a:r>
+              <a:rPr sz="1200">
+                <a:solidFill>
+                  <a:srgbClr val="FFFFFF"/>
+                </a:solidFill>
+                <a:latin typeface="Helvetica"/>
+              </a:rPr>
+              <a:t>[missing]</a:t>
+            </a:r>
+          </a:p>
+        </p:txBody>
+      </p:sp>
+      <p:sp>
+        <p:nvSpPr>
+          <p:cNvPr id="8" name="Rounded Rectangle 7"/>
+          <p:cNvSpPr/>
+          <p:nvPr/>
+        </p:nvSpPr>
+        <p:spPr>
+          <a:xfrm>
+            <a:off x="7284567" y="4572000"/>
+            <a:ext cx="2103120" cy="914400"/>
+          </a:xfrm>
+          <a:prstGeom prst="roundRect">
+            <a:avLst/>
+          </a:prstGeom>
+          <a:solidFill>
+            <a:srgbClr val="C88600"/>
+          </a:solidFill>
+          <a:ln>
+            <a:noFill/>
+          </a:ln>
+        </p:spPr>
+        <p:style>
+          <a:lnRef idx="1">
+            <a:schemeClr val="accent1"/>
+          </a:lnRef>
+          <a:fillRef idx="3">
+            <a:schemeClr val="accent1"/>
+          </a:fillRef>
+          <a:effectRef idx="2">
+            <a:schemeClr val="accent1"/>
+          </a:effectRef>
+          <a:fontRef idx="minor">
+            <a:schemeClr val="lt1"/>
+          </a:fontRef>
+        </p:style>
+        <p:txBody>
+          <a:bodyPr rtlCol="0" anchor="ctr" wrap="square"/>
+          <a:lstStyle/>
+          <a:p>
+            <a:pPr algn="ctr"/>
+            <a:r>
+              <a:rPr sz="1200">
+                <a:solidFill>
+                  <a:srgbClr val="FFFFFF"/>
+                </a:solidFill>
+                <a:latin typeface="Helvetica"/>
+              </a:rPr>
+              <a:t>L4</a:t>
+            </a:r>
+          </a:p>
+          <a:p>
+            <a:pPr algn="ctr"/>
+            <a:r>
+              <a:rPr sz="1200">
+                <a:solidFill>
+                  <a:srgbClr val="FFFFFF"/>
+                </a:solidFill>
+                <a:latin typeface="Helvetica"/>
+              </a:rPr>
+              <a:t>Live step</a:t>
+            </a:r>
+          </a:p>
+          <a:p>
+            <a:pPr algn="ctr"/>
+            <a:r>
+              <a:rPr sz="1200">
+                <a:solidFill>
+                  <a:srgbClr val="FFFFFF"/>
+                </a:solidFill>
+                <a:latin typeface="Helvetica"/>
+              </a:rPr>
+              <a:t>[half]</a:t>
+            </a:r>
+          </a:p>
+        </p:txBody>
+      </p:sp>
+      <p:sp>
+        <p:nvSpPr>
+          <p:cNvPr id="9" name="Rounded Rectangle 8"/>
+          <p:cNvSpPr/>
+          <p:nvPr/>
+        </p:nvSpPr>
+        <p:spPr>
+          <a:xfrm>
+            <a:off x="9524847" y="4572000"/>
+            <a:ext cx="2103120" cy="914400"/>
+          </a:xfrm>
+          <a:prstGeom prst="roundRect">
+            <a:avLst/>
+          </a:prstGeom>
+          <a:solidFill>
+            <a:srgbClr val="E83E3E"/>
+          </a:solidFill>
+          <a:ln>
+            <a:noFill/>
+          </a:ln>
+        </p:spPr>
+        <p:style>
+          <a:lnRef idx="1">
+            <a:schemeClr val="accent1"/>
+          </a:lnRef>
+          <a:fillRef idx="3">
+            <a:schemeClr val="accent1"/>
+          </a:fillRef>
+          <a:effectRef idx="2">
+            <a:schemeClr val="accent1"/>
+          </a:effectRef>
+          <a:fontRef idx="minor">
+            <a:schemeClr val="lt1"/>
+          </a:fontRef>
+        </p:style>
+        <p:txBody>
+          <a:bodyPr rtlCol="0" anchor="ctr" wrap="square"/>
+          <a:lstStyle/>
+          <a:p>
+            <a:pPr algn="ctr"/>
+            <a:r>
+              <a:rPr sz="1200">
+                <a:solidFill>
+                  <a:srgbClr val="FFFFFF"/>
+                </a:solidFill>
+                <a:latin typeface="Helvetica"/>
+              </a:rPr>
+              <a:t>L5</a:t>
+            </a:r>
+          </a:p>
+          <a:p>
+            <a:pPr algn="ctr"/>
+            <a:r>
+              <a:rPr sz="1200">
+                <a:solidFill>
+                  <a:srgbClr val="FFFFFF"/>
+                </a:solidFill>
+                <a:latin typeface="Helvetica"/>
+              </a:rPr>
+              <a:t>Post-run assert</a:t>
+            </a:r>
+          </a:p>
+          <a:p>
+            <a:pPr algn="ctr"/>
+            <a:r>
+              <a:rPr sz="1200">
+                <a:solidFill>
+                  <a:srgbClr val="FFFFFF"/>
+                </a:solidFill>
+                <a:latin typeface="Helvetica"/>
+              </a:rPr>
+              <a:t>[missing]</a:t>
             </a:r>
           </a:p>
         </p:txBody>
@@ -5332,7 +5058,7 @@
                 </a:solidFill>
                 <a:latin typeface="Helvetica"/>
               </a:rPr>
-              <a:t>What we've indexed — FortiSOAR knowledge</a:t>
+              <a:t>The agent prompt — workflow gates that close the loop</a:t>
             </a:r>
           </a:p>
         </p:txBody>
@@ -5345,8 +5071,8 @@
         </p:nvSpPr>
         <p:spPr>
           <a:xfrm>
-            <a:off x="548640" y="1143000"/>
-            <a:ext cx="11094415" cy="548640"/>
+            <a:off x="548640" y="1371600"/>
+            <a:ext cx="11094415" cy="4937760"/>
           </a:xfrm>
           <a:prstGeom prst="rect">
             <a:avLst/>
@@ -5359,434 +5085,99 @@
           </a:bodyPr>
           <a:lstStyle/>
           <a:p>
-            <a:pPr algn="l"/>
-            <a:r>
-              <a:rPr sz="1400" b="0">
-                <a:solidFill>
-                  <a:srgbClr val="4A4A4A"/>
-                </a:solidFill>
-                <a:latin typeface="Helvetica"/>
-              </a:rPr>
-              <a:t>Every number is a real row in a queryable index, refreshed from the live appliance.</a:t>
-            </a:r>
-          </a:p>
-        </p:txBody>
-      </p:sp>
-      <p:sp>
-        <p:nvSpPr>
-          <p:cNvPr id="5" name="Rounded Rectangle 4"/>
-          <p:cNvSpPr/>
-          <p:nvPr/>
-        </p:nvSpPr>
-        <p:spPr>
-          <a:xfrm>
-            <a:off x="700887" y="1920240"/>
-            <a:ext cx="3474720" cy="1280160"/>
-          </a:xfrm>
-          <a:prstGeom prst="roundRect">
-            <a:avLst/>
-          </a:prstGeom>
-          <a:solidFill>
-            <a:srgbClr val="0F1E3D"/>
-          </a:solidFill>
-          <a:ln>
-            <a:noFill/>
-          </a:ln>
-        </p:spPr>
-        <p:style>
-          <a:lnRef idx="1">
-            <a:schemeClr val="accent1"/>
-          </a:lnRef>
-          <a:fillRef idx="3">
-            <a:schemeClr val="accent1"/>
-          </a:fillRef>
-          <a:effectRef idx="2">
-            <a:schemeClr val="accent1"/>
-          </a:effectRef>
-          <a:fontRef idx="minor">
-            <a:schemeClr val="lt1"/>
-          </a:fontRef>
-        </p:style>
-        <p:txBody>
-          <a:bodyPr rtlCol="0" anchor="ctr" wrap="square" lIns="182880" rIns="182880" tIns="137160" bIns="91440"/>
-          <a:lstStyle/>
-          <a:p>
-            <a:pPr algn="ctr"/>
-            <a:r>
-              <a:rPr sz="3600" b="1">
-                <a:solidFill>
-                  <a:srgbClr val="FFFFFF"/>
-                </a:solidFill>
-                <a:latin typeface="Helvetica"/>
-              </a:rPr>
-              <a:t>714</a:t>
-            </a:r>
-          </a:p>
-          <a:p>
-            <a:pPr algn="ctr"/>
-            <a:r>
-              <a:rPr sz="1300">
-                <a:solidFill>
-                  <a:srgbClr val="CCCCD4"/>
-                </a:solidFill>
-                <a:latin typeface="Helvetica"/>
-              </a:rPr>
-              <a:t>Connectors</a:t>
-            </a:r>
-          </a:p>
-        </p:txBody>
-      </p:sp>
-      <p:sp>
-        <p:nvSpPr>
-          <p:cNvPr id="6" name="Rounded Rectangle 5"/>
-          <p:cNvSpPr/>
-          <p:nvPr/>
-        </p:nvSpPr>
-        <p:spPr>
-          <a:xfrm>
-            <a:off x="4358487" y="1920240"/>
-            <a:ext cx="3474720" cy="1280160"/>
-          </a:xfrm>
-          <a:prstGeom prst="roundRect">
-            <a:avLst/>
-          </a:prstGeom>
-          <a:solidFill>
-            <a:srgbClr val="0F1E3D"/>
-          </a:solidFill>
-          <a:ln>
-            <a:noFill/>
-          </a:ln>
-        </p:spPr>
-        <p:style>
-          <a:lnRef idx="1">
-            <a:schemeClr val="accent1"/>
-          </a:lnRef>
-          <a:fillRef idx="3">
-            <a:schemeClr val="accent1"/>
-          </a:fillRef>
-          <a:effectRef idx="2">
-            <a:schemeClr val="accent1"/>
-          </a:effectRef>
-          <a:fontRef idx="minor">
-            <a:schemeClr val="lt1"/>
-          </a:fontRef>
-        </p:style>
-        <p:txBody>
-          <a:bodyPr rtlCol="0" anchor="ctr" wrap="square" lIns="182880" rIns="182880" tIns="137160" bIns="91440"/>
-          <a:lstStyle/>
-          <a:p>
-            <a:pPr algn="ctr"/>
-            <a:r>
-              <a:rPr sz="3600" b="1">
-                <a:solidFill>
-                  <a:srgbClr val="FFFFFF"/>
-                </a:solidFill>
-                <a:latin typeface="Helvetica"/>
-              </a:rPr>
-              <a:t>6,773</a:t>
-            </a:r>
-          </a:p>
-          <a:p>
-            <a:pPr algn="ctr"/>
-            <a:r>
-              <a:rPr sz="1300">
-                <a:solidFill>
-                  <a:srgbClr val="CCCCD4"/>
-                </a:solidFill>
-                <a:latin typeface="Helvetica"/>
-              </a:rPr>
-              <a:t>Operations</a:t>
-            </a:r>
-          </a:p>
-        </p:txBody>
-      </p:sp>
-      <p:sp>
-        <p:nvSpPr>
-          <p:cNvPr id="7" name="Rounded Rectangle 6"/>
-          <p:cNvSpPr/>
-          <p:nvPr/>
-        </p:nvSpPr>
-        <p:spPr>
-          <a:xfrm>
-            <a:off x="8016087" y="1920240"/>
-            <a:ext cx="3474720" cy="1280160"/>
-          </a:xfrm>
-          <a:prstGeom prst="roundRect">
-            <a:avLst/>
-          </a:prstGeom>
-          <a:solidFill>
-            <a:srgbClr val="0F1E3D"/>
-          </a:solidFill>
-          <a:ln>
-            <a:noFill/>
-          </a:ln>
-        </p:spPr>
-        <p:style>
-          <a:lnRef idx="1">
-            <a:schemeClr val="accent1"/>
-          </a:lnRef>
-          <a:fillRef idx="3">
-            <a:schemeClr val="accent1"/>
-          </a:fillRef>
-          <a:effectRef idx="2">
-            <a:schemeClr val="accent1"/>
-          </a:effectRef>
-          <a:fontRef idx="minor">
-            <a:schemeClr val="lt1"/>
-          </a:fontRef>
-        </p:style>
-        <p:txBody>
-          <a:bodyPr rtlCol="0" anchor="ctr" wrap="square" lIns="182880" rIns="182880" tIns="137160" bIns="91440"/>
-          <a:lstStyle/>
-          <a:p>
-            <a:pPr algn="ctr"/>
-            <a:r>
-              <a:rPr sz="3600" b="1">
-                <a:solidFill>
-                  <a:srgbClr val="FFFFFF"/>
-                </a:solidFill>
-                <a:latin typeface="Helvetica"/>
-              </a:rPr>
-              <a:t>26,093</a:t>
-            </a:r>
-          </a:p>
-          <a:p>
-            <a:pPr algn="ctr"/>
-            <a:r>
-              <a:rPr sz="1300">
-                <a:solidFill>
-                  <a:srgbClr val="CCCCD4"/>
-                </a:solidFill>
-                <a:latin typeface="Helvetica"/>
-              </a:rPr>
-              <a:t>Op parameters</a:t>
-            </a:r>
-          </a:p>
-        </p:txBody>
-      </p:sp>
-      <p:sp>
-        <p:nvSpPr>
-          <p:cNvPr id="8" name="Rounded Rectangle 7"/>
-          <p:cNvSpPr/>
-          <p:nvPr/>
-        </p:nvSpPr>
-        <p:spPr>
-          <a:xfrm>
-            <a:off x="700887" y="3383280"/>
-            <a:ext cx="3474720" cy="1280160"/>
-          </a:xfrm>
-          <a:prstGeom prst="roundRect">
-            <a:avLst/>
-          </a:prstGeom>
-          <a:solidFill>
-            <a:srgbClr val="0F1E3D"/>
-          </a:solidFill>
-          <a:ln>
-            <a:noFill/>
-          </a:ln>
-        </p:spPr>
-        <p:style>
-          <a:lnRef idx="1">
-            <a:schemeClr val="accent1"/>
-          </a:lnRef>
-          <a:fillRef idx="3">
-            <a:schemeClr val="accent1"/>
-          </a:fillRef>
-          <a:effectRef idx="2">
-            <a:schemeClr val="accent1"/>
-          </a:effectRef>
-          <a:fontRef idx="minor">
-            <a:schemeClr val="lt1"/>
-          </a:fontRef>
-        </p:style>
-        <p:txBody>
-          <a:bodyPr rtlCol="0" anchor="ctr" wrap="square" lIns="182880" rIns="182880" tIns="137160" bIns="91440"/>
-          <a:lstStyle/>
-          <a:p>
-            <a:pPr algn="ctr"/>
-            <a:r>
-              <a:rPr sz="3600" b="1">
-                <a:solidFill>
-                  <a:srgbClr val="FFFFFF"/>
-                </a:solidFill>
-                <a:latin typeface="Helvetica"/>
-              </a:rPr>
-              <a:t>43</a:t>
-            </a:r>
-          </a:p>
-          <a:p>
-            <a:pPr algn="ctr"/>
-            <a:r>
-              <a:rPr sz="1300">
-                <a:solidFill>
-                  <a:srgbClr val="CCCCD4"/>
-                </a:solidFill>
-                <a:latin typeface="Helvetica"/>
-              </a:rPr>
-              <a:t>Step types</a:t>
-            </a:r>
-          </a:p>
-        </p:txBody>
-      </p:sp>
-      <p:sp>
-        <p:nvSpPr>
-          <p:cNvPr id="9" name="Rounded Rectangle 8"/>
-          <p:cNvSpPr/>
-          <p:nvPr/>
-        </p:nvSpPr>
-        <p:spPr>
-          <a:xfrm>
-            <a:off x="4358487" y="3383280"/>
-            <a:ext cx="3474720" cy="1280160"/>
-          </a:xfrm>
-          <a:prstGeom prst="roundRect">
-            <a:avLst/>
-          </a:prstGeom>
-          <a:solidFill>
-            <a:srgbClr val="0F1E3D"/>
-          </a:solidFill>
-          <a:ln>
-            <a:noFill/>
-          </a:ln>
-        </p:spPr>
-        <p:style>
-          <a:lnRef idx="1">
-            <a:schemeClr val="accent1"/>
-          </a:lnRef>
-          <a:fillRef idx="3">
-            <a:schemeClr val="accent1"/>
-          </a:fillRef>
-          <a:effectRef idx="2">
-            <a:schemeClr val="accent1"/>
-          </a:effectRef>
-          <a:fontRef idx="minor">
-            <a:schemeClr val="lt1"/>
-          </a:fontRef>
-        </p:style>
-        <p:txBody>
-          <a:bodyPr rtlCol="0" anchor="ctr" wrap="square" lIns="182880" rIns="182880" tIns="137160" bIns="91440"/>
-          <a:lstStyle/>
-          <a:p>
-            <a:pPr algn="ctr"/>
-            <a:r>
-              <a:rPr sz="3600" b="1">
-                <a:solidFill>
-                  <a:srgbClr val="FFFFFF"/>
-                </a:solidFill>
-                <a:latin typeface="Helvetica"/>
-              </a:rPr>
-              <a:t>172</a:t>
-            </a:r>
-          </a:p>
-          <a:p>
-            <a:pPr algn="ctr"/>
-            <a:r>
-              <a:rPr sz="1300">
-                <a:solidFill>
-                  <a:srgbClr val="CCCCD4"/>
-                </a:solidFill>
-                <a:latin typeface="Helvetica"/>
-              </a:rPr>
-              <a:t>Jinja filters</a:t>
-            </a:r>
-          </a:p>
-        </p:txBody>
-      </p:sp>
-      <p:sp>
-        <p:nvSpPr>
-          <p:cNvPr id="10" name="Rounded Rectangle 9"/>
-          <p:cNvSpPr/>
-          <p:nvPr/>
-        </p:nvSpPr>
-        <p:spPr>
-          <a:xfrm>
-            <a:off x="8016087" y="3383280"/>
-            <a:ext cx="3474720" cy="1280160"/>
-          </a:xfrm>
-          <a:prstGeom prst="roundRect">
-            <a:avLst/>
-          </a:prstGeom>
-          <a:solidFill>
-            <a:srgbClr val="0F1E3D"/>
-          </a:solidFill>
-          <a:ln>
-            <a:noFill/>
-          </a:ln>
-        </p:spPr>
-        <p:style>
-          <a:lnRef idx="1">
-            <a:schemeClr val="accent1"/>
-          </a:lnRef>
-          <a:fillRef idx="3">
-            <a:schemeClr val="accent1"/>
-          </a:fillRef>
-          <a:effectRef idx="2">
-            <a:schemeClr val="accent1"/>
-          </a:effectRef>
-          <a:fontRef idx="minor">
-            <a:schemeClr val="lt1"/>
-          </a:fontRef>
-        </p:style>
-        <p:txBody>
-          <a:bodyPr rtlCol="0" anchor="ctr" wrap="square" lIns="182880" rIns="182880" tIns="137160" bIns="91440"/>
-          <a:lstStyle/>
-          <a:p>
-            <a:pPr algn="ctr"/>
-            <a:r>
-              <a:rPr sz="3600" b="1">
-                <a:solidFill>
-                  <a:srgbClr val="FFFFFF"/>
-                </a:solidFill>
-                <a:latin typeface="Helvetica"/>
-              </a:rPr>
-              <a:t>1,664</a:t>
-            </a:r>
-          </a:p>
-          <a:p>
-            <a:pPr algn="ctr"/>
-            <a:r>
-              <a:rPr sz="1300">
-                <a:solidFill>
-                  <a:srgbClr val="CCCCD4"/>
-                </a:solidFill>
-                <a:latin typeface="Helvetica"/>
-              </a:rPr>
-              <a:t>Live playbooks</a:t>
-            </a:r>
-          </a:p>
-        </p:txBody>
-      </p:sp>
-      <p:sp>
-        <p:nvSpPr>
-          <p:cNvPr id="11" name="TextBox 10"/>
-          <p:cNvSpPr txBox="1"/>
-          <p:nvPr/>
-        </p:nvSpPr>
-        <p:spPr>
-          <a:xfrm>
-            <a:off x="548640" y="4937760"/>
-            <a:ext cx="11094415" cy="731520"/>
-          </a:xfrm>
-          <a:prstGeom prst="rect">
-            <a:avLst/>
-          </a:prstGeom>
-          <a:noFill/>
-        </p:spPr>
-        <p:txBody>
-          <a:bodyPr wrap="square">
-            <a:spAutoFit/>
-          </a:bodyPr>
-          <a:lstStyle/>
-          <a:p>
-            <a:pPr algn="l"/>
-            <a:r>
-              <a:rPr sz="1300" b="1">
-                <a:solidFill>
-                  <a:srgbClr val="E83E3E"/>
-                </a:solidFill>
-                <a:latin typeface="Helvetica"/>
-              </a:rPr>
-              <a:t>Trust ladder: 1,959 rows confirmed live + tested. The agent does SQL lookups before it touches an LLM.</a:t>
+            <a:pPr algn="l">
+              <a:spcAft>
+                <a:spcPts val="800"/>
+              </a:spcAft>
+            </a:pPr>
+            <a:r>
+              <a:rPr sz="2000">
+                <a:solidFill>
+                  <a:srgbClr val="4A4A4A"/>
+                </a:solidFill>
+                <a:latin typeface="Helvetica"/>
+              </a:rPr>
+              <a:t>•  Hard rules pin the YAML shape — no negotiation on canonical form</a:t>
+            </a:r>
+          </a:p>
+          <a:p>
+            <a:pPr algn="l">
+              <a:spcAft>
+                <a:spcPts val="800"/>
+              </a:spcAft>
+            </a:pPr>
+            <a:r>
+              <a:rPr sz="2000">
+                <a:solidFill>
+                  <a:srgbClr val="4A4A4A"/>
+                </a:solidFill>
+                <a:latin typeface="Helvetica"/>
+              </a:rPr>
+              <a:t>•  Required workflow: recipe lookup → schema lookup → draft → validate → analyze → done</a:t>
+            </a:r>
+          </a:p>
+          <a:p>
+            <a:pPr algn="l">
+              <a:spcAft>
+                <a:spcPts val="800"/>
+              </a:spcAft>
+            </a:pPr>
+            <a:r>
+              <a:rPr sz="2000">
+                <a:solidFill>
+                  <a:srgbClr val="4A4A4A"/>
+                </a:solidFill>
+                <a:latin typeface="Helvetica"/>
+              </a:rPr>
+              <a:t>•  Mandatory analyze gate: do NOT declare done until error_count == 0</a:t>
+            </a:r>
+          </a:p>
+          <a:p>
+            <a:pPr algn="l">
+              <a:spcAft>
+                <a:spcPts val="800"/>
+              </a:spcAft>
+            </a:pPr>
+            <a:r>
+              <a:rPr sz="2000">
+                <a:solidFill>
+                  <a:srgbClr val="4A4A4A"/>
+                </a:solidFill>
+                <a:latin typeface="Helvetica"/>
+              </a:rPr>
+              <a:t>•  Per-diagnostic-kind fix strategies baked into the prompt — no prose freelancing</a:t>
+            </a:r>
+          </a:p>
+          <a:p>
+            <a:pPr algn="l">
+              <a:spcAft>
+                <a:spcPts val="800"/>
+              </a:spcAft>
+            </a:pPr>
+            <a:r>
+              <a:rPr sz="2000">
+                <a:solidFill>
+                  <a:srgbClr val="4A4A4A"/>
+                </a:solidFill>
+                <a:latin typeface="Helvetica"/>
+              </a:rPr>
+              <a:t>•  FSR runtime semantics block: live-verified shapes the LLM must not invent</a:t>
+            </a:r>
+          </a:p>
+          <a:p>
+            <a:pPr algn="l">
+              <a:spcAft>
+                <a:spcPts val="800"/>
+              </a:spcAft>
+            </a:pPr>
+            <a:r>
+              <a:rPr sz="2000">
+                <a:solidFill>
+                  <a:srgbClr val="4A4A4A"/>
+                </a:solidFill>
+                <a:latin typeface="Helvetica"/>
+              </a:rPr>
+              <a:t>•  Tool error contract: failures return {ok:false, code, suggestions} — agent retries structurally</a:t>
             </a:r>
           </a:p>
         </p:txBody>
@@ -5890,7 +5281,7 @@
                 </a:solidFill>
                 <a:latin typeface="Helvetica"/>
               </a:rPr>
-              <a:t>What we've indexed — third-party APIs</a:t>
+              <a:t>Two distinct agent flows</a:t>
             </a:r>
           </a:p>
         </p:txBody>
@@ -5903,8 +5294,8 @@
         </p:nvSpPr>
         <p:spPr>
           <a:xfrm>
-            <a:off x="548640" y="1143000"/>
-            <a:ext cx="11094415" cy="548640"/>
+            <a:off x="548640" y="1371600"/>
+            <a:ext cx="11094415" cy="4937760"/>
           </a:xfrm>
           <a:prstGeom prst="rect">
             <a:avLst/>
@@ -5917,29 +5308,147 @@
           </a:bodyPr>
           <a:lstStyle/>
           <a:p>
-            <a:pPr algn="l"/>
-            <a:r>
-              <a:rPr sz="1400" b="0">
-                <a:solidFill>
-                  <a:srgbClr val="4A4A4A"/>
-                </a:solidFill>
-                <a:latin typeface="Helvetica"/>
-              </a:rPr>
-              <a:t>The HTTP virtual-connector corpus: thousands of vendors reachable without a native connector.</a:t>
-            </a:r>
-          </a:p>
-        </p:txBody>
-      </p:sp>
-      <p:sp>
-        <p:nvSpPr>
-          <p:cNvPr id="5" name="Rounded Rectangle 4"/>
+            <a:pPr algn="l">
+              <a:spcAft>
+                <a:spcPts val="800"/>
+              </a:spcAft>
+            </a:pPr>
+            <a:r>
+              <a:rPr sz="2000">
+                <a:solidFill>
+                  <a:srgbClr val="4A4A4A"/>
+                </a:solidFill>
+                <a:latin typeface="Helvetica"/>
+              </a:rPr>
+              <a:t>•  Authoring (new playbook): intent → recipes → schemas → YAML → validate → analyze → push</a:t>
+            </a:r>
+          </a:p>
+          <a:p>
+            <a:pPr algn="l">
+              <a:spcAft>
+                <a:spcPts val="800"/>
+              </a:spcAft>
+            </a:pPr>
+            <a:r>
+              <a:rPr sz="2000">
+                <a:solidFill>
+                  <a:srgbClr val="4A4A4A"/>
+                </a:solidFill>
+                <a:latin typeface="Helvetica"/>
+              </a:rPr>
+              <a:t>•      "Build me a playbook to enrich every alert with VirusTotal"</a:t>
+            </a:r>
+          </a:p>
+          <a:p>
+            <a:pPr algn="l">
+              <a:spcAft>
+                <a:spcPts val="800"/>
+              </a:spcAft>
+            </a:pPr>
+            <a:r>
+              <a:rPr sz="2000">
+                <a:solidFill>
+                  <a:srgbClr val="4A4A4A"/>
+                </a:solidFill>
+                <a:latin typeface="Helvetica"/>
+              </a:rPr>
+              <a:t>•  Troubleshooting (existing): pull → analyze → suggest_fix → patch → re-analyze → diff → push</a:t>
+            </a:r>
+          </a:p>
+          <a:p>
+            <a:pPr algn="l">
+              <a:spcAft>
+                <a:spcPts val="800"/>
+              </a:spcAft>
+            </a:pPr>
+            <a:r>
+              <a:rPr sz="2000">
+                <a:solidFill>
+                  <a:srgbClr val="4A4A4A"/>
+                </a:solidFill>
+                <a:latin typeface="Helvetica"/>
+              </a:rPr>
+              <a:t>•      "My playbook is broken — figure it out"</a:t>
+            </a:r>
+          </a:p>
+          <a:p>
+            <a:pPr algn="l">
+              <a:spcAft>
+                <a:spcPts val="800"/>
+              </a:spcAft>
+            </a:pPr>
+            <a:r>
+              <a:rPr sz="2000">
+                <a:solidFill>
+                  <a:srgbClr val="4A4A4A"/>
+                </a:solidFill>
+                <a:latin typeface="Helvetica"/>
+              </a:rPr>
+              <a:t>•  Same MCP tools, same cornerstones — what changes is the entry point + the gate order</a:t>
+            </a:r>
+          </a:p>
+          <a:p>
+            <a:pPr algn="l">
+              <a:spcAft>
+                <a:spcPts val="800"/>
+              </a:spcAft>
+            </a:pPr>
+            <a:r>
+              <a:rPr sz="2000">
+                <a:solidFill>
+                  <a:srgbClr val="4A4A4A"/>
+                </a:solidFill>
+                <a:latin typeface="Helvetica"/>
+              </a:rPr>
+              <a:t>•  If the agent skips the analyze gate, the runtime catches it. The system is the safety net.</a:t>
+            </a:r>
+          </a:p>
+        </p:txBody>
+      </p:sp>
+      <p:sp>
+        <p:nvSpPr>
+          <p:cNvPr id="5" name="TextBox 4"/>
+          <p:cNvSpPr txBox="1"/>
+          <p:nvPr/>
+        </p:nvSpPr>
+        <p:spPr>
+          <a:xfrm>
+            <a:off x="548640" y="3611880"/>
+            <a:ext cx="5410047" cy="320040"/>
+          </a:xfrm>
+          <a:prstGeom prst="rect">
+            <a:avLst/>
+          </a:prstGeom>
+          <a:noFill/>
+        </p:spPr>
+        <p:txBody>
+          <a:bodyPr wrap="none">
+            <a:spAutoFit/>
+          </a:bodyPr>
+          <a:lstStyle/>
+          <a:p>
+            <a:r>
+              <a:rPr b="1" sz="1300">
+                <a:solidFill>
+                  <a:srgbClr val="0F1E3D"/>
+                </a:solidFill>
+                <a:latin typeface="Helvetica"/>
+              </a:rPr>
+              <a:t>Authoring (new)</a:t>
+            </a:r>
+          </a:p>
+        </p:txBody>
+      </p:sp>
+      <p:sp>
+        <p:nvSpPr>
+          <p:cNvPr id="6" name="Rounded Rectangle 5"/>
           <p:cNvSpPr/>
           <p:nvPr/>
         </p:nvSpPr>
         <p:spPr>
           <a:xfrm>
-            <a:off x="700887" y="1920240"/>
-            <a:ext cx="3474720" cy="1280160"/>
+            <a:off x="548640" y="4023360"/>
+            <a:ext cx="733675" cy="502920"/>
           </a:xfrm>
           <a:prstGeom prst="roundRect">
             <a:avLst/>
@@ -5966,44 +5475,32 @@
           </a:fontRef>
         </p:style>
         <p:txBody>
-          <a:bodyPr rtlCol="0" anchor="ctr" wrap="square" lIns="182880" rIns="182880" tIns="137160" bIns="91440"/>
+          <a:bodyPr rtlCol="0" anchor="ctr"/>
           <a:lstStyle/>
           <a:p>
             <a:pPr algn="ctr"/>
             <a:r>
-              <a:rPr sz="3600" b="1">
+              <a:rPr sz="900">
                 <a:solidFill>
                   <a:srgbClr val="FFFFFF"/>
                 </a:solidFill>
                 <a:latin typeface="Helvetica"/>
               </a:rPr>
-              <a:t>6,927</a:t>
-            </a:r>
-          </a:p>
-          <a:p>
-            <a:pPr algn="ctr"/>
-            <a:r>
-              <a:rPr sz="1300">
-                <a:solidFill>
-                  <a:srgbClr val="CCCCD4"/>
-                </a:solidFill>
-                <a:latin typeface="Helvetica"/>
-              </a:rPr>
-              <a:t>Products covered</a:t>
-            </a:r>
-          </a:p>
-        </p:txBody>
-      </p:sp>
-      <p:sp>
-        <p:nvSpPr>
-          <p:cNvPr id="6" name="Rounded Rectangle 5"/>
+              <a:t>intent</a:t>
+            </a:r>
+          </a:p>
+        </p:txBody>
+      </p:sp>
+      <p:sp>
+        <p:nvSpPr>
+          <p:cNvPr id="7" name="Rounded Rectangle 6"/>
           <p:cNvSpPr/>
           <p:nvPr/>
         </p:nvSpPr>
         <p:spPr>
           <a:xfrm>
-            <a:off x="4358487" y="1920240"/>
-            <a:ext cx="3474720" cy="1280160"/>
+            <a:off x="1328035" y="4023360"/>
+            <a:ext cx="733675" cy="502920"/>
           </a:xfrm>
           <a:prstGeom prst="roundRect">
             <a:avLst/>
@@ -6030,44 +5527,32 @@
           </a:fontRef>
         </p:style>
         <p:txBody>
-          <a:bodyPr rtlCol="0" anchor="ctr" wrap="square" lIns="182880" rIns="182880" tIns="137160" bIns="91440"/>
+          <a:bodyPr rtlCol="0" anchor="ctr"/>
           <a:lstStyle/>
           <a:p>
             <a:pPr algn="ctr"/>
             <a:r>
-              <a:rPr sz="3600" b="1">
+              <a:rPr sz="900">
                 <a:solidFill>
                   <a:srgbClr val="FFFFFF"/>
                 </a:solidFill>
                 <a:latin typeface="Helvetica"/>
               </a:rPr>
-              <a:t>207,419</a:t>
-            </a:r>
-          </a:p>
-          <a:p>
-            <a:pPr algn="ctr"/>
-            <a:r>
-              <a:rPr sz="1300">
-                <a:solidFill>
-                  <a:srgbClr val="CCCCD4"/>
-                </a:solidFill>
-                <a:latin typeface="Helvetica"/>
-              </a:rPr>
-              <a:t>API examples</a:t>
-            </a:r>
-          </a:p>
-        </p:txBody>
-      </p:sp>
-      <p:sp>
-        <p:nvSpPr>
-          <p:cNvPr id="7" name="Rounded Rectangle 6"/>
+              <a:t>find_recipe</a:t>
+            </a:r>
+          </a:p>
+        </p:txBody>
+      </p:sp>
+      <p:sp>
+        <p:nvSpPr>
+          <p:cNvPr id="8" name="Rounded Rectangle 7"/>
           <p:cNvSpPr/>
           <p:nvPr/>
         </p:nvSpPr>
         <p:spPr>
           <a:xfrm>
-            <a:off x="8016087" y="1920240"/>
-            <a:ext cx="3474720" cy="1280160"/>
+            <a:off x="2107430" y="4023360"/>
+            <a:ext cx="733675" cy="502920"/>
           </a:xfrm>
           <a:prstGeom prst="roundRect">
             <a:avLst/>
@@ -6094,44 +5579,32 @@
           </a:fontRef>
         </p:style>
         <p:txBody>
-          <a:bodyPr rtlCol="0" anchor="ctr" wrap="square" lIns="182880" rIns="182880" tIns="137160" bIns="91440"/>
+          <a:bodyPr rtlCol="0" anchor="ctr"/>
           <a:lstStyle/>
           <a:p>
             <a:pPr algn="ctr"/>
             <a:r>
-              <a:rPr sz="3600" b="1">
+              <a:rPr sz="900">
                 <a:solidFill>
                   <a:srgbClr val="FFFFFF"/>
                 </a:solidFill>
                 <a:latin typeface="Helvetica"/>
               </a:rPr>
-              <a:t>6,272</a:t>
-            </a:r>
-          </a:p>
-          <a:p>
-            <a:pPr algn="ctr"/>
-            <a:r>
-              <a:rPr sz="1300">
-                <a:solidFill>
-                  <a:srgbClr val="CCCCD4"/>
-                </a:solidFill>
-                <a:latin typeface="Helvetica"/>
-              </a:rPr>
-              <a:t>Lifecycle records</a:t>
-            </a:r>
-          </a:p>
-        </p:txBody>
-      </p:sp>
-      <p:sp>
-        <p:nvSpPr>
-          <p:cNvPr id="8" name="Rounded Rectangle 7"/>
+              <a:t>find_operation</a:t>
+            </a:r>
+          </a:p>
+        </p:txBody>
+      </p:sp>
+      <p:sp>
+        <p:nvSpPr>
+          <p:cNvPr id="9" name="Rounded Rectangle 8"/>
           <p:cNvSpPr/>
           <p:nvPr/>
         </p:nvSpPr>
         <p:spPr>
           <a:xfrm>
-            <a:off x="700887" y="3383280"/>
-            <a:ext cx="3474720" cy="1280160"/>
+            <a:off x="2886825" y="4023360"/>
+            <a:ext cx="733675" cy="502920"/>
           </a:xfrm>
           <a:prstGeom prst="roundRect">
             <a:avLst/>
@@ -6158,44 +5631,32 @@
           </a:fontRef>
         </p:style>
         <p:txBody>
-          <a:bodyPr rtlCol="0" anchor="ctr" wrap="square" lIns="182880" rIns="182880" tIns="137160" bIns="91440"/>
+          <a:bodyPr rtlCol="0" anchor="ctr"/>
           <a:lstStyle/>
           <a:p>
             <a:pPr algn="ctr"/>
             <a:r>
-              <a:rPr sz="3600" b="1">
+              <a:rPr sz="900">
                 <a:solidFill>
                   <a:srgbClr val="FFFFFF"/>
                 </a:solidFill>
                 <a:latin typeface="Helvetica"/>
               </a:rPr>
-              <a:t>33,783</a:t>
-            </a:r>
-          </a:p>
-          <a:p>
-            <a:pPr algn="ctr"/>
-            <a:r>
-              <a:rPr sz="1300">
-                <a:solidFill>
-                  <a:srgbClr val="CCCCD4"/>
-                </a:solidFill>
-                <a:latin typeface="Helvetica"/>
-              </a:rPr>
-              <a:t>Microsoft Graph alone</a:t>
-            </a:r>
-          </a:p>
-        </p:txBody>
-      </p:sp>
-      <p:sp>
-        <p:nvSpPr>
-          <p:cNvPr id="9" name="Rounded Rectangle 8"/>
+              <a:t>draft YAML</a:t>
+            </a:r>
+          </a:p>
+        </p:txBody>
+      </p:sp>
+      <p:sp>
+        <p:nvSpPr>
+          <p:cNvPr id="10" name="Rounded Rectangle 9"/>
           <p:cNvSpPr/>
           <p:nvPr/>
         </p:nvSpPr>
         <p:spPr>
           <a:xfrm>
-            <a:off x="4358487" y="3383280"/>
-            <a:ext cx="3474720" cy="1280160"/>
+            <a:off x="3666221" y="4023360"/>
+            <a:ext cx="733675" cy="502920"/>
           </a:xfrm>
           <a:prstGeom prst="roundRect">
             <a:avLst/>
@@ -6222,44 +5683,32 @@
           </a:fontRef>
         </p:style>
         <p:txBody>
-          <a:bodyPr rtlCol="0" anchor="ctr" wrap="square" lIns="182880" rIns="182880" tIns="137160" bIns="91440"/>
+          <a:bodyPr rtlCol="0" anchor="ctr"/>
           <a:lstStyle/>
           <a:p>
             <a:pPr algn="ctr"/>
             <a:r>
-              <a:rPr sz="3600" b="1">
+              <a:rPr sz="900">
                 <a:solidFill>
                   <a:srgbClr val="FFFFFF"/>
                 </a:solidFill>
                 <a:latin typeface="Helvetica"/>
               </a:rPr>
-              <a:t>13,818</a:t>
-            </a:r>
-          </a:p>
-          <a:p>
-            <a:pPr algn="ctr"/>
-            <a:r>
-              <a:rPr sz="1300">
-                <a:solidFill>
-                  <a:srgbClr val="CCCCD4"/>
-                </a:solidFill>
-                <a:latin typeface="Helvetica"/>
-              </a:rPr>
-              <a:t>GitHub v3 REST</a:t>
-            </a:r>
-          </a:p>
-        </p:txBody>
-      </p:sp>
-      <p:sp>
-        <p:nvSpPr>
-          <p:cNvPr id="10" name="Rounded Rectangle 9"/>
+              <a:t>validate</a:t>
+            </a:r>
+          </a:p>
+        </p:txBody>
+      </p:sp>
+      <p:sp>
+        <p:nvSpPr>
+          <p:cNvPr id="11" name="Rounded Rectangle 10"/>
           <p:cNvSpPr/>
           <p:nvPr/>
         </p:nvSpPr>
         <p:spPr>
           <a:xfrm>
-            <a:off x="8016087" y="3383280"/>
-            <a:ext cx="3474720" cy="1280160"/>
+            <a:off x="4445616" y="4023360"/>
+            <a:ext cx="733675" cy="502920"/>
           </a:xfrm>
           <a:prstGeom prst="roundRect">
             <a:avLst/>
@@ -6286,44 +5735,482 @@
           </a:fontRef>
         </p:style>
         <p:txBody>
-          <a:bodyPr rtlCol="0" anchor="ctr" wrap="square" lIns="182880" rIns="182880" tIns="137160" bIns="91440"/>
+          <a:bodyPr rtlCol="0" anchor="ctr"/>
           <a:lstStyle/>
           <a:p>
             <a:pPr algn="ctr"/>
             <a:r>
-              <a:rPr sz="3600" b="1">
+              <a:rPr sz="900">
                 <a:solidFill>
                   <a:srgbClr val="FFFFFF"/>
                 </a:solidFill>
                 <a:latin typeface="Helvetica"/>
               </a:rPr>
-              <a:t>FTS5</a:t>
-            </a:r>
-          </a:p>
+              <a:t>analyze</a:t>
+            </a:r>
+          </a:p>
+        </p:txBody>
+      </p:sp>
+      <p:sp>
+        <p:nvSpPr>
+          <p:cNvPr id="12" name="Rounded Rectangle 11"/>
+          <p:cNvSpPr/>
+          <p:nvPr/>
+        </p:nvSpPr>
+        <p:spPr>
+          <a:xfrm>
+            <a:off x="5225011" y="4023360"/>
+            <a:ext cx="733675" cy="502920"/>
+          </a:xfrm>
+          <a:prstGeom prst="roundRect">
+            <a:avLst/>
+          </a:prstGeom>
+          <a:solidFill>
+            <a:srgbClr val="0F1E3D"/>
+          </a:solidFill>
+          <a:ln>
+            <a:noFill/>
+          </a:ln>
+        </p:spPr>
+        <p:style>
+          <a:lnRef idx="1">
+            <a:schemeClr val="accent1"/>
+          </a:lnRef>
+          <a:fillRef idx="3">
+            <a:schemeClr val="accent1"/>
+          </a:fillRef>
+          <a:effectRef idx="2">
+            <a:schemeClr val="accent1"/>
+          </a:effectRef>
+          <a:fontRef idx="minor">
+            <a:schemeClr val="lt1"/>
+          </a:fontRef>
+        </p:style>
+        <p:txBody>
+          <a:bodyPr rtlCol="0" anchor="ctr"/>
+          <a:lstStyle/>
           <a:p>
             <a:pPr algn="ctr"/>
             <a:r>
-              <a:rPr sz="1300">
-                <a:solidFill>
-                  <a:srgbClr val="CCCCD4"/>
-                </a:solidFill>
-                <a:latin typeface="Helvetica"/>
-              </a:rPr>
-              <a:t>Full-text indexed</a:t>
-            </a:r>
-          </a:p>
-        </p:txBody>
-      </p:sp>
-      <p:sp>
-        <p:nvSpPr>
-          <p:cNvPr id="11" name="TextBox 10"/>
+              <a:rPr sz="900">
+                <a:solidFill>
+                  <a:srgbClr val="FFFFFF"/>
+                </a:solidFill>
+                <a:latin typeface="Helvetica"/>
+              </a:rPr>
+              <a:t>push</a:t>
+            </a:r>
+          </a:p>
+        </p:txBody>
+      </p:sp>
+      <p:sp>
+        <p:nvSpPr>
+          <p:cNvPr id="13" name="TextBox 12"/>
           <p:cNvSpPr txBox="1"/>
           <p:nvPr/>
         </p:nvSpPr>
         <p:spPr>
           <a:xfrm>
-            <a:off x="548640" y="4937760"/>
-            <a:ext cx="11094415" cy="731520"/>
+            <a:off x="6233007" y="3611880"/>
+            <a:ext cx="5410047" cy="320040"/>
+          </a:xfrm>
+          <a:prstGeom prst="rect">
+            <a:avLst/>
+          </a:prstGeom>
+          <a:noFill/>
+        </p:spPr>
+        <p:txBody>
+          <a:bodyPr wrap="none">
+            <a:spAutoFit/>
+          </a:bodyPr>
+          <a:lstStyle/>
+          <a:p>
+            <a:r>
+              <a:rPr b="1" sz="1300">
+                <a:solidFill>
+                  <a:srgbClr val="E83E3E"/>
+                </a:solidFill>
+                <a:latin typeface="Helvetica"/>
+              </a:rPr>
+              <a:t>Troubleshooting (existing)</a:t>
+            </a:r>
+          </a:p>
+        </p:txBody>
+      </p:sp>
+      <p:sp>
+        <p:nvSpPr>
+          <p:cNvPr id="14" name="Rounded Rectangle 13"/>
+          <p:cNvSpPr/>
+          <p:nvPr/>
+        </p:nvSpPr>
+        <p:spPr>
+          <a:xfrm>
+            <a:off x="6233007" y="4023360"/>
+            <a:ext cx="733675" cy="502920"/>
+          </a:xfrm>
+          <a:prstGeom prst="roundRect">
+            <a:avLst/>
+          </a:prstGeom>
+          <a:solidFill>
+            <a:srgbClr val="E83E3E"/>
+          </a:solidFill>
+          <a:ln>
+            <a:noFill/>
+          </a:ln>
+        </p:spPr>
+        <p:style>
+          <a:lnRef idx="1">
+            <a:schemeClr val="accent1"/>
+          </a:lnRef>
+          <a:fillRef idx="3">
+            <a:schemeClr val="accent1"/>
+          </a:fillRef>
+          <a:effectRef idx="2">
+            <a:schemeClr val="accent1"/>
+          </a:effectRef>
+          <a:fontRef idx="minor">
+            <a:schemeClr val="lt1"/>
+          </a:fontRef>
+        </p:style>
+        <p:txBody>
+          <a:bodyPr rtlCol="0" anchor="ctr"/>
+          <a:lstStyle/>
+          <a:p>
+            <a:pPr algn="ctr"/>
+            <a:r>
+              <a:rPr sz="900">
+                <a:solidFill>
+                  <a:srgbClr val="FFFFFF"/>
+                </a:solidFill>
+                <a:latin typeface="Helvetica"/>
+              </a:rPr>
+              <a:t>pull</a:t>
+            </a:r>
+          </a:p>
+        </p:txBody>
+      </p:sp>
+      <p:sp>
+        <p:nvSpPr>
+          <p:cNvPr id="15" name="Rounded Rectangle 14"/>
+          <p:cNvSpPr/>
+          <p:nvPr/>
+        </p:nvSpPr>
+        <p:spPr>
+          <a:xfrm>
+            <a:off x="7012402" y="4023360"/>
+            <a:ext cx="733675" cy="502920"/>
+          </a:xfrm>
+          <a:prstGeom prst="roundRect">
+            <a:avLst/>
+          </a:prstGeom>
+          <a:solidFill>
+            <a:srgbClr val="E83E3E"/>
+          </a:solidFill>
+          <a:ln>
+            <a:noFill/>
+          </a:ln>
+        </p:spPr>
+        <p:style>
+          <a:lnRef idx="1">
+            <a:schemeClr val="accent1"/>
+          </a:lnRef>
+          <a:fillRef idx="3">
+            <a:schemeClr val="accent1"/>
+          </a:fillRef>
+          <a:effectRef idx="2">
+            <a:schemeClr val="accent1"/>
+          </a:effectRef>
+          <a:fontRef idx="minor">
+            <a:schemeClr val="lt1"/>
+          </a:fontRef>
+        </p:style>
+        <p:txBody>
+          <a:bodyPr rtlCol="0" anchor="ctr"/>
+          <a:lstStyle/>
+          <a:p>
+            <a:pPr algn="ctr"/>
+            <a:r>
+              <a:rPr sz="900">
+                <a:solidFill>
+                  <a:srgbClr val="FFFFFF"/>
+                </a:solidFill>
+                <a:latin typeface="Helvetica"/>
+              </a:rPr>
+              <a:t>analyze</a:t>
+            </a:r>
+          </a:p>
+        </p:txBody>
+      </p:sp>
+      <p:sp>
+        <p:nvSpPr>
+          <p:cNvPr id="16" name="Rounded Rectangle 15"/>
+          <p:cNvSpPr/>
+          <p:nvPr/>
+        </p:nvSpPr>
+        <p:spPr>
+          <a:xfrm>
+            <a:off x="7791797" y="4023360"/>
+            <a:ext cx="733675" cy="502920"/>
+          </a:xfrm>
+          <a:prstGeom prst="roundRect">
+            <a:avLst/>
+          </a:prstGeom>
+          <a:solidFill>
+            <a:srgbClr val="E83E3E"/>
+          </a:solidFill>
+          <a:ln>
+            <a:noFill/>
+          </a:ln>
+        </p:spPr>
+        <p:style>
+          <a:lnRef idx="1">
+            <a:schemeClr val="accent1"/>
+          </a:lnRef>
+          <a:fillRef idx="3">
+            <a:schemeClr val="accent1"/>
+          </a:fillRef>
+          <a:effectRef idx="2">
+            <a:schemeClr val="accent1"/>
+          </a:effectRef>
+          <a:fontRef idx="minor">
+            <a:schemeClr val="lt1"/>
+          </a:fontRef>
+        </p:style>
+        <p:txBody>
+          <a:bodyPr rtlCol="0" anchor="ctr"/>
+          <a:lstStyle/>
+          <a:p>
+            <a:pPr algn="ctr"/>
+            <a:r>
+              <a:rPr sz="900">
+                <a:solidFill>
+                  <a:srgbClr val="FFFFFF"/>
+                </a:solidFill>
+                <a:latin typeface="Helvetica"/>
+              </a:rPr>
+              <a:t>diagnostics</a:t>
+            </a:r>
+          </a:p>
+        </p:txBody>
+      </p:sp>
+      <p:sp>
+        <p:nvSpPr>
+          <p:cNvPr id="17" name="Rounded Rectangle 16"/>
+          <p:cNvSpPr/>
+          <p:nvPr/>
+        </p:nvSpPr>
+        <p:spPr>
+          <a:xfrm>
+            <a:off x="8571192" y="4023360"/>
+            <a:ext cx="733675" cy="502920"/>
+          </a:xfrm>
+          <a:prstGeom prst="roundRect">
+            <a:avLst/>
+          </a:prstGeom>
+          <a:solidFill>
+            <a:srgbClr val="E83E3E"/>
+          </a:solidFill>
+          <a:ln>
+            <a:noFill/>
+          </a:ln>
+        </p:spPr>
+        <p:style>
+          <a:lnRef idx="1">
+            <a:schemeClr val="accent1"/>
+          </a:lnRef>
+          <a:fillRef idx="3">
+            <a:schemeClr val="accent1"/>
+          </a:fillRef>
+          <a:effectRef idx="2">
+            <a:schemeClr val="accent1"/>
+          </a:effectRef>
+          <a:fontRef idx="minor">
+            <a:schemeClr val="lt1"/>
+          </a:fontRef>
+        </p:style>
+        <p:txBody>
+          <a:bodyPr rtlCol="0" anchor="ctr"/>
+          <a:lstStyle/>
+          <a:p>
+            <a:pPr algn="ctr"/>
+            <a:r>
+              <a:rPr sz="900">
+                <a:solidFill>
+                  <a:srgbClr val="FFFFFF"/>
+                </a:solidFill>
+                <a:latin typeface="Helvetica"/>
+              </a:rPr>
+              <a:t>suggest_fix</a:t>
+            </a:r>
+          </a:p>
+        </p:txBody>
+      </p:sp>
+      <p:sp>
+        <p:nvSpPr>
+          <p:cNvPr id="18" name="Rounded Rectangle 17"/>
+          <p:cNvSpPr/>
+          <p:nvPr/>
+        </p:nvSpPr>
+        <p:spPr>
+          <a:xfrm>
+            <a:off x="9350588" y="4023360"/>
+            <a:ext cx="733675" cy="502920"/>
+          </a:xfrm>
+          <a:prstGeom prst="roundRect">
+            <a:avLst/>
+          </a:prstGeom>
+          <a:solidFill>
+            <a:srgbClr val="E83E3E"/>
+          </a:solidFill>
+          <a:ln>
+            <a:noFill/>
+          </a:ln>
+        </p:spPr>
+        <p:style>
+          <a:lnRef idx="1">
+            <a:schemeClr val="accent1"/>
+          </a:lnRef>
+          <a:fillRef idx="3">
+            <a:schemeClr val="accent1"/>
+          </a:fillRef>
+          <a:effectRef idx="2">
+            <a:schemeClr val="accent1"/>
+          </a:effectRef>
+          <a:fontRef idx="minor">
+            <a:schemeClr val="lt1"/>
+          </a:fontRef>
+        </p:style>
+        <p:txBody>
+          <a:bodyPr rtlCol="0" anchor="ctr"/>
+          <a:lstStyle/>
+          <a:p>
+            <a:pPr algn="ctr"/>
+            <a:r>
+              <a:rPr sz="900">
+                <a:solidFill>
+                  <a:srgbClr val="FFFFFF"/>
+                </a:solidFill>
+                <a:latin typeface="Helvetica"/>
+              </a:rPr>
+              <a:t>patch</a:t>
+            </a:r>
+          </a:p>
+        </p:txBody>
+      </p:sp>
+      <p:sp>
+        <p:nvSpPr>
+          <p:cNvPr id="19" name="Rounded Rectangle 18"/>
+          <p:cNvSpPr/>
+          <p:nvPr/>
+        </p:nvSpPr>
+        <p:spPr>
+          <a:xfrm>
+            <a:off x="10129983" y="4023360"/>
+            <a:ext cx="733675" cy="502920"/>
+          </a:xfrm>
+          <a:prstGeom prst="roundRect">
+            <a:avLst/>
+          </a:prstGeom>
+          <a:solidFill>
+            <a:srgbClr val="E83E3E"/>
+          </a:solidFill>
+          <a:ln>
+            <a:noFill/>
+          </a:ln>
+        </p:spPr>
+        <p:style>
+          <a:lnRef idx="1">
+            <a:schemeClr val="accent1"/>
+          </a:lnRef>
+          <a:fillRef idx="3">
+            <a:schemeClr val="accent1"/>
+          </a:fillRef>
+          <a:effectRef idx="2">
+            <a:schemeClr val="accent1"/>
+          </a:effectRef>
+          <a:fontRef idx="minor">
+            <a:schemeClr val="lt1"/>
+          </a:fontRef>
+        </p:style>
+        <p:txBody>
+          <a:bodyPr rtlCol="0" anchor="ctr"/>
+          <a:lstStyle/>
+          <a:p>
+            <a:pPr algn="ctr"/>
+            <a:r>
+              <a:rPr sz="900">
+                <a:solidFill>
+                  <a:srgbClr val="FFFFFF"/>
+                </a:solidFill>
+                <a:latin typeface="Helvetica"/>
+              </a:rPr>
+              <a:t>re-analyze</a:t>
+            </a:r>
+          </a:p>
+        </p:txBody>
+      </p:sp>
+      <p:sp>
+        <p:nvSpPr>
+          <p:cNvPr id="20" name="Rounded Rectangle 19"/>
+          <p:cNvSpPr/>
+          <p:nvPr/>
+        </p:nvSpPr>
+        <p:spPr>
+          <a:xfrm>
+            <a:off x="10909378" y="4023360"/>
+            <a:ext cx="733675" cy="502920"/>
+          </a:xfrm>
+          <a:prstGeom prst="roundRect">
+            <a:avLst/>
+          </a:prstGeom>
+          <a:solidFill>
+            <a:srgbClr val="E83E3E"/>
+          </a:solidFill>
+          <a:ln>
+            <a:noFill/>
+          </a:ln>
+        </p:spPr>
+        <p:style>
+          <a:lnRef idx="1">
+            <a:schemeClr val="accent1"/>
+          </a:lnRef>
+          <a:fillRef idx="3">
+            <a:schemeClr val="accent1"/>
+          </a:fillRef>
+          <a:effectRef idx="2">
+            <a:schemeClr val="accent1"/>
+          </a:effectRef>
+          <a:fontRef idx="minor">
+            <a:schemeClr val="lt1"/>
+          </a:fontRef>
+        </p:style>
+        <p:txBody>
+          <a:bodyPr rtlCol="0" anchor="ctr"/>
+          <a:lstStyle/>
+          <a:p>
+            <a:pPr algn="ctr"/>
+            <a:r>
+              <a:rPr sz="900">
+                <a:solidFill>
+                  <a:srgbClr val="FFFFFF"/>
+                </a:solidFill>
+                <a:latin typeface="Helvetica"/>
+              </a:rPr>
+              <a:t>diff/push</a:t>
+            </a:r>
+          </a:p>
+        </p:txBody>
+      </p:sp>
+      <p:sp>
+        <p:nvSpPr>
+          <p:cNvPr id="21" name="TextBox 20"/>
+          <p:cNvSpPr txBox="1"/>
+          <p:nvPr/>
+        </p:nvSpPr>
+        <p:spPr>
+          <a:xfrm>
+            <a:off x="548640" y="5212080"/>
+            <a:ext cx="11094415" cy="365760"/>
           </a:xfrm>
           <a:prstGeom prst="rect">
             <a:avLst/>
@@ -6336,15 +6223,15 @@
           </a:bodyPr>
           <a:lstStyle/>
           <a:p>
-            <a:pPr algn="l"/>
-            <a:r>
-              <a:rPr sz="1300" b="1">
-                <a:solidFill>
-                  <a:srgbClr val="E83E3E"/>
-                </a:solidFill>
-                <a:latin typeface="Helvetica"/>
-              </a:rPr>
-              <a:t>search_api_examples + synthesize_http_step turn any of these into a working http_request step. Deterministic — no LLM in the translation.</a:t>
+            <a:pPr algn="ctr"/>
+            <a:r>
+              <a:rPr sz="1200" b="0">
+                <a:solidFill>
+                  <a:srgbClr val="4A4A4A"/>
+                </a:solidFill>
+                <a:latin typeface="Helvetica"/>
+              </a:rPr>
+              <a:t>Both flows share the same MCP tools. The analyze gate is the seatbelt — it can't be bypassed by either flow.</a:t>
             </a:r>
           </a:p>
         </p:txBody>
@@ -6448,7 +6335,7 @@
                 </a:solidFill>
                 <a:latin typeface="Helvetica"/>
               </a:rPr>
-              <a:t>What's already shipped</a:t>
+              <a:t>The visual editor closes the loop for humans</a:t>
             </a:r>
           </a:p>
         </p:txBody>
@@ -6487,87 +6374,103 @@
                 </a:solidFill>
                 <a:latin typeface="Helvetica"/>
               </a:rPr>
-              <a:t>•  714 connectors / 6,773 ops / 1,664 playbooks indexed in SQLite</a:t>
-            </a:r>
-          </a:p>
-          <a:p>
-            <a:pPr algn="l">
-              <a:spcAft>
-                <a:spcPts val="800"/>
-              </a:spcAft>
-            </a:pPr>
-            <a:r>
-              <a:rPr sz="2000">
-                <a:solidFill>
-                  <a:srgbClr val="4A4A4A"/>
-                </a:solidFill>
-                <a:latin typeface="Helvetica"/>
-              </a:rPr>
-              <a:t>•  Compiler v1: parser → resolver → validator → emitter (round-trip lossless)</a:t>
-            </a:r>
-          </a:p>
-          <a:p>
-            <a:pPr algn="l">
-              <a:spcAft>
-                <a:spcPts val="800"/>
-              </a:spcAft>
-            </a:pPr>
-            <a:r>
-              <a:rPr sz="2000">
-                <a:solidFill>
-                  <a:srgbClr val="4A4A4A"/>
-                </a:solidFill>
-                <a:latin typeface="Helvetica"/>
-              </a:rPr>
-              <a:t>•  20+ MCP tools, live-tested against a real FSR appliance</a:t>
-            </a:r>
-          </a:p>
-          <a:p>
-            <a:pPr algn="l">
-              <a:spcAft>
-                <a:spcPts val="800"/>
-              </a:spcAft>
-            </a:pPr>
-            <a:r>
-              <a:rPr sz="2000">
-                <a:solidFill>
-                  <a:srgbClr val="4A4A4A"/>
-                </a:solidFill>
-                <a:latin typeface="Helvetica"/>
-              </a:rPr>
-              <a:t>•  E2E runner: 11/11 fixtures green; 4 LLM-driven storyboards in DEMO.md</a:t>
-            </a:r>
-          </a:p>
-          <a:p>
-            <a:pPr algn="l">
-              <a:spcAft>
-                <a:spcPts val="800"/>
-              </a:spcAft>
-            </a:pPr>
-            <a:r>
-              <a:rPr sz="2000">
-                <a:solidFill>
-                  <a:srgbClr val="4A4A4A"/>
-                </a:solidFill>
-                <a:latin typeface="Helvetica"/>
-              </a:rPr>
-              <a:t>•  Recipe generators (feed + data ingest) + layered ruleset validator</a:t>
-            </a:r>
-          </a:p>
-          <a:p>
-            <a:pPr algn="l">
-              <a:spcAft>
-                <a:spcPts val="800"/>
-              </a:spcAft>
-            </a:pPr>
-            <a:r>
-              <a:rPr sz="2000">
-                <a:solidFill>
-                  <a:srgbClr val="4A4A4A"/>
-                </a:solidFill>
-                <a:latin typeface="Helvetica"/>
-              </a:rPr>
-              <a:t>•  HTTP virtual-connector tools wired; inventory surface (fsrpb inventory)</a:t>
+              <a:t>•  Same cornerstones, rendered as canvas chrome:</a:t>
+            </a:r>
+          </a:p>
+          <a:p>
+            <a:pPr algn="l">
+              <a:spcAft>
+                <a:spcPts val="800"/>
+              </a:spcAft>
+            </a:pPr>
+            <a:r>
+              <a:rPr sz="2000">
+                <a:solidFill>
+                  <a:srgbClr val="4A4A4A"/>
+                </a:solidFill>
+                <a:latin typeface="Helvetica"/>
+              </a:rPr>
+              <a:t>•      • Per-node red/amber badge keyed off worst diagnostic for that step</a:t>
+            </a:r>
+          </a:p>
+          <a:p>
+            <a:pPr algn="l">
+              <a:spcAft>
+                <a:spcPts val="800"/>
+              </a:spcAft>
+            </a:pPr>
+            <a:r>
+              <a:rPr sz="2000">
+                <a:solidFill>
+                  <a:srgbClr val="4A4A4A"/>
+                </a:solidFill>
+                <a:latin typeface="Helvetica"/>
+              </a:rPr>
+              <a:t>•      • Diagnostics drawer lists every render-path issue with kind + location + suggestion</a:t>
+            </a:r>
+          </a:p>
+          <a:p>
+            <a:pPr algn="l">
+              <a:spcAft>
+                <a:spcPts val="800"/>
+              </a:spcAft>
+            </a:pPr>
+            <a:r>
+              <a:rPr sz="2000">
+                <a:solidFill>
+                  <a:srgbClr val="4A4A4A"/>
+                </a:solidFill>
+                <a:latin typeface="Helvetica"/>
+              </a:rPr>
+              <a:t>•      • Suggest-fix button per row → before/after diff → Apply → auto re-analyze</a:t>
+            </a:r>
+          </a:p>
+          <a:p>
+            <a:pPr algn="l">
+              <a:spcAft>
+                <a:spcPts val="800"/>
+              </a:spcAft>
+            </a:pPr>
+            <a:r>
+              <a:rPr sz="2000">
+                <a:solidFill>
+                  <a:srgbClr val="4A4A4A"/>
+                </a:solidFill>
+                <a:latin typeface="Helvetica"/>
+              </a:rPr>
+              <a:t>•      • Click step_id → canvas jumps to the offending node, inspector opens</a:t>
+            </a:r>
+          </a:p>
+          <a:p>
+            <a:pPr algn="l">
+              <a:spcAft>
+                <a:spcPts val="800"/>
+              </a:spcAft>
+            </a:pPr>
+            <a:r>
+              <a:rPr sz="2000">
+                <a:solidFill>
+                  <a:srgbClr val="4A4A4A"/>
+                </a:solidFill>
+                <a:latin typeface="Helvetica"/>
+              </a:rPr>
+              <a:t>•      • Node colors mirror the simulator's family tagging — no hidden context</a:t>
+            </a:r>
+          </a:p>
+          <a:p>
+            <a:pPr algn="l">
+              <a:spcAft>
+                <a:spcPts val="800"/>
+              </a:spcAft>
+            </a:pPr>
+            <a:r>
+              <a:rPr sz="2000">
+                <a:solidFill>
+                  <a:srgbClr val="4A4A4A"/>
+                </a:solidFill>
+                <a:latin typeface="Helvetica"/>
+              </a:rPr>
+              <a:t>•  Every action goes through the same MCP tools the agent uses. One source of truth.</a:t>
             </a:r>
           </a:p>
         </p:txBody>
@@ -6671,7 +6574,7 @@
                 </a:solidFill>
                 <a:latin typeface="Helvetica"/>
               </a:rPr>
-              <a:t>What's next</a:t>
+              <a:t>The full MCP toolbelt — 49 tools the agent can call</a:t>
             </a:r>
           </a:p>
         </p:txBody>
@@ -6684,8 +6587,8 @@
         </p:nvSpPr>
         <p:spPr>
           <a:xfrm>
-            <a:off x="548640" y="1371600"/>
-            <a:ext cx="11094415" cy="4937760"/>
+            <a:off x="548640" y="1051560"/>
+            <a:ext cx="11094415" cy="457200"/>
           </a:xfrm>
           <a:prstGeom prst="rect">
             <a:avLst/>
@@ -6698,99 +6601,1002 @@
           </a:bodyPr>
           <a:lstStyle/>
           <a:p>
-            <a:pPr algn="l">
-              <a:spcAft>
-                <a:spcPts val="800"/>
-              </a:spcAft>
-            </a:pPr>
-            <a:r>
-              <a:rPr sz="2000">
-                <a:solidFill>
-                  <a:srgbClr val="4A4A4A"/>
-                </a:solidFill>
-                <a:latin typeface="Helvetica"/>
-              </a:rPr>
-              <a:t>•  L2 prechecks (picklist resolvability, connector installation)</a:t>
-            </a:r>
-          </a:p>
-          <a:p>
-            <a:pPr algn="l">
-              <a:spcAft>
-                <a:spcPts val="800"/>
-              </a:spcAft>
-            </a:pPr>
-            <a:r>
-              <a:rPr sz="2000">
-                <a:solidFill>
-                  <a:srgbClr val="4A4A4A"/>
-                </a:solidFill>
-                <a:latin typeface="Helvetica"/>
-              </a:rPr>
-              <a:t>•  resolve_yaml + variable-reachability ruleset — highest-ROI single check we don't have</a:t>
-            </a:r>
-          </a:p>
-          <a:p>
-            <a:pPr algn="l">
-              <a:spcAft>
-                <a:spcPts val="800"/>
-              </a:spcAft>
-            </a:pPr>
-            <a:r>
-              <a:rPr sz="2000">
-                <a:solidFill>
-                  <a:srgbClr val="4A4A4A"/>
-                </a:solidFill>
-                <a:latin typeface="Helvetica"/>
-              </a:rPr>
-              <a:t>•  dry_run_playbook (L3) interactive stepper + assert_playbook_outcome (L5)</a:t>
-            </a:r>
-          </a:p>
-          <a:p>
-            <a:pPr algn="l">
-              <a:spcAft>
-                <a:spcPts val="800"/>
-              </a:spcAft>
-            </a:pPr>
-            <a:r>
-              <a:rPr sz="2000">
-                <a:solidFill>
-                  <a:srgbClr val="4A4A4A"/>
-                </a:solidFill>
-                <a:latin typeface="Helvetica"/>
-              </a:rPr>
-              <a:t>•  LLM evaluation harness — proves "any LLM works" with measurements</a:t>
-            </a:r>
-          </a:p>
-          <a:p>
-            <a:pPr algn="l">
-              <a:spcAft>
-                <a:spcPts val="800"/>
-              </a:spcAft>
-            </a:pPr>
-            <a:r>
-              <a:rPr sz="2000">
-                <a:solidFill>
-                  <a:srgbClr val="4A4A4A"/>
-                </a:solidFill>
-                <a:latin typeface="Helvetica"/>
-              </a:rPr>
-              <a:t>•  Recipe expansion: enrichment, triage, containment, HTTP virtual-connector recipes</a:t>
-            </a:r>
-          </a:p>
-          <a:p>
-            <a:pPr algn="l">
-              <a:spcAft>
-                <a:spcPts val="800"/>
-              </a:spcAft>
-            </a:pPr>
-            <a:r>
-              <a:rPr sz="2000">
-                <a:solidFill>
-                  <a:srgbClr val="4A4A4A"/>
-                </a:solidFill>
-                <a:latin typeface="Helvetica"/>
-              </a:rPr>
-              <a:t>•  Inventory web dashboard + transcript capture for demo replay</a:t>
+            <a:pPr algn="l"/>
+            <a:r>
+              <a:rPr sz="1300" b="0">
+                <a:solidFill>
+                  <a:srgbClr val="4A4A4A"/>
+                </a:solidFill>
+                <a:latin typeface="Helvetica"/>
+              </a:rPr>
+              <a:t>Same tools serve chat, CLI, and visual editor. Every box below is one MCP call away.</a:t>
+            </a:r>
+          </a:p>
+        </p:txBody>
+      </p:sp>
+      <p:sp>
+        <p:nvSpPr>
+          <p:cNvPr id="5" name="Rectangle 4"/>
+          <p:cNvSpPr/>
+          <p:nvPr/>
+        </p:nvSpPr>
+        <p:spPr>
+          <a:xfrm>
+            <a:off x="548640" y="1645920"/>
+            <a:ext cx="2109155" cy="411480"/>
+          </a:xfrm>
+          <a:prstGeom prst="rect">
+            <a:avLst/>
+          </a:prstGeom>
+          <a:solidFill>
+            <a:srgbClr val="0F1E3D"/>
+          </a:solidFill>
+          <a:ln>
+            <a:noFill/>
+          </a:ln>
+        </p:spPr>
+        <p:style>
+          <a:lnRef idx="1">
+            <a:schemeClr val="accent1"/>
+          </a:lnRef>
+          <a:fillRef idx="3">
+            <a:schemeClr val="accent1"/>
+          </a:fillRef>
+          <a:effectRef idx="2">
+            <a:schemeClr val="accent1"/>
+          </a:effectRef>
+          <a:fontRef idx="minor">
+            <a:schemeClr val="lt1"/>
+          </a:fontRef>
+        </p:style>
+        <p:txBody>
+          <a:bodyPr rtlCol="0" anchor="ctr"/>
+          <a:lstStyle/>
+          <a:p>
+            <a:pPr algn="ctr"/>
+            <a:r>
+              <a:rPr sz="1300" b="1">
+                <a:solidFill>
+                  <a:srgbClr val="FFFFFF"/>
+                </a:solidFill>
+                <a:latin typeface="Helvetica"/>
+              </a:rPr>
+              <a:t>Discover  (23)</a:t>
+            </a:r>
+          </a:p>
+        </p:txBody>
+      </p:sp>
+      <p:sp>
+        <p:nvSpPr>
+          <p:cNvPr id="6" name="TextBox 5"/>
+          <p:cNvSpPr txBox="1"/>
+          <p:nvPr/>
+        </p:nvSpPr>
+        <p:spPr>
+          <a:xfrm>
+            <a:off x="548640" y="2103120"/>
+            <a:ext cx="2109155" cy="4297680"/>
+          </a:xfrm>
+          <a:prstGeom prst="rect">
+            <a:avLst/>
+          </a:prstGeom>
+          <a:noFill/>
+        </p:spPr>
+        <p:txBody>
+          <a:bodyPr wrap="square" rIns="45720">
+            <a:spAutoFit/>
+          </a:bodyPr>
+          <a:lstStyle/>
+          <a:p>
+            <a:pPr algn="l"/>
+            <a:r>
+              <a:rPr sz="800">
+                <a:solidFill>
+                  <a:srgbClr val="0F1E3D"/>
+                </a:solidFill>
+                <a:latin typeface="Menlo"/>
+              </a:rPr>
+              <a:t>find_connector</a:t>
+            </a:r>
+          </a:p>
+          <a:p>
+            <a:pPr algn="l"/>
+            <a:r>
+              <a:rPr sz="800">
+                <a:solidFill>
+                  <a:srgbClr val="0F1E3D"/>
+                </a:solidFill>
+                <a:latin typeface="Menlo"/>
+              </a:rPr>
+              <a:t>find_operation</a:t>
+            </a:r>
+          </a:p>
+          <a:p>
+            <a:pPr algn="l"/>
+            <a:r>
+              <a:rPr sz="800">
+                <a:solidFill>
+                  <a:srgbClr val="0F1E3D"/>
+                </a:solidFill>
+                <a:latin typeface="Menlo"/>
+              </a:rPr>
+              <a:t>find_step_type</a:t>
+            </a:r>
+          </a:p>
+          <a:p>
+            <a:pPr algn="l"/>
+            <a:r>
+              <a:rPr sz="800">
+                <a:solidFill>
+                  <a:srgbClr val="0F1E3D"/>
+                </a:solidFill>
+                <a:latin typeface="Menlo"/>
+              </a:rPr>
+              <a:t>find_step_examples</a:t>
+            </a:r>
+          </a:p>
+          <a:p>
+            <a:pPr algn="l"/>
+            <a:r>
+              <a:rPr sz="800">
+                <a:solidFill>
+                  <a:srgbClr val="0F1E3D"/>
+                </a:solidFill>
+                <a:latin typeface="Menlo"/>
+              </a:rPr>
+              <a:t>find_operation_example</a:t>
+            </a:r>
+          </a:p>
+          <a:p>
+            <a:pPr algn="l"/>
+            <a:r>
+              <a:rPr sz="800">
+                <a:solidFill>
+                  <a:srgbClr val="0F1E3D"/>
+                </a:solidFill>
+                <a:latin typeface="Menlo"/>
+              </a:rPr>
+              <a:t>find_recipe</a:t>
+            </a:r>
+          </a:p>
+          <a:p>
+            <a:pPr algn="l"/>
+            <a:r>
+              <a:rPr sz="800">
+                <a:solidFill>
+                  <a:srgbClr val="0F1E3D"/>
+                </a:solidFill>
+                <a:latin typeface="Menlo"/>
+              </a:rPr>
+              <a:t>find_step_recipe</a:t>
+            </a:r>
+          </a:p>
+          <a:p>
+            <a:pPr algn="l"/>
+            <a:r>
+              <a:rPr sz="800">
+                <a:solidFill>
+                  <a:srgbClr val="0F1E3D"/>
+                </a:solidFill>
+                <a:latin typeface="Menlo"/>
+              </a:rPr>
+              <a:t>find_jinja_filter</a:t>
+            </a:r>
+          </a:p>
+          <a:p>
+            <a:pPr algn="l"/>
+            <a:r>
+              <a:rPr sz="800">
+                <a:solidFill>
+                  <a:srgbClr val="0F1E3D"/>
+                </a:solidFill>
+                <a:latin typeface="Menlo"/>
+              </a:rPr>
+              <a:t>find_jinja_pattern</a:t>
+            </a:r>
+          </a:p>
+          <a:p>
+            <a:pPr algn="l"/>
+            <a:r>
+              <a:rPr sz="800">
+                <a:solidFill>
+                  <a:srgbClr val="0F1E3D"/>
+                </a:solidFill>
+                <a:latin typeface="Menlo"/>
+              </a:rPr>
+              <a:t>find_jinja_example</a:t>
+            </a:r>
+          </a:p>
+          <a:p>
+            <a:pPr algn="l"/>
+            <a:r>
+              <a:rPr sz="800">
+                <a:solidFill>
+                  <a:srgbClr val="0F1E3D"/>
+                </a:solidFill>
+                <a:latin typeface="Menlo"/>
+              </a:rPr>
+              <a:t>get_filter_examples</a:t>
+            </a:r>
+          </a:p>
+          <a:p>
+            <a:pPr algn="l"/>
+            <a:r>
+              <a:rPr sz="800">
+                <a:solidFill>
+                  <a:srgbClr val="0F1E3D"/>
+                </a:solidFill>
+                <a:latin typeface="Menlo"/>
+              </a:rPr>
+              <a:t>get_op_schema</a:t>
+            </a:r>
+          </a:p>
+          <a:p>
+            <a:pPr algn="l"/>
+            <a:r>
+              <a:rPr sz="800">
+                <a:solidFill>
+                  <a:srgbClr val="0F1E3D"/>
+                </a:solidFill>
+                <a:latin typeface="Menlo"/>
+              </a:rPr>
+              <a:t>get_step_type</a:t>
+            </a:r>
+          </a:p>
+          <a:p>
+            <a:pPr algn="l"/>
+            <a:r>
+              <a:rPr sz="800">
+                <a:solidFill>
+                  <a:srgbClr val="0F1E3D"/>
+                </a:solidFill>
+                <a:latin typeface="Menlo"/>
+              </a:rPr>
+              <a:t>get_picklist</a:t>
+            </a:r>
+          </a:p>
+          <a:p>
+            <a:pPr algn="l"/>
+            <a:r>
+              <a:rPr sz="800">
+                <a:solidFill>
+                  <a:srgbClr val="0F1E3D"/>
+                </a:solidFill>
+                <a:latin typeface="Menlo"/>
+              </a:rPr>
+              <a:t>list_picklists</a:t>
+            </a:r>
+          </a:p>
+          <a:p>
+            <a:pPr algn="l"/>
+            <a:r>
+              <a:rPr sz="800">
+                <a:solidFill>
+                  <a:srgbClr val="0F1E3D"/>
+                </a:solidFill>
+                <a:latin typeface="Menlo"/>
+              </a:rPr>
+              <a:t>picklist_for_field</a:t>
+            </a:r>
+          </a:p>
+          <a:p>
+            <a:pPr algn="l"/>
+            <a:r>
+              <a:rPr sz="800">
+                <a:solidFill>
+                  <a:srgbClr val="0F1E3D"/>
+                </a:solidFill>
+                <a:latin typeface="Menlo"/>
+              </a:rPr>
+              <a:t>search_playbooks</a:t>
+            </a:r>
+          </a:p>
+          <a:p>
+            <a:pPr algn="l"/>
+            <a:r>
+              <a:rPr sz="800">
+                <a:solidFill>
+                  <a:srgbClr val="0F1E3D"/>
+                </a:solidFill>
+                <a:latin typeface="Menlo"/>
+              </a:rPr>
+              <a:t>search_api_examples</a:t>
+            </a:r>
+          </a:p>
+          <a:p>
+            <a:pPr algn="l"/>
+            <a:r>
+              <a:rPr sz="800">
+                <a:solidFill>
+                  <a:srgbClr val="0F1E3D"/>
+                </a:solidFill>
+                <a:latin typeface="Menlo"/>
+              </a:rPr>
+              <a:t>list_tags</a:t>
+            </a:r>
+          </a:p>
+          <a:p>
+            <a:pPr algn="l"/>
+            <a:r>
+              <a:rPr sz="800">
+                <a:solidFill>
+                  <a:srgbClr val="0F1E3D"/>
+                </a:solidFill>
+                <a:latin typeface="Menlo"/>
+              </a:rPr>
+              <a:t>list_configured_connectors</a:t>
+            </a:r>
+          </a:p>
+          <a:p>
+            <a:pPr algn="l"/>
+            <a:r>
+              <a:rPr sz="800">
+                <a:solidFill>
+                  <a:srgbClr val="0F1E3D"/>
+                </a:solidFill>
+                <a:latin typeface="Menlo"/>
+              </a:rPr>
+              <a:t>list_connector_configurations</a:t>
+            </a:r>
+          </a:p>
+          <a:p>
+            <a:pPr algn="l"/>
+            <a:r>
+              <a:rPr sz="800">
+                <a:solidFill>
+                  <a:srgbClr val="0F1E3D"/>
+                </a:solidFill>
+                <a:latin typeface="Menlo"/>
+              </a:rPr>
+              <a:t>get_connector_icon</a:t>
+            </a:r>
+          </a:p>
+          <a:p>
+            <a:pPr algn="l"/>
+            <a:r>
+              <a:rPr sz="800">
+                <a:solidFill>
+                  <a:srgbClr val="0F1E3D"/>
+                </a:solidFill>
+                <a:latin typeface="Menlo"/>
+              </a:rPr>
+              <a:t>get_connector_source</a:t>
+            </a:r>
+          </a:p>
+        </p:txBody>
+      </p:sp>
+      <p:sp>
+        <p:nvSpPr>
+          <p:cNvPr id="7" name="Rectangle 6"/>
+          <p:cNvSpPr/>
+          <p:nvPr/>
+        </p:nvSpPr>
+        <p:spPr>
+          <a:xfrm>
+            <a:off x="2794955" y="1645920"/>
+            <a:ext cx="2109155" cy="411480"/>
+          </a:xfrm>
+          <a:prstGeom prst="rect">
+            <a:avLst/>
+          </a:prstGeom>
+          <a:solidFill>
+            <a:srgbClr val="E83E3E"/>
+          </a:solidFill>
+          <a:ln>
+            <a:noFill/>
+          </a:ln>
+        </p:spPr>
+        <p:style>
+          <a:lnRef idx="1">
+            <a:schemeClr val="accent1"/>
+          </a:lnRef>
+          <a:fillRef idx="3">
+            <a:schemeClr val="accent1"/>
+          </a:fillRef>
+          <a:effectRef idx="2">
+            <a:schemeClr val="accent1"/>
+          </a:effectRef>
+          <a:fontRef idx="minor">
+            <a:schemeClr val="lt1"/>
+          </a:fontRef>
+        </p:style>
+        <p:txBody>
+          <a:bodyPr rtlCol="0" anchor="ctr"/>
+          <a:lstStyle/>
+          <a:p>
+            <a:pPr algn="ctr"/>
+            <a:r>
+              <a:rPr sz="1300" b="1">
+                <a:solidFill>
+                  <a:srgbClr val="FFFFFF"/>
+                </a:solidFill>
+                <a:latin typeface="Helvetica"/>
+              </a:rPr>
+              <a:t>Build  (3)</a:t>
+            </a:r>
+          </a:p>
+        </p:txBody>
+      </p:sp>
+      <p:sp>
+        <p:nvSpPr>
+          <p:cNvPr id="8" name="TextBox 7"/>
+          <p:cNvSpPr txBox="1"/>
+          <p:nvPr/>
+        </p:nvSpPr>
+        <p:spPr>
+          <a:xfrm>
+            <a:off x="2794955" y="2103120"/>
+            <a:ext cx="2109155" cy="4297680"/>
+          </a:xfrm>
+          <a:prstGeom prst="rect">
+            <a:avLst/>
+          </a:prstGeom>
+          <a:noFill/>
+        </p:spPr>
+        <p:txBody>
+          <a:bodyPr wrap="square" rIns="45720">
+            <a:spAutoFit/>
+          </a:bodyPr>
+          <a:lstStyle/>
+          <a:p>
+            <a:pPr algn="l"/>
+            <a:r>
+              <a:rPr sz="1000">
+                <a:solidFill>
+                  <a:srgbClr val="0F1E3D"/>
+                </a:solidFill>
+                <a:latin typeface="Menlo"/>
+              </a:rPr>
+              <a:t>generate_recipe</a:t>
+            </a:r>
+          </a:p>
+          <a:p>
+            <a:pPr algn="l"/>
+            <a:r>
+              <a:rPr sz="1000">
+                <a:solidFill>
+                  <a:srgbClr val="0F1E3D"/>
+                </a:solidFill>
+                <a:latin typeface="Menlo"/>
+              </a:rPr>
+              <a:t>synthesize_http_step</a:t>
+            </a:r>
+          </a:p>
+          <a:p>
+            <a:pPr algn="l"/>
+            <a:r>
+              <a:rPr sz="1000">
+                <a:solidFill>
+                  <a:srgbClr val="0F1E3D"/>
+                </a:solidFill>
+                <a:latin typeface="Menlo"/>
+              </a:rPr>
+              <a:t>resolve_picklist_value</a:t>
+            </a:r>
+          </a:p>
+        </p:txBody>
+      </p:sp>
+      <p:sp>
+        <p:nvSpPr>
+          <p:cNvPr id="9" name="Rectangle 8"/>
+          <p:cNvSpPr/>
+          <p:nvPr/>
+        </p:nvSpPr>
+        <p:spPr>
+          <a:xfrm>
+            <a:off x="5041270" y="1645920"/>
+            <a:ext cx="2109155" cy="411480"/>
+          </a:xfrm>
+          <a:prstGeom prst="rect">
+            <a:avLst/>
+          </a:prstGeom>
+          <a:solidFill>
+            <a:srgbClr val="0E6B4F"/>
+          </a:solidFill>
+          <a:ln>
+            <a:noFill/>
+          </a:ln>
+        </p:spPr>
+        <p:style>
+          <a:lnRef idx="1">
+            <a:schemeClr val="accent1"/>
+          </a:lnRef>
+          <a:fillRef idx="3">
+            <a:schemeClr val="accent1"/>
+          </a:fillRef>
+          <a:effectRef idx="2">
+            <a:schemeClr val="accent1"/>
+          </a:effectRef>
+          <a:fontRef idx="minor">
+            <a:schemeClr val="lt1"/>
+          </a:fontRef>
+        </p:style>
+        <p:txBody>
+          <a:bodyPr rtlCol="0" anchor="ctr"/>
+          <a:lstStyle/>
+          <a:p>
+            <a:pPr algn="ctr"/>
+            <a:r>
+              <a:rPr sz="1300" b="1">
+                <a:solidFill>
+                  <a:srgbClr val="FFFFFF"/>
+                </a:solidFill>
+                <a:latin typeface="Helvetica"/>
+              </a:rPr>
+              <a:t>Validate (offline)  (11)</a:t>
+            </a:r>
+          </a:p>
+        </p:txBody>
+      </p:sp>
+      <p:sp>
+        <p:nvSpPr>
+          <p:cNvPr id="10" name="TextBox 9"/>
+          <p:cNvSpPr txBox="1"/>
+          <p:nvPr/>
+        </p:nvSpPr>
+        <p:spPr>
+          <a:xfrm>
+            <a:off x="5041270" y="2103120"/>
+            <a:ext cx="2109155" cy="4297680"/>
+          </a:xfrm>
+          <a:prstGeom prst="rect">
+            <a:avLst/>
+          </a:prstGeom>
+          <a:noFill/>
+        </p:spPr>
+        <p:txBody>
+          <a:bodyPr wrap="square" rIns="45720">
+            <a:spAutoFit/>
+          </a:bodyPr>
+          <a:lstStyle/>
+          <a:p>
+            <a:pPr algn="l"/>
+            <a:r>
+              <a:rPr sz="1000">
+                <a:solidFill>
+                  <a:srgbClr val="0F1E3D"/>
+                </a:solidFill>
+                <a:latin typeface="Menlo"/>
+              </a:rPr>
+              <a:t>validate_yaml</a:t>
+            </a:r>
+          </a:p>
+          <a:p>
+            <a:pPr algn="l"/>
+            <a:r>
+              <a:rPr sz="1000">
+                <a:solidFill>
+                  <a:srgbClr val="0F1E3D"/>
+                </a:solidFill>
+                <a:latin typeface="Menlo"/>
+              </a:rPr>
+              <a:t>compile_yaml</a:t>
+            </a:r>
+          </a:p>
+          <a:p>
+            <a:pPr algn="l"/>
+            <a:r>
+              <a:rPr sz="1000">
+                <a:solidFill>
+                  <a:srgbClr val="0F1E3D"/>
+                </a:solidFill>
+                <a:latin typeface="Menlo"/>
+              </a:rPr>
+              <a:t>resolve_yaml</a:t>
+            </a:r>
+          </a:p>
+          <a:p>
+            <a:pPr algn="l"/>
+            <a:r>
+              <a:rPr sz="1000">
+                <a:solidFill>
+                  <a:srgbClr val="0F1E3D"/>
+                </a:solidFill>
+                <a:latin typeface="Menlo"/>
+              </a:rPr>
+              <a:t>render_jinja</a:t>
+            </a:r>
+          </a:p>
+          <a:p>
+            <a:pPr algn="l"/>
+            <a:r>
+              <a:rPr sz="1000">
+                <a:solidFill>
+                  <a:srgbClr val="0F1E3D"/>
+                </a:solidFill>
+                <a:latin typeface="Menlo"/>
+              </a:rPr>
+              <a:t>analyze_playbook</a:t>
+            </a:r>
+          </a:p>
+          <a:p>
+            <a:pPr algn="l"/>
+            <a:r>
+              <a:rPr sz="1000">
+                <a:solidFill>
+                  <a:srgbClr val="0F1E3D"/>
+                </a:solidFill>
+                <a:latin typeface="Menlo"/>
+              </a:rPr>
+              <a:t>suggest_fix_for_diagnostic</a:t>
+            </a:r>
+          </a:p>
+          <a:p>
+            <a:pPr algn="l"/>
+            <a:r>
+              <a:rPr sz="1000">
+                <a:solidFill>
+                  <a:srgbClr val="0F1E3D"/>
+                </a:solidFill>
+                <a:latin typeface="Menlo"/>
+              </a:rPr>
+              <a:t>step_through_playbook</a:t>
+            </a:r>
+          </a:p>
+          <a:p>
+            <a:pPr algn="l"/>
+            <a:r>
+              <a:rPr sz="1000">
+                <a:solidFill>
+                  <a:srgbClr val="0F1E3D"/>
+                </a:solidFill>
+                <a:latin typeface="Menlo"/>
+              </a:rPr>
+              <a:t>step_test</a:t>
+            </a:r>
+          </a:p>
+          <a:p>
+            <a:pPr algn="l"/>
+            <a:r>
+              <a:rPr sz="1000">
+                <a:solidFill>
+                  <a:srgbClr val="0F1E3D"/>
+                </a:solidFill>
+                <a:latin typeface="Menlo"/>
+              </a:rPr>
+              <a:t>precheck_picklist_value</a:t>
+            </a:r>
+          </a:p>
+          <a:p>
+            <a:pPr algn="l"/>
+            <a:r>
+              <a:rPr sz="1000">
+                <a:solidFill>
+                  <a:srgbClr val="0F1E3D"/>
+                </a:solidFill>
+                <a:latin typeface="Menlo"/>
+              </a:rPr>
+              <a:t>precheck_connector_installed</a:t>
+            </a:r>
+          </a:p>
+          <a:p>
+            <a:pPr algn="l"/>
+            <a:r>
+              <a:rPr sz="1000">
+                <a:solidFill>
+                  <a:srgbClr val="0F1E3D"/>
+                </a:solidFill>
+                <a:latin typeface="Menlo"/>
+              </a:rPr>
+              <a:t>healthcheck_connector</a:t>
+            </a:r>
+          </a:p>
+        </p:txBody>
+      </p:sp>
+      <p:sp>
+        <p:nvSpPr>
+          <p:cNvPr id="11" name="Rectangle 10"/>
+          <p:cNvSpPr/>
+          <p:nvPr/>
+        </p:nvSpPr>
+        <p:spPr>
+          <a:xfrm>
+            <a:off x="7287585" y="1645920"/>
+            <a:ext cx="2109155" cy="411480"/>
+          </a:xfrm>
+          <a:prstGeom prst="rect">
+            <a:avLst/>
+          </a:prstGeom>
+          <a:solidFill>
+            <a:srgbClr val="C88600"/>
+          </a:solidFill>
+          <a:ln>
+            <a:noFill/>
+          </a:ln>
+        </p:spPr>
+        <p:style>
+          <a:lnRef idx="1">
+            <a:schemeClr val="accent1"/>
+          </a:lnRef>
+          <a:fillRef idx="3">
+            <a:schemeClr val="accent1"/>
+          </a:fillRef>
+          <a:effectRef idx="2">
+            <a:schemeClr val="accent1"/>
+          </a:effectRef>
+          <a:fontRef idx="minor">
+            <a:schemeClr val="lt1"/>
+          </a:fontRef>
+        </p:style>
+        <p:txBody>
+          <a:bodyPr rtlCol="0" anchor="ctr"/>
+          <a:lstStyle/>
+          <a:p>
+            <a:pPr algn="ctr"/>
+            <a:r>
+              <a:rPr sz="1300" b="1">
+                <a:solidFill>
+                  <a:srgbClr val="FFFFFF"/>
+                </a:solidFill>
+                <a:latin typeface="Helvetica"/>
+              </a:rPr>
+              <a:t>Live  (6)</a:t>
+            </a:r>
+          </a:p>
+        </p:txBody>
+      </p:sp>
+      <p:sp>
+        <p:nvSpPr>
+          <p:cNvPr id="12" name="TextBox 11"/>
+          <p:cNvSpPr txBox="1"/>
+          <p:nvPr/>
+        </p:nvSpPr>
+        <p:spPr>
+          <a:xfrm>
+            <a:off x="7287585" y="2103120"/>
+            <a:ext cx="2109155" cy="4297680"/>
+          </a:xfrm>
+          <a:prstGeom prst="rect">
+            <a:avLst/>
+          </a:prstGeom>
+          <a:noFill/>
+        </p:spPr>
+        <p:txBody>
+          <a:bodyPr wrap="square" rIns="45720">
+            <a:spAutoFit/>
+          </a:bodyPr>
+          <a:lstStyle/>
+          <a:p>
+            <a:pPr algn="l"/>
+            <a:r>
+              <a:rPr sz="1000">
+                <a:solidFill>
+                  <a:srgbClr val="0F1E3D"/>
+                </a:solidFill>
+                <a:latin typeface="Menlo"/>
+              </a:rPr>
+              <a:t>push_playbook</a:t>
+            </a:r>
+          </a:p>
+          <a:p>
+            <a:pPr algn="l"/>
+            <a:r>
+              <a:rPr sz="1000">
+                <a:solidFill>
+                  <a:srgbClr val="0F1E3D"/>
+                </a:solidFill>
+                <a:latin typeface="Menlo"/>
+              </a:rPr>
+              <a:t>run_op</a:t>
+            </a:r>
+          </a:p>
+          <a:p>
+            <a:pPr algn="l"/>
+            <a:r>
+              <a:rPr sz="1000">
+                <a:solidFill>
+                  <a:srgbClr val="0F1E3D"/>
+                </a:solidFill>
+                <a:latin typeface="Menlo"/>
+              </a:rPr>
+              <a:t>run_playbook</a:t>
+            </a:r>
+          </a:p>
+          <a:p>
+            <a:pPr algn="l"/>
+            <a:r>
+              <a:rPr sz="1000">
+                <a:solidFill>
+                  <a:srgbClr val="0F1E3D"/>
+                </a:solidFill>
+                <a:latin typeface="Menlo"/>
+              </a:rPr>
+              <a:t>dry_run_playbook</a:t>
+            </a:r>
+          </a:p>
+          <a:p>
+            <a:pPr algn="l"/>
+            <a:r>
+              <a:rPr sz="1000">
+                <a:solidFill>
+                  <a:srgbClr val="0F1E3D"/>
+                </a:solidFill>
+                <a:latin typeface="Menlo"/>
+              </a:rPr>
+              <a:t>search_module_records</a:t>
+            </a:r>
+          </a:p>
+          <a:p>
+            <a:pPr algn="l"/>
+            <a:r>
+              <a:rPr sz="1000">
+                <a:solidFill>
+                  <a:srgbClr val="0F1E3D"/>
+                </a:solidFill>
+                <a:latin typeface="Menlo"/>
+              </a:rPr>
+              <a:t>test_find_record</a:t>
+            </a:r>
+          </a:p>
+        </p:txBody>
+      </p:sp>
+      <p:sp>
+        <p:nvSpPr>
+          <p:cNvPr id="13" name="Rectangle 12"/>
+          <p:cNvSpPr/>
+          <p:nvPr/>
+        </p:nvSpPr>
+        <p:spPr>
+          <a:xfrm>
+            <a:off x="9533900" y="1645920"/>
+            <a:ext cx="2109155" cy="411480"/>
+          </a:xfrm>
+          <a:prstGeom prst="rect">
+            <a:avLst/>
+          </a:prstGeom>
+          <a:solidFill>
+            <a:srgbClr val="5A2D82"/>
+          </a:solidFill>
+          <a:ln>
+            <a:noFill/>
+          </a:ln>
+        </p:spPr>
+        <p:style>
+          <a:lnRef idx="1">
+            <a:schemeClr val="accent1"/>
+          </a:lnRef>
+          <a:fillRef idx="3">
+            <a:schemeClr val="accent1"/>
+          </a:fillRef>
+          <a:effectRef idx="2">
+            <a:schemeClr val="accent1"/>
+          </a:effectRef>
+          <a:fontRef idx="minor">
+            <a:schemeClr val="lt1"/>
+          </a:fontRef>
+        </p:style>
+        <p:txBody>
+          <a:bodyPr rtlCol="0" anchor="ctr"/>
+          <a:lstStyle/>
+          <a:p>
+            <a:pPr algn="ctr"/>
+            <a:r>
+              <a:rPr sz="1300" b="1">
+                <a:solidFill>
+                  <a:srgbClr val="FFFFFF"/>
+                </a:solidFill>
+                <a:latin typeface="Helvetica"/>
+              </a:rPr>
+              <a:t>Diagnose  (8)</a:t>
+            </a:r>
+          </a:p>
+        </p:txBody>
+      </p:sp>
+      <p:sp>
+        <p:nvSpPr>
+          <p:cNvPr id="14" name="TextBox 13"/>
+          <p:cNvSpPr txBox="1"/>
+          <p:nvPr/>
+        </p:nvSpPr>
+        <p:spPr>
+          <a:xfrm>
+            <a:off x="9533900" y="2103120"/>
+            <a:ext cx="2109155" cy="4297680"/>
+          </a:xfrm>
+          <a:prstGeom prst="rect">
+            <a:avLst/>
+          </a:prstGeom>
+          <a:noFill/>
+        </p:spPr>
+        <p:txBody>
+          <a:bodyPr wrap="square" rIns="45720">
+            <a:spAutoFit/>
+          </a:bodyPr>
+          <a:lstStyle/>
+          <a:p>
+            <a:pPr algn="l"/>
+            <a:r>
+              <a:rPr sz="1000">
+                <a:solidFill>
+                  <a:srgbClr val="0F1E3D"/>
+                </a:solidFill>
+                <a:latin typeface="Menlo"/>
+              </a:rPr>
+              <a:t>list_recent_failed_runs</a:t>
+            </a:r>
+          </a:p>
+          <a:p>
+            <a:pPr algn="l"/>
+            <a:r>
+              <a:rPr sz="1000">
+                <a:solidFill>
+                  <a:srgbClr val="0F1E3D"/>
+                </a:solidFill>
+                <a:latin typeface="Menlo"/>
+              </a:rPr>
+              <a:t>list_playbook_runs</a:t>
+            </a:r>
+          </a:p>
+          <a:p>
+            <a:pPr algn="l"/>
+            <a:r>
+              <a:rPr sz="1000">
+                <a:solidFill>
+                  <a:srgbClr val="0F1E3D"/>
+                </a:solidFill>
+                <a:latin typeface="Menlo"/>
+              </a:rPr>
+              <a:t>get_run_env</a:t>
+            </a:r>
+          </a:p>
+          <a:p>
+            <a:pPr algn="l"/>
+            <a:r>
+              <a:rPr sz="1000">
+                <a:solidFill>
+                  <a:srgbClr val="0F1E3D"/>
+                </a:solidFill>
+                <a:latin typeface="Menlo"/>
+              </a:rPr>
+              <a:t>diagnose_yaml_against_pb_execution</a:t>
+            </a:r>
+          </a:p>
+          <a:p>
+            <a:pPr algn="l"/>
+            <a:r>
+              <a:rPr sz="1000">
+                <a:solidFill>
+                  <a:srgbClr val="0F1E3D"/>
+                </a:solidFill>
+                <a:latin typeface="Menlo"/>
+              </a:rPr>
+              <a:t>assert_playbook_outcome</a:t>
+            </a:r>
+          </a:p>
+          <a:p>
+            <a:pPr algn="l"/>
+            <a:r>
+              <a:rPr sz="1000">
+                <a:solidFill>
+                  <a:srgbClr val="0F1E3D"/>
+                </a:solidFill>
+                <a:latin typeface="Menlo"/>
+              </a:rPr>
+              <a:t>verification_status</a:t>
+            </a:r>
+          </a:p>
+          <a:p>
+            <a:pPr algn="l"/>
+            <a:r>
+              <a:rPr sz="1000">
+                <a:solidFill>
+                  <a:srgbClr val="0F1E3D"/>
+                </a:solidFill>
+                <a:latin typeface="Menlo"/>
+              </a:rPr>
+              <a:t>review_chat_session</a:t>
+            </a:r>
+          </a:p>
+          <a:p>
+            <a:pPr algn="l"/>
+            <a:r>
+              <a:rPr sz="1000">
+                <a:solidFill>
+                  <a:srgbClr val="0F1E3D"/>
+                </a:solidFill>
+                <a:latin typeface="Menlo"/>
+              </a:rPr>
+              <a:t>review_recent_thumbs_down</a:t>
             </a:r>
           </a:p>
         </p:txBody>
@@ -7101,7 +7907,7 @@
                 </a:solidFill>
                 <a:latin typeface="Helvetica"/>
               </a:rPr>
-              <a:t>Takeaways</a:t>
+              <a:t>Recipes — from blank page to working playbook</a:t>
             </a:r>
           </a:p>
         </p:txBody>
@@ -7140,71 +7946,3160 @@
                 </a:solidFill>
                 <a:latin typeface="Helvetica"/>
               </a:rPr>
-              <a:t>•  Authoring surface ≠ execution engine — keep them separate, win on both</a:t>
-            </a:r>
-          </a:p>
-          <a:p>
-            <a:pPr algn="l">
-              <a:spcAft>
-                <a:spcPts val="800"/>
-              </a:spcAft>
-            </a:pPr>
-            <a:r>
-              <a:rPr sz="2000">
-                <a:solidFill>
-                  <a:srgbClr val="4A4A4A"/>
-                </a:solidFill>
-                <a:latin typeface="Helvetica"/>
-              </a:rPr>
-              <a:t>•  Agent + queryable spec + deterministic compiler + success ladder beats a visual designer</a:t>
-            </a:r>
-          </a:p>
-          <a:p>
-            <a:pPr algn="l">
-              <a:spcAft>
-                <a:spcPts val="800"/>
-              </a:spcAft>
-            </a:pPr>
-            <a:r>
-              <a:rPr sz="2000">
-                <a:solidFill>
-                  <a:srgbClr val="4A4A4A"/>
-                </a:solidFill>
-                <a:latin typeface="Helvetica"/>
-              </a:rPr>
-              <a:t>•  YAML in git is the unfair advantage: review, audit, promote, roll back</a:t>
-            </a:r>
-          </a:p>
-          <a:p>
-            <a:pPr algn="l">
-              <a:spcAft>
-                <a:spcPts val="800"/>
-              </a:spcAft>
-            </a:pPr>
-            <a:r>
-              <a:rPr sz="2000">
-                <a:solidFill>
-                  <a:srgbClr val="4A4A4A"/>
-                </a:solidFill>
-                <a:latin typeface="Helvetica"/>
-              </a:rPr>
-              <a:t>•  HTTP virtual-connector + 207K examples = thousands of vendors reachable today, no new code</a:t>
-            </a:r>
-          </a:p>
-          <a:p>
-            <a:pPr algn="l">
-              <a:spcAft>
-                <a:spcPts val="800"/>
-              </a:spcAft>
-            </a:pPr>
-            <a:r>
-              <a:rPr sz="2000">
-                <a:solidFill>
-                  <a:srgbClr val="4A4A4A"/>
-                </a:solidFill>
-                <a:latin typeface="Helvetica"/>
-              </a:rPr>
-              <a:t>•  Q&amp;A</a:t>
+              <a:t>•  Recipe generators emit known-good playbooks for common archetypes</a:t>
+            </a:r>
+          </a:p>
+          <a:p>
+            <a:pPr algn="l">
+              <a:spcAft>
+                <a:spcPts val="800"/>
+              </a:spcAft>
+            </a:pPr>
+            <a:r>
+              <a:rPr sz="2000">
+                <a:solidFill>
+                  <a:srgbClr val="4A4A4A"/>
+                </a:solidFill>
+                <a:latin typeface="Helvetica"/>
+              </a:rPr>
+              <a:t>•  Today: threat-feed ingestion, data ingestion (alerts/incidents)</a:t>
+            </a:r>
+          </a:p>
+          <a:p>
+            <a:pPr algn="l">
+              <a:spcAft>
+                <a:spcPts val="800"/>
+              </a:spcAft>
+            </a:pPr>
+            <a:r>
+              <a:rPr sz="2000">
+                <a:solidFill>
+                  <a:srgbClr val="4A4A4A"/>
+                </a:solidFill>
+                <a:latin typeface="Helvetica"/>
+              </a:rPr>
+              <a:t>•  Roadmap: enrichment, triage, containment, approval-gated actions, orchestration</a:t>
+            </a:r>
+          </a:p>
+          <a:p>
+            <a:pPr algn="l">
+              <a:spcAft>
+                <a:spcPts val="800"/>
+              </a:spcAft>
+            </a:pPr>
+            <a:r>
+              <a:rPr sz="2000">
+                <a:solidFill>
+                  <a:srgbClr val="4A4A4A"/>
+                </a:solidFill>
+                <a:latin typeface="Helvetica"/>
+              </a:rPr>
+              <a:t>•  Each recipe ships compile-clean, with TODO notes only where the user must intervene</a:t>
+            </a:r>
+          </a:p>
+          <a:p>
+            <a:pPr algn="l">
+              <a:spcAft>
+                <a:spcPts val="800"/>
+              </a:spcAft>
+            </a:pPr>
+            <a:r>
+              <a:rPr sz="2000">
+                <a:solidFill>
+                  <a:srgbClr val="4A4A4A"/>
+                </a:solidFill>
+                <a:latin typeface="Helvetica"/>
+              </a:rPr>
+              <a:t>•  Layered ruleset validator enforces archetype-specific rules</a:t>
+            </a:r>
+          </a:p>
+        </p:txBody>
+      </p:sp>
+    </p:spTree>
+  </p:cSld>
+  <p:clrMapOvr>
+    <a:masterClrMapping/>
+  </p:clrMapOvr>
+</p:sld>
+</file>
+
+<file path=ppt/slides/slide21.xml><?xml version="1.0" encoding="utf-8"?>
+<p:sld xmlns:a="http://schemas.openxmlformats.org/drawingml/2006/main" xmlns:p="http://schemas.openxmlformats.org/presentationml/2006/main" xmlns:r="http://schemas.openxmlformats.org/officeDocument/2006/relationships">
+  <p:cSld>
+    <p:bg>
+      <p:bgPr>
+        <a:solidFill>
+          <a:srgbClr val="F4F4F6"/>
+        </a:solidFill>
+        <a:effectLst/>
+      </p:bgPr>
+    </p:bg>
+    <p:spTree>
+      <p:nvGrpSpPr>
+        <p:cNvPr id="1" name=""/>
+        <p:cNvGrpSpPr/>
+        <p:nvPr/>
+      </p:nvGrpSpPr>
+      <p:grpSpPr/>
+      <p:sp>
+        <p:nvSpPr>
+          <p:cNvPr id="2" name="Rectangle 1"/>
+          <p:cNvSpPr/>
+          <p:nvPr/>
+        </p:nvSpPr>
+        <p:spPr>
+          <a:xfrm>
+            <a:off x="0" y="0"/>
+            <a:ext cx="12191695" cy="45720"/>
+          </a:xfrm>
+          <a:prstGeom prst="rect">
+            <a:avLst/>
+          </a:prstGeom>
+          <a:solidFill>
+            <a:srgbClr val="E83E3E"/>
+          </a:solidFill>
+          <a:ln>
+            <a:noFill/>
+          </a:ln>
+        </p:spPr>
+        <p:style>
+          <a:lnRef idx="1">
+            <a:schemeClr val="accent1"/>
+          </a:lnRef>
+          <a:fillRef idx="3">
+            <a:schemeClr val="accent1"/>
+          </a:fillRef>
+          <a:effectRef idx="2">
+            <a:schemeClr val="accent1"/>
+          </a:effectRef>
+          <a:fontRef idx="minor">
+            <a:schemeClr val="lt1"/>
+          </a:fontRef>
+        </p:style>
+        <p:txBody>
+          <a:bodyPr rtlCol="0" anchor="ctr"/>
+          <a:lstStyle/>
+          <a:p>
+            <a:pPr algn="ctr"/>
+          </a:p>
+        </p:txBody>
+      </p:sp>
+      <p:sp>
+        <p:nvSpPr>
+          <p:cNvPr id="3" name="TextBox 2"/>
+          <p:cNvSpPr txBox="1"/>
+          <p:nvPr/>
+        </p:nvSpPr>
+        <p:spPr>
+          <a:xfrm>
+            <a:off x="548640" y="365760"/>
+            <a:ext cx="11094415" cy="822960"/>
+          </a:xfrm>
+          <a:prstGeom prst="rect">
+            <a:avLst/>
+          </a:prstGeom>
+          <a:noFill/>
+        </p:spPr>
+        <p:txBody>
+          <a:bodyPr wrap="square">
+            <a:spAutoFit/>
+          </a:bodyPr>
+          <a:lstStyle/>
+          <a:p>
+            <a:pPr algn="l"/>
+            <a:r>
+              <a:rPr sz="3000" b="1">
+                <a:solidFill>
+                  <a:srgbClr val="0F1E3D"/>
+                </a:solidFill>
+                <a:latin typeface="Helvetica"/>
+              </a:rPr>
+              <a:t>HTTP virtual-connector — covering the long tail</a:t>
+            </a:r>
+          </a:p>
+        </p:txBody>
+      </p:sp>
+      <p:sp>
+        <p:nvSpPr>
+          <p:cNvPr id="4" name="TextBox 3"/>
+          <p:cNvSpPr txBox="1"/>
+          <p:nvPr/>
+        </p:nvSpPr>
+        <p:spPr>
+          <a:xfrm>
+            <a:off x="548640" y="1371600"/>
+            <a:ext cx="11094415" cy="4937760"/>
+          </a:xfrm>
+          <a:prstGeom prst="rect">
+            <a:avLst/>
+          </a:prstGeom>
+          <a:noFill/>
+        </p:spPr>
+        <p:txBody>
+          <a:bodyPr wrap="square">
+            <a:spAutoFit/>
+          </a:bodyPr>
+          <a:lstStyle/>
+          <a:p>
+            <a:pPr algn="l">
+              <a:spcAft>
+                <a:spcPts val="800"/>
+              </a:spcAft>
+            </a:pPr>
+            <a:r>
+              <a:rPr sz="2000">
+                <a:solidFill>
+                  <a:srgbClr val="4A4A4A"/>
+                </a:solidFill>
+                <a:latin typeface="Helvetica"/>
+              </a:rPr>
+              <a:t>•  FortiSOAR ships a generic HTTP connector (10 ops, including http_paginate)</a:t>
+            </a:r>
+          </a:p>
+          <a:p>
+            <a:pPr algn="l">
+              <a:spcAft>
+                <a:spcPts val="800"/>
+              </a:spcAft>
+            </a:pPr>
+            <a:r>
+              <a:rPr sz="2000">
+                <a:solidFill>
+                  <a:srgbClr val="4A4A4A"/>
+                </a:solidFill>
+                <a:latin typeface="Helvetica"/>
+              </a:rPr>
+              <a:t>•  We crawled 207,419 API examples across 6,927 third-party products</a:t>
+            </a:r>
+          </a:p>
+          <a:p>
+            <a:pPr algn="l">
+              <a:spcAft>
+                <a:spcPts val="800"/>
+              </a:spcAft>
+            </a:pPr>
+            <a:r>
+              <a:rPr sz="2000">
+                <a:solidFill>
+                  <a:srgbClr val="4A4A4A"/>
+                </a:solidFill>
+                <a:latin typeface="Helvetica"/>
+              </a:rPr>
+              <a:t>•  search_api_examples + synthesize_http_step translate a catalog entry → http_request step</a:t>
+            </a:r>
+          </a:p>
+          <a:p>
+            <a:pPr algn="l">
+              <a:spcAft>
+                <a:spcPts val="800"/>
+              </a:spcAft>
+            </a:pPr>
+            <a:r>
+              <a:rPr sz="2000">
+                <a:solidFill>
+                  <a:srgbClr val="4A4A4A"/>
+                </a:solidFill>
+                <a:latin typeface="Helvetica"/>
+              </a:rPr>
+              <a:t>•  Pre-fills method / path / auth / params from real examples — not LLM guesses</a:t>
+            </a:r>
+          </a:p>
+          <a:p>
+            <a:pPr algn="l">
+              <a:spcAft>
+                <a:spcPts val="800"/>
+              </a:spcAft>
+            </a:pPr>
+            <a:r>
+              <a:rPr sz="2000">
+                <a:solidFill>
+                  <a:srgbClr val="4A4A4A"/>
+                </a:solidFill>
+                <a:latin typeface="Helvetica"/>
+              </a:rPr>
+              <a:t>•  Result: the agent reaches vendors we don't have a native connector for</a:t>
+            </a:r>
+          </a:p>
+        </p:txBody>
+      </p:sp>
+    </p:spTree>
+  </p:cSld>
+  <p:clrMapOvr>
+    <a:masterClrMapping/>
+  </p:clrMapOvr>
+</p:sld>
+</file>
+
+<file path=ppt/slides/slide22.xml><?xml version="1.0" encoding="utf-8"?>
+<p:sld xmlns:a="http://schemas.openxmlformats.org/drawingml/2006/main" xmlns:p="http://schemas.openxmlformats.org/presentationml/2006/main" xmlns:r="http://schemas.openxmlformats.org/officeDocument/2006/relationships">
+  <p:cSld>
+    <p:bg>
+      <p:bgPr>
+        <a:solidFill>
+          <a:srgbClr val="F4F4F6"/>
+        </a:solidFill>
+        <a:effectLst/>
+      </p:bgPr>
+    </p:bg>
+    <p:spTree>
+      <p:nvGrpSpPr>
+        <p:cNvPr id="1" name=""/>
+        <p:cNvGrpSpPr/>
+        <p:nvPr/>
+      </p:nvGrpSpPr>
+      <p:grpSpPr/>
+      <p:sp>
+        <p:nvSpPr>
+          <p:cNvPr id="2" name="Rectangle 1"/>
+          <p:cNvSpPr/>
+          <p:nvPr/>
+        </p:nvSpPr>
+        <p:spPr>
+          <a:xfrm>
+            <a:off x="0" y="0"/>
+            <a:ext cx="12191695" cy="45720"/>
+          </a:xfrm>
+          <a:prstGeom prst="rect">
+            <a:avLst/>
+          </a:prstGeom>
+          <a:solidFill>
+            <a:srgbClr val="E83E3E"/>
+          </a:solidFill>
+          <a:ln>
+            <a:noFill/>
+          </a:ln>
+        </p:spPr>
+        <p:style>
+          <a:lnRef idx="1">
+            <a:schemeClr val="accent1"/>
+          </a:lnRef>
+          <a:fillRef idx="3">
+            <a:schemeClr val="accent1"/>
+          </a:fillRef>
+          <a:effectRef idx="2">
+            <a:schemeClr val="accent1"/>
+          </a:effectRef>
+          <a:fontRef idx="minor">
+            <a:schemeClr val="lt1"/>
+          </a:fontRef>
+        </p:style>
+        <p:txBody>
+          <a:bodyPr rtlCol="0" anchor="ctr"/>
+          <a:lstStyle/>
+          <a:p>
+            <a:pPr algn="ctr"/>
+          </a:p>
+        </p:txBody>
+      </p:sp>
+      <p:sp>
+        <p:nvSpPr>
+          <p:cNvPr id="3" name="TextBox 2"/>
+          <p:cNvSpPr txBox="1"/>
+          <p:nvPr/>
+        </p:nvSpPr>
+        <p:spPr>
+          <a:xfrm>
+            <a:off x="548640" y="365760"/>
+            <a:ext cx="11094415" cy="822960"/>
+          </a:xfrm>
+          <a:prstGeom prst="rect">
+            <a:avLst/>
+          </a:prstGeom>
+          <a:noFill/>
+        </p:spPr>
+        <p:txBody>
+          <a:bodyPr wrap="square">
+            <a:spAutoFit/>
+          </a:bodyPr>
+          <a:lstStyle/>
+          <a:p>
+            <a:pPr algn="l"/>
+            <a:r>
+              <a:rPr sz="3000" b="1">
+                <a:solidFill>
+                  <a:srgbClr val="0F1E3D"/>
+                </a:solidFill>
+                <a:latin typeface="Helvetica"/>
+              </a:rPr>
+              <a:t>Roadmap — vendor doc ingest (zero-day SaaS support)</a:t>
+            </a:r>
+          </a:p>
+        </p:txBody>
+      </p:sp>
+      <p:sp>
+        <p:nvSpPr>
+          <p:cNvPr id="4" name="TextBox 3"/>
+          <p:cNvSpPr txBox="1"/>
+          <p:nvPr/>
+        </p:nvSpPr>
+        <p:spPr>
+          <a:xfrm>
+            <a:off x="548640" y="1371600"/>
+            <a:ext cx="11094415" cy="4937760"/>
+          </a:xfrm>
+          <a:prstGeom prst="rect">
+            <a:avLst/>
+          </a:prstGeom>
+          <a:noFill/>
+        </p:spPr>
+        <p:txBody>
+          <a:bodyPr wrap="square">
+            <a:spAutoFit/>
+          </a:bodyPr>
+          <a:lstStyle/>
+          <a:p>
+            <a:pPr algn="l">
+              <a:spcAft>
+                <a:spcPts val="800"/>
+              </a:spcAft>
+            </a:pPr>
+            <a:r>
+              <a:rPr sz="2000">
+                <a:solidFill>
+                  <a:srgbClr val="4A4A4A"/>
+                </a:solidFill>
+                <a:latin typeface="Helvetica"/>
+              </a:rPr>
+              <a:t>•  Today: 207K examples crawled from API marketplaces — already covers most major vendors</a:t>
+            </a:r>
+          </a:p>
+          <a:p>
+            <a:pPr algn="l">
+              <a:spcAft>
+                <a:spcPts val="800"/>
+              </a:spcAft>
+            </a:pPr>
+            <a:r>
+              <a:rPr sz="2000">
+                <a:solidFill>
+                  <a:srgbClr val="4A4A4A"/>
+                </a:solidFill>
+                <a:latin typeface="Helvetica"/>
+              </a:rPr>
+              <a:t>•  Next: ingest vendors directly from their published docs the day they ship them</a:t>
+            </a:r>
+          </a:p>
+          <a:p>
+            <a:pPr algn="l">
+              <a:spcAft>
+                <a:spcPts val="800"/>
+              </a:spcAft>
+            </a:pPr>
+            <a:r>
+              <a:rPr sz="2000">
+                <a:solidFill>
+                  <a:srgbClr val="4A4A4A"/>
+                </a:solidFill>
+                <a:latin typeface="Helvetica"/>
+              </a:rPr>
+              <a:t>•      • OpenAPI/Swagger specs — most modern SaaS vendors publish one; full op + schema graph</a:t>
+            </a:r>
+          </a:p>
+          <a:p>
+            <a:pPr algn="l">
+              <a:spcAft>
+                <a:spcPts val="800"/>
+              </a:spcAft>
+            </a:pPr>
+            <a:r>
+              <a:rPr sz="2000">
+                <a:solidFill>
+                  <a:srgbClr val="4A4A4A"/>
+                </a:solidFill>
+                <a:latin typeface="Helvetica"/>
+              </a:rPr>
+              <a:t>•      • Postman collections — covers vendors that ship Postman instead of OpenAPI</a:t>
+            </a:r>
+          </a:p>
+          <a:p>
+            <a:pPr algn="l">
+              <a:spcAft>
+                <a:spcPts val="800"/>
+              </a:spcAft>
+            </a:pPr>
+            <a:r>
+              <a:rPr sz="2000">
+                <a:solidFill>
+                  <a:srgbClr val="4A4A4A"/>
+                </a:solidFill>
+                <a:latin typeface="Helvetica"/>
+              </a:rPr>
+              <a:t>•      • AsyncAPI / GraphQL schemas — adds streaming + graph endpoints to the catalog</a:t>
+            </a:r>
+          </a:p>
+          <a:p>
+            <a:pPr algn="l">
+              <a:spcAft>
+                <a:spcPts val="800"/>
+              </a:spcAft>
+            </a:pPr>
+            <a:r>
+              <a:rPr sz="2000">
+                <a:solidFill>
+                  <a:srgbClr val="4A4A4A"/>
+                </a:solidFill>
+                <a:latin typeface="Helvetica"/>
+              </a:rPr>
+              <a:t>•  Auth pattern library: cluster recurring auth flows (Bearer / OAuth2 / HMAC / JWT)</a:t>
+            </a:r>
+          </a:p>
+          <a:p>
+            <a:pPr algn="l">
+              <a:spcAft>
+                <a:spcPts val="800"/>
+              </a:spcAft>
+            </a:pPr>
+            <a:r>
+              <a:rPr sz="2000">
+                <a:solidFill>
+                  <a:srgbClr val="4A4A4A"/>
+                </a:solidFill>
+                <a:latin typeface="Helvetica"/>
+              </a:rPr>
+              <a:t>•      so the agent picks a named pattern instead of re-deriving from one example</a:t>
+            </a:r>
+          </a:p>
+          <a:p>
+            <a:pPr algn="l">
+              <a:spcAft>
+                <a:spcPts val="800"/>
+              </a:spcAft>
+            </a:pPr>
+            <a:r>
+              <a:rPr sz="2000">
+                <a:solidFill>
+                  <a:srgbClr val="4A4A4A"/>
+                </a:solidFill>
+                <a:latin typeface="Helvetica"/>
+              </a:rPr>
+              <a:t>•  Per-vendor recipe scaffolds: spec metadata → ready-made enrich / contain / triage starters</a:t>
+            </a:r>
+          </a:p>
+          <a:p>
+            <a:pPr algn="l">
+              <a:spcAft>
+                <a:spcPts val="800"/>
+              </a:spcAft>
+            </a:pPr>
+            <a:r>
+              <a:rPr sz="2000">
+                <a:solidFill>
+                  <a:srgbClr val="4A4A4A"/>
+                </a:solidFill>
+                <a:latin typeface="Helvetica"/>
+              </a:rPr>
+              <a:t>•  Outcome: a new vendor goes live in fsrpb the same day they publish their API docs</a:t>
+            </a:r>
+          </a:p>
+        </p:txBody>
+      </p:sp>
+    </p:spTree>
+  </p:cSld>
+  <p:clrMapOvr>
+    <a:masterClrMapping/>
+  </p:clrMapOvr>
+</p:sld>
+</file>
+
+<file path=ppt/slides/slide23.xml><?xml version="1.0" encoding="utf-8"?>
+<p:sld xmlns:a="http://schemas.openxmlformats.org/drawingml/2006/main" xmlns:p="http://schemas.openxmlformats.org/presentationml/2006/main" xmlns:r="http://schemas.openxmlformats.org/officeDocument/2006/relationships">
+  <p:cSld>
+    <p:bg>
+      <p:bgPr>
+        <a:solidFill>
+          <a:srgbClr val="F4F4F6"/>
+        </a:solidFill>
+        <a:effectLst/>
+      </p:bgPr>
+    </p:bg>
+    <p:spTree>
+      <p:nvGrpSpPr>
+        <p:cNvPr id="1" name=""/>
+        <p:cNvGrpSpPr/>
+        <p:nvPr/>
+      </p:nvGrpSpPr>
+      <p:grpSpPr/>
+      <p:sp>
+        <p:nvSpPr>
+          <p:cNvPr id="2" name="Rectangle 1"/>
+          <p:cNvSpPr/>
+          <p:nvPr/>
+        </p:nvSpPr>
+        <p:spPr>
+          <a:xfrm>
+            <a:off x="0" y="0"/>
+            <a:ext cx="12191695" cy="45720"/>
+          </a:xfrm>
+          <a:prstGeom prst="rect">
+            <a:avLst/>
+          </a:prstGeom>
+          <a:solidFill>
+            <a:srgbClr val="E83E3E"/>
+          </a:solidFill>
+          <a:ln>
+            <a:noFill/>
+          </a:ln>
+        </p:spPr>
+        <p:style>
+          <a:lnRef idx="1">
+            <a:schemeClr val="accent1"/>
+          </a:lnRef>
+          <a:fillRef idx="3">
+            <a:schemeClr val="accent1"/>
+          </a:fillRef>
+          <a:effectRef idx="2">
+            <a:schemeClr val="accent1"/>
+          </a:effectRef>
+          <a:fontRef idx="minor">
+            <a:schemeClr val="lt1"/>
+          </a:fontRef>
+        </p:style>
+        <p:txBody>
+          <a:bodyPr rtlCol="0" anchor="ctr"/>
+          <a:lstStyle/>
+          <a:p>
+            <a:pPr algn="ctr"/>
+          </a:p>
+        </p:txBody>
+      </p:sp>
+      <p:sp>
+        <p:nvSpPr>
+          <p:cNvPr id="3" name="TextBox 2"/>
+          <p:cNvSpPr txBox="1"/>
+          <p:nvPr/>
+        </p:nvSpPr>
+        <p:spPr>
+          <a:xfrm>
+            <a:off x="548640" y="365760"/>
+            <a:ext cx="11094415" cy="822960"/>
+          </a:xfrm>
+          <a:prstGeom prst="rect">
+            <a:avLst/>
+          </a:prstGeom>
+          <a:noFill/>
+        </p:spPr>
+        <p:txBody>
+          <a:bodyPr wrap="square">
+            <a:spAutoFit/>
+          </a:bodyPr>
+          <a:lstStyle/>
+          <a:p>
+            <a:pPr algn="l"/>
+            <a:r>
+              <a:rPr sz="3000" b="1">
+                <a:solidFill>
+                  <a:srgbClr val="0F1E3D"/>
+                </a:solidFill>
+                <a:latin typeface="Helvetica"/>
+              </a:rPr>
+              <a:t>Live verification loop</a:t>
+            </a:r>
+          </a:p>
+        </p:txBody>
+      </p:sp>
+      <p:sp>
+        <p:nvSpPr>
+          <p:cNvPr id="4" name="TextBox 3"/>
+          <p:cNvSpPr txBox="1"/>
+          <p:nvPr/>
+        </p:nvSpPr>
+        <p:spPr>
+          <a:xfrm>
+            <a:off x="548640" y="1371600"/>
+            <a:ext cx="11094415" cy="4937760"/>
+          </a:xfrm>
+          <a:prstGeom prst="rect">
+            <a:avLst/>
+          </a:prstGeom>
+          <a:noFill/>
+        </p:spPr>
+        <p:txBody>
+          <a:bodyPr wrap="square">
+            <a:spAutoFit/>
+          </a:bodyPr>
+          <a:lstStyle/>
+          <a:p>
+            <a:pPr algn="l">
+              <a:spcAft>
+                <a:spcPts val="800"/>
+              </a:spcAft>
+            </a:pPr>
+            <a:r>
+              <a:rPr sz="2000">
+                <a:solidFill>
+                  <a:srgbClr val="4A4A4A"/>
+                </a:solidFill>
+                <a:latin typeface="Helvetica"/>
+              </a:rPr>
+              <a:t>•  validate_yaml catches shape errors before push</a:t>
+            </a:r>
+          </a:p>
+          <a:p>
+            <a:pPr algn="l">
+              <a:spcAft>
+                <a:spcPts val="800"/>
+              </a:spcAft>
+            </a:pPr>
+            <a:r>
+              <a:rPr sz="2000">
+                <a:solidFill>
+                  <a:srgbClr val="4A4A4A"/>
+                </a:solidFill>
+                <a:latin typeface="Helvetica"/>
+              </a:rPr>
+              <a:t>•  render_jinja(template, from_pb_execution=&lt;pk&gt;) resolves Jinja against a real past run</a:t>
+            </a:r>
+          </a:p>
+          <a:p>
+            <a:pPr algn="l">
+              <a:spcAft>
+                <a:spcPts val="800"/>
+              </a:spcAft>
+            </a:pPr>
+            <a:r>
+              <a:rPr sz="2000">
+                <a:solidFill>
+                  <a:srgbClr val="4A4A4A"/>
+                </a:solidFill>
+                <a:latin typeface="Helvetica"/>
+              </a:rPr>
+              <a:t>•  run_op executes one connector op live and caches observed output shape in SQLite</a:t>
+            </a:r>
+          </a:p>
+          <a:p>
+            <a:pPr algn="l">
+              <a:spcAft>
+                <a:spcPts val="800"/>
+              </a:spcAft>
+            </a:pPr>
+            <a:r>
+              <a:rPr sz="2000">
+                <a:solidFill>
+                  <a:srgbClr val="4A4A4A"/>
+                </a:solidFill>
+                <a:latin typeface="Helvetica"/>
+              </a:rPr>
+              <a:t>•  dry_run_playbook (in build) imports → executes → cleans up on dev FSR</a:t>
+            </a:r>
+          </a:p>
+          <a:p>
+            <a:pPr algn="l">
+              <a:spcAft>
+                <a:spcPts val="800"/>
+              </a:spcAft>
+            </a:pPr>
+            <a:r>
+              <a:rPr sz="2000">
+                <a:solidFill>
+                  <a:srgbClr val="4A4A4A"/>
+                </a:solidFill>
+                <a:latin typeface="Helvetica"/>
+              </a:rPr>
+              <a:t>•  Failures are evidence — if a demo breaks, that's a real bug to file</a:t>
+            </a:r>
+          </a:p>
+        </p:txBody>
+      </p:sp>
+    </p:spTree>
+  </p:cSld>
+  <p:clrMapOvr>
+    <a:masterClrMapping/>
+  </p:clrMapOvr>
+</p:sld>
+</file>
+
+<file path=ppt/slides/slide24.xml><?xml version="1.0" encoding="utf-8"?>
+<p:sld xmlns:a="http://schemas.openxmlformats.org/drawingml/2006/main" xmlns:p="http://schemas.openxmlformats.org/presentationml/2006/main" xmlns:r="http://schemas.openxmlformats.org/officeDocument/2006/relationships">
+  <p:cSld>
+    <p:bg>
+      <p:bgPr>
+        <a:solidFill>
+          <a:srgbClr val="F4F4F6"/>
+        </a:solidFill>
+        <a:effectLst/>
+      </p:bgPr>
+    </p:bg>
+    <p:spTree>
+      <p:nvGrpSpPr>
+        <p:cNvPr id="1" name=""/>
+        <p:cNvGrpSpPr/>
+        <p:nvPr/>
+      </p:nvGrpSpPr>
+      <p:grpSpPr/>
+      <p:sp>
+        <p:nvSpPr>
+          <p:cNvPr id="2" name="Rectangle 1"/>
+          <p:cNvSpPr/>
+          <p:nvPr/>
+        </p:nvSpPr>
+        <p:spPr>
+          <a:xfrm>
+            <a:off x="0" y="0"/>
+            <a:ext cx="12191695" cy="45720"/>
+          </a:xfrm>
+          <a:prstGeom prst="rect">
+            <a:avLst/>
+          </a:prstGeom>
+          <a:solidFill>
+            <a:srgbClr val="E83E3E"/>
+          </a:solidFill>
+          <a:ln>
+            <a:noFill/>
+          </a:ln>
+        </p:spPr>
+        <p:style>
+          <a:lnRef idx="1">
+            <a:schemeClr val="accent1"/>
+          </a:lnRef>
+          <a:fillRef idx="3">
+            <a:schemeClr val="accent1"/>
+          </a:fillRef>
+          <a:effectRef idx="2">
+            <a:schemeClr val="accent1"/>
+          </a:effectRef>
+          <a:fontRef idx="minor">
+            <a:schemeClr val="lt1"/>
+          </a:fontRef>
+        </p:style>
+        <p:txBody>
+          <a:bodyPr rtlCol="0" anchor="ctr"/>
+          <a:lstStyle/>
+          <a:p>
+            <a:pPr algn="ctr"/>
+          </a:p>
+        </p:txBody>
+      </p:sp>
+      <p:sp>
+        <p:nvSpPr>
+          <p:cNvPr id="3" name="TextBox 2"/>
+          <p:cNvSpPr txBox="1"/>
+          <p:nvPr/>
+        </p:nvSpPr>
+        <p:spPr>
+          <a:xfrm>
+            <a:off x="548640" y="365760"/>
+            <a:ext cx="11094415" cy="822960"/>
+          </a:xfrm>
+          <a:prstGeom prst="rect">
+            <a:avLst/>
+          </a:prstGeom>
+          <a:noFill/>
+        </p:spPr>
+        <p:txBody>
+          <a:bodyPr wrap="square">
+            <a:spAutoFit/>
+          </a:bodyPr>
+          <a:lstStyle/>
+          <a:p>
+            <a:pPr algn="l"/>
+            <a:r>
+              <a:rPr sz="3000" b="1">
+                <a:solidFill>
+                  <a:srgbClr val="0F1E3D"/>
+                </a:solidFill>
+                <a:latin typeface="Helvetica"/>
+              </a:rPr>
+              <a:t>Demo 1 — vague ask to working playbook</a:t>
+            </a:r>
+          </a:p>
+        </p:txBody>
+      </p:sp>
+      <p:sp>
+        <p:nvSpPr>
+          <p:cNvPr id="4" name="TextBox 3"/>
+          <p:cNvSpPr txBox="1"/>
+          <p:nvPr/>
+        </p:nvSpPr>
+        <p:spPr>
+          <a:xfrm>
+            <a:off x="548640" y="1371600"/>
+            <a:ext cx="11094415" cy="4937760"/>
+          </a:xfrm>
+          <a:prstGeom prst="rect">
+            <a:avLst/>
+          </a:prstGeom>
+          <a:noFill/>
+        </p:spPr>
+        <p:txBody>
+          <a:bodyPr wrap="square">
+            <a:spAutoFit/>
+          </a:bodyPr>
+          <a:lstStyle/>
+          <a:p>
+            <a:pPr algn="l">
+              <a:spcAft>
+                <a:spcPts val="800"/>
+              </a:spcAft>
+            </a:pPr>
+            <a:r>
+              <a:rPr sz="2000">
+                <a:solidFill>
+                  <a:srgbClr val="4A4A4A"/>
+                </a:solidFill>
+                <a:latin typeface="Helvetica"/>
+              </a:rPr>
+              <a:t>•  Prompt: "Look up an IP on VirusTotal and update the alert"</a:t>
+            </a:r>
+          </a:p>
+          <a:p>
+            <a:pPr algn="l">
+              <a:spcAft>
+                <a:spcPts val="800"/>
+              </a:spcAft>
+            </a:pPr>
+            <a:r>
+              <a:rPr sz="2000">
+                <a:solidFill>
+                  <a:srgbClr val="4A4A4A"/>
+                </a:solidFill>
+                <a:latin typeface="Helvetica"/>
+              </a:rPr>
+              <a:t>•  Agent: find_recipe → find_connector → get_op_schema → draft YAML</a:t>
+            </a:r>
+          </a:p>
+          <a:p>
+            <a:pPr algn="l">
+              <a:spcAft>
+                <a:spcPts val="800"/>
+              </a:spcAft>
+            </a:pPr>
+            <a:r>
+              <a:rPr sz="2000">
+                <a:solidFill>
+                  <a:srgbClr val="4A4A4A"/>
+                </a:solidFill>
+                <a:latin typeface="Helvetica"/>
+              </a:rPr>
+              <a:t>•  Gates: validate_yaml → analyze_playbook → (only if 0 errors) compile → push</a:t>
+            </a:r>
+          </a:p>
+          <a:p>
+            <a:pPr algn="l">
+              <a:spcAft>
+                <a:spcPts val="800"/>
+              </a:spcAft>
+            </a:pPr>
+            <a:r>
+              <a:rPr sz="2000">
+                <a:solidFill>
+                  <a:srgbClr val="4A4A4A"/>
+                </a:solidFill>
+                <a:latin typeface="Helvetica"/>
+              </a:rPr>
+              <a:t>•  Render-path validator catches a vars.steps typo in seconds, before any push</a:t>
+            </a:r>
+          </a:p>
+          <a:p>
+            <a:pPr algn="l">
+              <a:spcAft>
+                <a:spcPts val="800"/>
+              </a:spcAft>
+            </a:pPr>
+            <a:r>
+              <a:rPr sz="2000">
+                <a:solidFill>
+                  <a:srgbClr val="4A4A4A"/>
+                </a:solidFill>
+                <a:latin typeface="Helvetica"/>
+              </a:rPr>
+              <a:t>•  Total time prompt-to-passing-run: minutes — and every step is auditable in chat</a:t>
+            </a:r>
+          </a:p>
+        </p:txBody>
+      </p:sp>
+      <p:sp>
+        <p:nvSpPr>
+          <p:cNvPr id="5" name="Rounded Rectangle 4"/>
+          <p:cNvSpPr/>
+          <p:nvPr/>
+        </p:nvSpPr>
+        <p:spPr>
+          <a:xfrm>
+            <a:off x="1821027" y="4389120"/>
+            <a:ext cx="1143000" cy="548640"/>
+          </a:xfrm>
+          <a:prstGeom prst="roundRect">
+            <a:avLst/>
+          </a:prstGeom>
+          <a:solidFill>
+            <a:srgbClr val="0F1E3D"/>
+          </a:solidFill>
+          <a:ln>
+            <a:noFill/>
+          </a:ln>
+        </p:spPr>
+        <p:style>
+          <a:lnRef idx="1">
+            <a:schemeClr val="accent1"/>
+          </a:lnRef>
+          <a:fillRef idx="3">
+            <a:schemeClr val="accent1"/>
+          </a:fillRef>
+          <a:effectRef idx="2">
+            <a:schemeClr val="accent1"/>
+          </a:effectRef>
+          <a:fontRef idx="minor">
+            <a:schemeClr val="lt1"/>
+          </a:fontRef>
+        </p:style>
+        <p:txBody>
+          <a:bodyPr rtlCol="0" anchor="ctr"/>
+          <a:lstStyle/>
+          <a:p>
+            <a:pPr algn="ctr"/>
+            <a:r>
+              <a:rPr sz="1100">
+                <a:solidFill>
+                  <a:srgbClr val="FFFFFF"/>
+                </a:solidFill>
+                <a:latin typeface="Helvetica"/>
+              </a:rPr>
+              <a:t>find_connector</a:t>
+            </a:r>
+          </a:p>
+        </p:txBody>
+      </p:sp>
+      <p:sp>
+        <p:nvSpPr>
+          <p:cNvPr id="6" name="Rounded Rectangle 5"/>
+          <p:cNvSpPr/>
+          <p:nvPr/>
+        </p:nvSpPr>
+        <p:spPr>
+          <a:xfrm>
+            <a:off x="3055467" y="4389120"/>
+            <a:ext cx="1143000" cy="548640"/>
+          </a:xfrm>
+          <a:prstGeom prst="roundRect">
+            <a:avLst/>
+          </a:prstGeom>
+          <a:solidFill>
+            <a:srgbClr val="E83E3E"/>
+          </a:solidFill>
+          <a:ln>
+            <a:noFill/>
+          </a:ln>
+        </p:spPr>
+        <p:style>
+          <a:lnRef idx="1">
+            <a:schemeClr val="accent1"/>
+          </a:lnRef>
+          <a:fillRef idx="3">
+            <a:schemeClr val="accent1"/>
+          </a:fillRef>
+          <a:effectRef idx="2">
+            <a:schemeClr val="accent1"/>
+          </a:effectRef>
+          <a:fontRef idx="minor">
+            <a:schemeClr val="lt1"/>
+          </a:fontRef>
+        </p:style>
+        <p:txBody>
+          <a:bodyPr rtlCol="0" anchor="ctr"/>
+          <a:lstStyle/>
+          <a:p>
+            <a:pPr algn="ctr"/>
+            <a:r>
+              <a:rPr sz="1100">
+                <a:solidFill>
+                  <a:srgbClr val="FFFFFF"/>
+                </a:solidFill>
+                <a:latin typeface="Helvetica"/>
+              </a:rPr>
+              <a:t>get_op_schema</a:t>
+            </a:r>
+          </a:p>
+        </p:txBody>
+      </p:sp>
+      <p:sp>
+        <p:nvSpPr>
+          <p:cNvPr id="7" name="Rounded Rectangle 6"/>
+          <p:cNvSpPr/>
+          <p:nvPr/>
+        </p:nvSpPr>
+        <p:spPr>
+          <a:xfrm>
+            <a:off x="4289907" y="4389120"/>
+            <a:ext cx="1143000" cy="548640"/>
+          </a:xfrm>
+          <a:prstGeom prst="roundRect">
+            <a:avLst/>
+          </a:prstGeom>
+          <a:solidFill>
+            <a:srgbClr val="0F1E3D"/>
+          </a:solidFill>
+          <a:ln>
+            <a:noFill/>
+          </a:ln>
+        </p:spPr>
+        <p:style>
+          <a:lnRef idx="1">
+            <a:schemeClr val="accent1"/>
+          </a:lnRef>
+          <a:fillRef idx="3">
+            <a:schemeClr val="accent1"/>
+          </a:fillRef>
+          <a:effectRef idx="2">
+            <a:schemeClr val="accent1"/>
+          </a:effectRef>
+          <a:fontRef idx="minor">
+            <a:schemeClr val="lt1"/>
+          </a:fontRef>
+        </p:style>
+        <p:txBody>
+          <a:bodyPr rtlCol="0" anchor="ctr"/>
+          <a:lstStyle/>
+          <a:p>
+            <a:pPr algn="ctr"/>
+            <a:r>
+              <a:rPr sz="1100">
+                <a:solidFill>
+                  <a:srgbClr val="FFFFFF"/>
+                </a:solidFill>
+                <a:latin typeface="Helvetica"/>
+              </a:rPr>
+              <a:t>emit YAML</a:t>
+            </a:r>
+          </a:p>
+        </p:txBody>
+      </p:sp>
+      <p:sp>
+        <p:nvSpPr>
+          <p:cNvPr id="8" name="Rounded Rectangle 7"/>
+          <p:cNvSpPr/>
+          <p:nvPr/>
+        </p:nvSpPr>
+        <p:spPr>
+          <a:xfrm>
+            <a:off x="5524347" y="4389120"/>
+            <a:ext cx="1143000" cy="548640"/>
+          </a:xfrm>
+          <a:prstGeom prst="roundRect">
+            <a:avLst/>
+          </a:prstGeom>
+          <a:solidFill>
+            <a:srgbClr val="E83E3E"/>
+          </a:solidFill>
+          <a:ln>
+            <a:noFill/>
+          </a:ln>
+        </p:spPr>
+        <p:style>
+          <a:lnRef idx="1">
+            <a:schemeClr val="accent1"/>
+          </a:lnRef>
+          <a:fillRef idx="3">
+            <a:schemeClr val="accent1"/>
+          </a:fillRef>
+          <a:effectRef idx="2">
+            <a:schemeClr val="accent1"/>
+          </a:effectRef>
+          <a:fontRef idx="minor">
+            <a:schemeClr val="lt1"/>
+          </a:fontRef>
+        </p:style>
+        <p:txBody>
+          <a:bodyPr rtlCol="0" anchor="ctr"/>
+          <a:lstStyle/>
+          <a:p>
+            <a:pPr algn="ctr"/>
+            <a:r>
+              <a:rPr sz="1100">
+                <a:solidFill>
+                  <a:srgbClr val="FFFFFF"/>
+                </a:solidFill>
+                <a:latin typeface="Helvetica"/>
+              </a:rPr>
+              <a:t>validate</a:t>
+            </a:r>
+          </a:p>
+        </p:txBody>
+      </p:sp>
+      <p:sp>
+        <p:nvSpPr>
+          <p:cNvPr id="9" name="Rounded Rectangle 8"/>
+          <p:cNvSpPr/>
+          <p:nvPr/>
+        </p:nvSpPr>
+        <p:spPr>
+          <a:xfrm>
+            <a:off x="6758787" y="4389120"/>
+            <a:ext cx="1143000" cy="548640"/>
+          </a:xfrm>
+          <a:prstGeom prst="roundRect">
+            <a:avLst/>
+          </a:prstGeom>
+          <a:solidFill>
+            <a:srgbClr val="0F1E3D"/>
+          </a:solidFill>
+          <a:ln>
+            <a:noFill/>
+          </a:ln>
+        </p:spPr>
+        <p:style>
+          <a:lnRef idx="1">
+            <a:schemeClr val="accent1"/>
+          </a:lnRef>
+          <a:fillRef idx="3">
+            <a:schemeClr val="accent1"/>
+          </a:fillRef>
+          <a:effectRef idx="2">
+            <a:schemeClr val="accent1"/>
+          </a:effectRef>
+          <a:fontRef idx="minor">
+            <a:schemeClr val="lt1"/>
+          </a:fontRef>
+        </p:style>
+        <p:txBody>
+          <a:bodyPr rtlCol="0" anchor="ctr"/>
+          <a:lstStyle/>
+          <a:p>
+            <a:pPr algn="ctr"/>
+            <a:r>
+              <a:rPr sz="1100">
+                <a:solidFill>
+                  <a:srgbClr val="FFFFFF"/>
+                </a:solidFill>
+                <a:latin typeface="Helvetica"/>
+              </a:rPr>
+              <a:t>compile</a:t>
+            </a:r>
+          </a:p>
+        </p:txBody>
+      </p:sp>
+      <p:sp>
+        <p:nvSpPr>
+          <p:cNvPr id="10" name="Rounded Rectangle 9"/>
+          <p:cNvSpPr/>
+          <p:nvPr/>
+        </p:nvSpPr>
+        <p:spPr>
+          <a:xfrm>
+            <a:off x="7993227" y="4389120"/>
+            <a:ext cx="1143000" cy="548640"/>
+          </a:xfrm>
+          <a:prstGeom prst="roundRect">
+            <a:avLst/>
+          </a:prstGeom>
+          <a:solidFill>
+            <a:srgbClr val="E83E3E"/>
+          </a:solidFill>
+          <a:ln>
+            <a:noFill/>
+          </a:ln>
+        </p:spPr>
+        <p:style>
+          <a:lnRef idx="1">
+            <a:schemeClr val="accent1"/>
+          </a:lnRef>
+          <a:fillRef idx="3">
+            <a:schemeClr val="accent1"/>
+          </a:fillRef>
+          <a:effectRef idx="2">
+            <a:schemeClr val="accent1"/>
+          </a:effectRef>
+          <a:fontRef idx="minor">
+            <a:schemeClr val="lt1"/>
+          </a:fontRef>
+        </p:style>
+        <p:txBody>
+          <a:bodyPr rtlCol="0" anchor="ctr"/>
+          <a:lstStyle/>
+          <a:p>
+            <a:pPr algn="ctr"/>
+            <a:r>
+              <a:rPr sz="1100">
+                <a:solidFill>
+                  <a:srgbClr val="FFFFFF"/>
+                </a:solidFill>
+                <a:latin typeface="Helvetica"/>
+              </a:rPr>
+              <a:t>push</a:t>
+            </a:r>
+          </a:p>
+        </p:txBody>
+      </p:sp>
+      <p:sp>
+        <p:nvSpPr>
+          <p:cNvPr id="11" name="Rounded Rectangle 10"/>
+          <p:cNvSpPr/>
+          <p:nvPr/>
+        </p:nvSpPr>
+        <p:spPr>
+          <a:xfrm>
+            <a:off x="9227667" y="4389120"/>
+            <a:ext cx="1143000" cy="548640"/>
+          </a:xfrm>
+          <a:prstGeom prst="roundRect">
+            <a:avLst/>
+          </a:prstGeom>
+          <a:solidFill>
+            <a:srgbClr val="0F1E3D"/>
+          </a:solidFill>
+          <a:ln>
+            <a:noFill/>
+          </a:ln>
+        </p:spPr>
+        <p:style>
+          <a:lnRef idx="1">
+            <a:schemeClr val="accent1"/>
+          </a:lnRef>
+          <a:fillRef idx="3">
+            <a:schemeClr val="accent1"/>
+          </a:fillRef>
+          <a:effectRef idx="2">
+            <a:schemeClr val="accent1"/>
+          </a:effectRef>
+          <a:fontRef idx="minor">
+            <a:schemeClr val="lt1"/>
+          </a:fontRef>
+        </p:style>
+        <p:txBody>
+          <a:bodyPr rtlCol="0" anchor="ctr"/>
+          <a:lstStyle/>
+          <a:p>
+            <a:pPr algn="ctr"/>
+            <a:r>
+              <a:rPr sz="1100">
+                <a:solidFill>
+                  <a:srgbClr val="FFFFFF"/>
+                </a:solidFill>
+                <a:latin typeface="Helvetica"/>
+              </a:rPr>
+              <a:t>run</a:t>
+            </a:r>
+          </a:p>
+        </p:txBody>
+      </p:sp>
+    </p:spTree>
+  </p:cSld>
+  <p:clrMapOvr>
+    <a:masterClrMapping/>
+  </p:clrMapOvr>
+</p:sld>
+</file>
+
+<file path=ppt/slides/slide25.xml><?xml version="1.0" encoding="utf-8"?>
+<p:sld xmlns:a="http://schemas.openxmlformats.org/drawingml/2006/main" xmlns:p="http://schemas.openxmlformats.org/presentationml/2006/main" xmlns:r="http://schemas.openxmlformats.org/officeDocument/2006/relationships">
+  <p:cSld>
+    <p:bg>
+      <p:bgPr>
+        <a:solidFill>
+          <a:srgbClr val="F4F4F6"/>
+        </a:solidFill>
+        <a:effectLst/>
+      </p:bgPr>
+    </p:bg>
+    <p:spTree>
+      <p:nvGrpSpPr>
+        <p:cNvPr id="1" name=""/>
+        <p:cNvGrpSpPr/>
+        <p:nvPr/>
+      </p:nvGrpSpPr>
+      <p:grpSpPr/>
+      <p:sp>
+        <p:nvSpPr>
+          <p:cNvPr id="2" name="Rectangle 1"/>
+          <p:cNvSpPr/>
+          <p:nvPr/>
+        </p:nvSpPr>
+        <p:spPr>
+          <a:xfrm>
+            <a:off x="0" y="0"/>
+            <a:ext cx="12191695" cy="45720"/>
+          </a:xfrm>
+          <a:prstGeom prst="rect">
+            <a:avLst/>
+          </a:prstGeom>
+          <a:solidFill>
+            <a:srgbClr val="E83E3E"/>
+          </a:solidFill>
+          <a:ln>
+            <a:noFill/>
+          </a:ln>
+        </p:spPr>
+        <p:style>
+          <a:lnRef idx="1">
+            <a:schemeClr val="accent1"/>
+          </a:lnRef>
+          <a:fillRef idx="3">
+            <a:schemeClr val="accent1"/>
+          </a:fillRef>
+          <a:effectRef idx="2">
+            <a:schemeClr val="accent1"/>
+          </a:effectRef>
+          <a:fontRef idx="minor">
+            <a:schemeClr val="lt1"/>
+          </a:fontRef>
+        </p:style>
+        <p:txBody>
+          <a:bodyPr rtlCol="0" anchor="ctr"/>
+          <a:lstStyle/>
+          <a:p>
+            <a:pPr algn="ctr"/>
+          </a:p>
+        </p:txBody>
+      </p:sp>
+      <p:sp>
+        <p:nvSpPr>
+          <p:cNvPr id="3" name="TextBox 2"/>
+          <p:cNvSpPr txBox="1"/>
+          <p:nvPr/>
+        </p:nvSpPr>
+        <p:spPr>
+          <a:xfrm>
+            <a:off x="548640" y="365760"/>
+            <a:ext cx="11094415" cy="822960"/>
+          </a:xfrm>
+          <a:prstGeom prst="rect">
+            <a:avLst/>
+          </a:prstGeom>
+          <a:noFill/>
+        </p:spPr>
+        <p:txBody>
+          <a:bodyPr wrap="square">
+            <a:spAutoFit/>
+          </a:bodyPr>
+          <a:lstStyle/>
+          <a:p>
+            <a:pPr algn="l"/>
+            <a:r>
+              <a:rPr sz="3000" b="1">
+                <a:solidFill>
+                  <a:srgbClr val="0F1E3D"/>
+                </a:solidFill>
+                <a:latin typeface="Helvetica"/>
+              </a:rPr>
+              <a:t>Demo 2 — the killer: triage and fix</a:t>
+            </a:r>
+          </a:p>
+        </p:txBody>
+      </p:sp>
+      <p:sp>
+        <p:nvSpPr>
+          <p:cNvPr id="4" name="TextBox 3"/>
+          <p:cNvSpPr txBox="1"/>
+          <p:nvPr/>
+        </p:nvSpPr>
+        <p:spPr>
+          <a:xfrm>
+            <a:off x="548640" y="1371600"/>
+            <a:ext cx="11094415" cy="4937760"/>
+          </a:xfrm>
+          <a:prstGeom prst="rect">
+            <a:avLst/>
+          </a:prstGeom>
+          <a:noFill/>
+        </p:spPr>
+        <p:txBody>
+          <a:bodyPr wrap="square">
+            <a:spAutoFit/>
+          </a:bodyPr>
+          <a:lstStyle/>
+          <a:p>
+            <a:pPr algn="l">
+              <a:spcAft>
+                <a:spcPts val="800"/>
+              </a:spcAft>
+            </a:pPr>
+            <a:r>
+              <a:rPr sz="2000">
+                <a:solidFill>
+                  <a:srgbClr val="4A4A4A"/>
+                </a:solidFill>
+                <a:latin typeface="Helvetica"/>
+              </a:rPr>
+              <a:t>•  "My playbook is broken. Figure out which one and fix it."</a:t>
+            </a:r>
+          </a:p>
+          <a:p>
+            <a:pPr algn="l">
+              <a:spcAft>
+                <a:spcPts val="800"/>
+              </a:spcAft>
+            </a:pPr>
+            <a:r>
+              <a:rPr sz="2000">
+                <a:solidFill>
+                  <a:srgbClr val="4A4A4A"/>
+                </a:solidFill>
+                <a:latin typeface="Helvetica"/>
+              </a:rPr>
+              <a:t>•  Agent: pull → analyze_playbook → diagnostics grouped by step + severity</a:t>
+            </a:r>
+          </a:p>
+          <a:p>
+            <a:pPr algn="l">
+              <a:spcAft>
+                <a:spcPts val="800"/>
+              </a:spcAft>
+            </a:pPr>
+            <a:r>
+              <a:rPr sz="2000">
+                <a:solidFill>
+                  <a:srgbClr val="4A4A4A"/>
+                </a:solidFill>
+                <a:latin typeface="Helvetica"/>
+              </a:rPr>
+              <a:t>•  C2 missing_key fires: "data.statuss" — close-key suggestion: "status"</a:t>
+            </a:r>
+          </a:p>
+          <a:p>
+            <a:pPr algn="l">
+              <a:spcAft>
+                <a:spcPts val="800"/>
+              </a:spcAft>
+            </a:pPr>
+            <a:r>
+              <a:rPr sz="2000">
+                <a:solidFill>
+                  <a:srgbClr val="4A4A4A"/>
+                </a:solidFill>
+                <a:latin typeface="Helvetica"/>
+              </a:rPr>
+              <a:t>•  suggest_fix_for_diagnostic returns a structured patch — agent applies, re-analyzes</a:t>
+            </a:r>
+          </a:p>
+          <a:p>
+            <a:pPr algn="l">
+              <a:spcAft>
+                <a:spcPts val="800"/>
+              </a:spcAft>
+            </a:pPr>
+            <a:r>
+              <a:rPr sz="2000">
+                <a:solidFill>
+                  <a:srgbClr val="4A4A4A"/>
+                </a:solidFill>
+                <a:latin typeface="Helvetica"/>
+              </a:rPr>
+              <a:t>•  Diff shown to user, push on confirm — none of this is possible in FSR Designer</a:t>
+            </a:r>
+          </a:p>
+        </p:txBody>
+      </p:sp>
+    </p:spTree>
+  </p:cSld>
+  <p:clrMapOvr>
+    <a:masterClrMapping/>
+  </p:clrMapOvr>
+</p:sld>
+</file>
+
+<file path=ppt/slides/slide26.xml><?xml version="1.0" encoding="utf-8"?>
+<p:sld xmlns:a="http://schemas.openxmlformats.org/drawingml/2006/main" xmlns:p="http://schemas.openxmlformats.org/presentationml/2006/main" xmlns:r="http://schemas.openxmlformats.org/officeDocument/2006/relationships">
+  <p:cSld>
+    <p:bg>
+      <p:bgPr>
+        <a:solidFill>
+          <a:srgbClr val="F4F4F6"/>
+        </a:solidFill>
+        <a:effectLst/>
+      </p:bgPr>
+    </p:bg>
+    <p:spTree>
+      <p:nvGrpSpPr>
+        <p:cNvPr id="1" name=""/>
+        <p:cNvGrpSpPr/>
+        <p:nvPr/>
+      </p:nvGrpSpPr>
+      <p:grpSpPr/>
+      <p:sp>
+        <p:nvSpPr>
+          <p:cNvPr id="2" name="Rectangle 1"/>
+          <p:cNvSpPr/>
+          <p:nvPr/>
+        </p:nvSpPr>
+        <p:spPr>
+          <a:xfrm>
+            <a:off x="0" y="0"/>
+            <a:ext cx="12191695" cy="45720"/>
+          </a:xfrm>
+          <a:prstGeom prst="rect">
+            <a:avLst/>
+          </a:prstGeom>
+          <a:solidFill>
+            <a:srgbClr val="E83E3E"/>
+          </a:solidFill>
+          <a:ln>
+            <a:noFill/>
+          </a:ln>
+        </p:spPr>
+        <p:style>
+          <a:lnRef idx="1">
+            <a:schemeClr val="accent1"/>
+          </a:lnRef>
+          <a:fillRef idx="3">
+            <a:schemeClr val="accent1"/>
+          </a:fillRef>
+          <a:effectRef idx="2">
+            <a:schemeClr val="accent1"/>
+          </a:effectRef>
+          <a:fontRef idx="minor">
+            <a:schemeClr val="lt1"/>
+          </a:fontRef>
+        </p:style>
+        <p:txBody>
+          <a:bodyPr rtlCol="0" anchor="ctr"/>
+          <a:lstStyle/>
+          <a:p>
+            <a:pPr algn="ctr"/>
+          </a:p>
+        </p:txBody>
+      </p:sp>
+      <p:sp>
+        <p:nvSpPr>
+          <p:cNvPr id="3" name="TextBox 2"/>
+          <p:cNvSpPr txBox="1"/>
+          <p:nvPr/>
+        </p:nvSpPr>
+        <p:spPr>
+          <a:xfrm>
+            <a:off x="548640" y="365760"/>
+            <a:ext cx="11094415" cy="822960"/>
+          </a:xfrm>
+          <a:prstGeom prst="rect">
+            <a:avLst/>
+          </a:prstGeom>
+          <a:noFill/>
+        </p:spPr>
+        <p:txBody>
+          <a:bodyPr wrap="square">
+            <a:spAutoFit/>
+          </a:bodyPr>
+          <a:lstStyle/>
+          <a:p>
+            <a:pPr algn="l"/>
+            <a:r>
+              <a:rPr sz="3000" b="1">
+                <a:solidFill>
+                  <a:srgbClr val="0F1E3D"/>
+                </a:solidFill>
+                <a:latin typeface="Helvetica"/>
+              </a:rPr>
+              <a:t>What we've indexed — FortiSOAR knowledge</a:t>
+            </a:r>
+          </a:p>
+        </p:txBody>
+      </p:sp>
+      <p:sp>
+        <p:nvSpPr>
+          <p:cNvPr id="4" name="TextBox 3"/>
+          <p:cNvSpPr txBox="1"/>
+          <p:nvPr/>
+        </p:nvSpPr>
+        <p:spPr>
+          <a:xfrm>
+            <a:off x="548640" y="1143000"/>
+            <a:ext cx="11094415" cy="548640"/>
+          </a:xfrm>
+          <a:prstGeom prst="rect">
+            <a:avLst/>
+          </a:prstGeom>
+          <a:noFill/>
+        </p:spPr>
+        <p:txBody>
+          <a:bodyPr wrap="square">
+            <a:spAutoFit/>
+          </a:bodyPr>
+          <a:lstStyle/>
+          <a:p>
+            <a:pPr algn="l"/>
+            <a:r>
+              <a:rPr sz="1400" b="0">
+                <a:solidFill>
+                  <a:srgbClr val="4A4A4A"/>
+                </a:solidFill>
+                <a:latin typeface="Helvetica"/>
+              </a:rPr>
+              <a:t>Every number is a real row in a queryable index, refreshed from the live appliance.</a:t>
+            </a:r>
+          </a:p>
+        </p:txBody>
+      </p:sp>
+      <p:sp>
+        <p:nvSpPr>
+          <p:cNvPr id="5" name="Rounded Rectangle 4"/>
+          <p:cNvSpPr/>
+          <p:nvPr/>
+        </p:nvSpPr>
+        <p:spPr>
+          <a:xfrm>
+            <a:off x="700887" y="1920240"/>
+            <a:ext cx="3474720" cy="1280160"/>
+          </a:xfrm>
+          <a:prstGeom prst="roundRect">
+            <a:avLst/>
+          </a:prstGeom>
+          <a:solidFill>
+            <a:srgbClr val="0F1E3D"/>
+          </a:solidFill>
+          <a:ln>
+            <a:noFill/>
+          </a:ln>
+        </p:spPr>
+        <p:style>
+          <a:lnRef idx="1">
+            <a:schemeClr val="accent1"/>
+          </a:lnRef>
+          <a:fillRef idx="3">
+            <a:schemeClr val="accent1"/>
+          </a:fillRef>
+          <a:effectRef idx="2">
+            <a:schemeClr val="accent1"/>
+          </a:effectRef>
+          <a:fontRef idx="minor">
+            <a:schemeClr val="lt1"/>
+          </a:fontRef>
+        </p:style>
+        <p:txBody>
+          <a:bodyPr rtlCol="0" anchor="ctr" wrap="square" lIns="182880" rIns="182880" tIns="137160" bIns="91440"/>
+          <a:lstStyle/>
+          <a:p>
+            <a:pPr algn="ctr"/>
+            <a:r>
+              <a:rPr sz="3600" b="1">
+                <a:solidFill>
+                  <a:srgbClr val="FFFFFF"/>
+                </a:solidFill>
+                <a:latin typeface="Helvetica"/>
+              </a:rPr>
+              <a:t>714</a:t>
+            </a:r>
+          </a:p>
+          <a:p>
+            <a:pPr algn="ctr"/>
+            <a:r>
+              <a:rPr sz="1300">
+                <a:solidFill>
+                  <a:srgbClr val="CCCCD4"/>
+                </a:solidFill>
+                <a:latin typeface="Helvetica"/>
+              </a:rPr>
+              <a:t>Connectors</a:t>
+            </a:r>
+          </a:p>
+        </p:txBody>
+      </p:sp>
+      <p:sp>
+        <p:nvSpPr>
+          <p:cNvPr id="6" name="Rounded Rectangle 5"/>
+          <p:cNvSpPr/>
+          <p:nvPr/>
+        </p:nvSpPr>
+        <p:spPr>
+          <a:xfrm>
+            <a:off x="4358487" y="1920240"/>
+            <a:ext cx="3474720" cy="1280160"/>
+          </a:xfrm>
+          <a:prstGeom prst="roundRect">
+            <a:avLst/>
+          </a:prstGeom>
+          <a:solidFill>
+            <a:srgbClr val="0F1E3D"/>
+          </a:solidFill>
+          <a:ln>
+            <a:noFill/>
+          </a:ln>
+        </p:spPr>
+        <p:style>
+          <a:lnRef idx="1">
+            <a:schemeClr val="accent1"/>
+          </a:lnRef>
+          <a:fillRef idx="3">
+            <a:schemeClr val="accent1"/>
+          </a:fillRef>
+          <a:effectRef idx="2">
+            <a:schemeClr val="accent1"/>
+          </a:effectRef>
+          <a:fontRef idx="minor">
+            <a:schemeClr val="lt1"/>
+          </a:fontRef>
+        </p:style>
+        <p:txBody>
+          <a:bodyPr rtlCol="0" anchor="ctr" wrap="square" lIns="182880" rIns="182880" tIns="137160" bIns="91440"/>
+          <a:lstStyle/>
+          <a:p>
+            <a:pPr algn="ctr"/>
+            <a:r>
+              <a:rPr sz="3600" b="1">
+                <a:solidFill>
+                  <a:srgbClr val="FFFFFF"/>
+                </a:solidFill>
+                <a:latin typeface="Helvetica"/>
+              </a:rPr>
+              <a:t>6,773</a:t>
+            </a:r>
+          </a:p>
+          <a:p>
+            <a:pPr algn="ctr"/>
+            <a:r>
+              <a:rPr sz="1300">
+                <a:solidFill>
+                  <a:srgbClr val="CCCCD4"/>
+                </a:solidFill>
+                <a:latin typeface="Helvetica"/>
+              </a:rPr>
+              <a:t>Operations</a:t>
+            </a:r>
+          </a:p>
+        </p:txBody>
+      </p:sp>
+      <p:sp>
+        <p:nvSpPr>
+          <p:cNvPr id="7" name="Rounded Rectangle 6"/>
+          <p:cNvSpPr/>
+          <p:nvPr/>
+        </p:nvSpPr>
+        <p:spPr>
+          <a:xfrm>
+            <a:off x="8016087" y="1920240"/>
+            <a:ext cx="3474720" cy="1280160"/>
+          </a:xfrm>
+          <a:prstGeom prst="roundRect">
+            <a:avLst/>
+          </a:prstGeom>
+          <a:solidFill>
+            <a:srgbClr val="0F1E3D"/>
+          </a:solidFill>
+          <a:ln>
+            <a:noFill/>
+          </a:ln>
+        </p:spPr>
+        <p:style>
+          <a:lnRef idx="1">
+            <a:schemeClr val="accent1"/>
+          </a:lnRef>
+          <a:fillRef idx="3">
+            <a:schemeClr val="accent1"/>
+          </a:fillRef>
+          <a:effectRef idx="2">
+            <a:schemeClr val="accent1"/>
+          </a:effectRef>
+          <a:fontRef idx="minor">
+            <a:schemeClr val="lt1"/>
+          </a:fontRef>
+        </p:style>
+        <p:txBody>
+          <a:bodyPr rtlCol="0" anchor="ctr" wrap="square" lIns="182880" rIns="182880" tIns="137160" bIns="91440"/>
+          <a:lstStyle/>
+          <a:p>
+            <a:pPr algn="ctr"/>
+            <a:r>
+              <a:rPr sz="3600" b="1">
+                <a:solidFill>
+                  <a:srgbClr val="FFFFFF"/>
+                </a:solidFill>
+                <a:latin typeface="Helvetica"/>
+              </a:rPr>
+              <a:t>26,093</a:t>
+            </a:r>
+          </a:p>
+          <a:p>
+            <a:pPr algn="ctr"/>
+            <a:r>
+              <a:rPr sz="1300">
+                <a:solidFill>
+                  <a:srgbClr val="CCCCD4"/>
+                </a:solidFill>
+                <a:latin typeface="Helvetica"/>
+              </a:rPr>
+              <a:t>Op parameters</a:t>
+            </a:r>
+          </a:p>
+        </p:txBody>
+      </p:sp>
+      <p:sp>
+        <p:nvSpPr>
+          <p:cNvPr id="8" name="Rounded Rectangle 7"/>
+          <p:cNvSpPr/>
+          <p:nvPr/>
+        </p:nvSpPr>
+        <p:spPr>
+          <a:xfrm>
+            <a:off x="700887" y="3383280"/>
+            <a:ext cx="3474720" cy="1280160"/>
+          </a:xfrm>
+          <a:prstGeom prst="roundRect">
+            <a:avLst/>
+          </a:prstGeom>
+          <a:solidFill>
+            <a:srgbClr val="0F1E3D"/>
+          </a:solidFill>
+          <a:ln>
+            <a:noFill/>
+          </a:ln>
+        </p:spPr>
+        <p:style>
+          <a:lnRef idx="1">
+            <a:schemeClr val="accent1"/>
+          </a:lnRef>
+          <a:fillRef idx="3">
+            <a:schemeClr val="accent1"/>
+          </a:fillRef>
+          <a:effectRef idx="2">
+            <a:schemeClr val="accent1"/>
+          </a:effectRef>
+          <a:fontRef idx="minor">
+            <a:schemeClr val="lt1"/>
+          </a:fontRef>
+        </p:style>
+        <p:txBody>
+          <a:bodyPr rtlCol="0" anchor="ctr" wrap="square" lIns="182880" rIns="182880" tIns="137160" bIns="91440"/>
+          <a:lstStyle/>
+          <a:p>
+            <a:pPr algn="ctr"/>
+            <a:r>
+              <a:rPr sz="3600" b="1">
+                <a:solidFill>
+                  <a:srgbClr val="FFFFFF"/>
+                </a:solidFill>
+                <a:latin typeface="Helvetica"/>
+              </a:rPr>
+              <a:t>43</a:t>
+            </a:r>
+          </a:p>
+          <a:p>
+            <a:pPr algn="ctr"/>
+            <a:r>
+              <a:rPr sz="1300">
+                <a:solidFill>
+                  <a:srgbClr val="CCCCD4"/>
+                </a:solidFill>
+                <a:latin typeface="Helvetica"/>
+              </a:rPr>
+              <a:t>Step types</a:t>
+            </a:r>
+          </a:p>
+        </p:txBody>
+      </p:sp>
+      <p:sp>
+        <p:nvSpPr>
+          <p:cNvPr id="9" name="Rounded Rectangle 8"/>
+          <p:cNvSpPr/>
+          <p:nvPr/>
+        </p:nvSpPr>
+        <p:spPr>
+          <a:xfrm>
+            <a:off x="4358487" y="3383280"/>
+            <a:ext cx="3474720" cy="1280160"/>
+          </a:xfrm>
+          <a:prstGeom prst="roundRect">
+            <a:avLst/>
+          </a:prstGeom>
+          <a:solidFill>
+            <a:srgbClr val="0F1E3D"/>
+          </a:solidFill>
+          <a:ln>
+            <a:noFill/>
+          </a:ln>
+        </p:spPr>
+        <p:style>
+          <a:lnRef idx="1">
+            <a:schemeClr val="accent1"/>
+          </a:lnRef>
+          <a:fillRef idx="3">
+            <a:schemeClr val="accent1"/>
+          </a:fillRef>
+          <a:effectRef idx="2">
+            <a:schemeClr val="accent1"/>
+          </a:effectRef>
+          <a:fontRef idx="minor">
+            <a:schemeClr val="lt1"/>
+          </a:fontRef>
+        </p:style>
+        <p:txBody>
+          <a:bodyPr rtlCol="0" anchor="ctr" wrap="square" lIns="182880" rIns="182880" tIns="137160" bIns="91440"/>
+          <a:lstStyle/>
+          <a:p>
+            <a:pPr algn="ctr"/>
+            <a:r>
+              <a:rPr sz="3600" b="1">
+                <a:solidFill>
+                  <a:srgbClr val="FFFFFF"/>
+                </a:solidFill>
+                <a:latin typeface="Helvetica"/>
+              </a:rPr>
+              <a:t>172</a:t>
+            </a:r>
+          </a:p>
+          <a:p>
+            <a:pPr algn="ctr"/>
+            <a:r>
+              <a:rPr sz="1300">
+                <a:solidFill>
+                  <a:srgbClr val="CCCCD4"/>
+                </a:solidFill>
+                <a:latin typeface="Helvetica"/>
+              </a:rPr>
+              <a:t>Jinja filters</a:t>
+            </a:r>
+          </a:p>
+        </p:txBody>
+      </p:sp>
+      <p:sp>
+        <p:nvSpPr>
+          <p:cNvPr id="10" name="Rounded Rectangle 9"/>
+          <p:cNvSpPr/>
+          <p:nvPr/>
+        </p:nvSpPr>
+        <p:spPr>
+          <a:xfrm>
+            <a:off x="8016087" y="3383280"/>
+            <a:ext cx="3474720" cy="1280160"/>
+          </a:xfrm>
+          <a:prstGeom prst="roundRect">
+            <a:avLst/>
+          </a:prstGeom>
+          <a:solidFill>
+            <a:srgbClr val="0F1E3D"/>
+          </a:solidFill>
+          <a:ln>
+            <a:noFill/>
+          </a:ln>
+        </p:spPr>
+        <p:style>
+          <a:lnRef idx="1">
+            <a:schemeClr val="accent1"/>
+          </a:lnRef>
+          <a:fillRef idx="3">
+            <a:schemeClr val="accent1"/>
+          </a:fillRef>
+          <a:effectRef idx="2">
+            <a:schemeClr val="accent1"/>
+          </a:effectRef>
+          <a:fontRef idx="minor">
+            <a:schemeClr val="lt1"/>
+          </a:fontRef>
+        </p:style>
+        <p:txBody>
+          <a:bodyPr rtlCol="0" anchor="ctr" wrap="square" lIns="182880" rIns="182880" tIns="137160" bIns="91440"/>
+          <a:lstStyle/>
+          <a:p>
+            <a:pPr algn="ctr"/>
+            <a:r>
+              <a:rPr sz="3600" b="1">
+                <a:solidFill>
+                  <a:srgbClr val="FFFFFF"/>
+                </a:solidFill>
+                <a:latin typeface="Helvetica"/>
+              </a:rPr>
+              <a:t>1,664</a:t>
+            </a:r>
+          </a:p>
+          <a:p>
+            <a:pPr algn="ctr"/>
+            <a:r>
+              <a:rPr sz="1300">
+                <a:solidFill>
+                  <a:srgbClr val="CCCCD4"/>
+                </a:solidFill>
+                <a:latin typeface="Helvetica"/>
+              </a:rPr>
+              <a:t>Live playbooks</a:t>
+            </a:r>
+          </a:p>
+        </p:txBody>
+      </p:sp>
+      <p:sp>
+        <p:nvSpPr>
+          <p:cNvPr id="11" name="TextBox 10"/>
+          <p:cNvSpPr txBox="1"/>
+          <p:nvPr/>
+        </p:nvSpPr>
+        <p:spPr>
+          <a:xfrm>
+            <a:off x="548640" y="4937760"/>
+            <a:ext cx="11094415" cy="731520"/>
+          </a:xfrm>
+          <a:prstGeom prst="rect">
+            <a:avLst/>
+          </a:prstGeom>
+          <a:noFill/>
+        </p:spPr>
+        <p:txBody>
+          <a:bodyPr wrap="square">
+            <a:spAutoFit/>
+          </a:bodyPr>
+          <a:lstStyle/>
+          <a:p>
+            <a:pPr algn="l"/>
+            <a:r>
+              <a:rPr sz="1300" b="1">
+                <a:solidFill>
+                  <a:srgbClr val="E83E3E"/>
+                </a:solidFill>
+                <a:latin typeface="Helvetica"/>
+              </a:rPr>
+              <a:t>Trust ladder: 1,959 rows confirmed live + tested. The agent does SQL lookups before it touches an LLM.</a:t>
+            </a:r>
+          </a:p>
+        </p:txBody>
+      </p:sp>
+    </p:spTree>
+  </p:cSld>
+  <p:clrMapOvr>
+    <a:masterClrMapping/>
+  </p:clrMapOvr>
+</p:sld>
+</file>
+
+<file path=ppt/slides/slide27.xml><?xml version="1.0" encoding="utf-8"?>
+<p:sld xmlns:a="http://schemas.openxmlformats.org/drawingml/2006/main" xmlns:p="http://schemas.openxmlformats.org/presentationml/2006/main" xmlns:r="http://schemas.openxmlformats.org/officeDocument/2006/relationships">
+  <p:cSld>
+    <p:bg>
+      <p:bgPr>
+        <a:solidFill>
+          <a:srgbClr val="F4F4F6"/>
+        </a:solidFill>
+        <a:effectLst/>
+      </p:bgPr>
+    </p:bg>
+    <p:spTree>
+      <p:nvGrpSpPr>
+        <p:cNvPr id="1" name=""/>
+        <p:cNvGrpSpPr/>
+        <p:nvPr/>
+      </p:nvGrpSpPr>
+      <p:grpSpPr/>
+      <p:sp>
+        <p:nvSpPr>
+          <p:cNvPr id="2" name="Rectangle 1"/>
+          <p:cNvSpPr/>
+          <p:nvPr/>
+        </p:nvSpPr>
+        <p:spPr>
+          <a:xfrm>
+            <a:off x="0" y="0"/>
+            <a:ext cx="12191695" cy="45720"/>
+          </a:xfrm>
+          <a:prstGeom prst="rect">
+            <a:avLst/>
+          </a:prstGeom>
+          <a:solidFill>
+            <a:srgbClr val="E83E3E"/>
+          </a:solidFill>
+          <a:ln>
+            <a:noFill/>
+          </a:ln>
+        </p:spPr>
+        <p:style>
+          <a:lnRef idx="1">
+            <a:schemeClr val="accent1"/>
+          </a:lnRef>
+          <a:fillRef idx="3">
+            <a:schemeClr val="accent1"/>
+          </a:fillRef>
+          <a:effectRef idx="2">
+            <a:schemeClr val="accent1"/>
+          </a:effectRef>
+          <a:fontRef idx="minor">
+            <a:schemeClr val="lt1"/>
+          </a:fontRef>
+        </p:style>
+        <p:txBody>
+          <a:bodyPr rtlCol="0" anchor="ctr"/>
+          <a:lstStyle/>
+          <a:p>
+            <a:pPr algn="ctr"/>
+          </a:p>
+        </p:txBody>
+      </p:sp>
+      <p:sp>
+        <p:nvSpPr>
+          <p:cNvPr id="3" name="TextBox 2"/>
+          <p:cNvSpPr txBox="1"/>
+          <p:nvPr/>
+        </p:nvSpPr>
+        <p:spPr>
+          <a:xfrm>
+            <a:off x="548640" y="365760"/>
+            <a:ext cx="11094415" cy="822960"/>
+          </a:xfrm>
+          <a:prstGeom prst="rect">
+            <a:avLst/>
+          </a:prstGeom>
+          <a:noFill/>
+        </p:spPr>
+        <p:txBody>
+          <a:bodyPr wrap="square">
+            <a:spAutoFit/>
+          </a:bodyPr>
+          <a:lstStyle/>
+          <a:p>
+            <a:pPr algn="l"/>
+            <a:r>
+              <a:rPr sz="3000" b="1">
+                <a:solidFill>
+                  <a:srgbClr val="0F1E3D"/>
+                </a:solidFill>
+                <a:latin typeface="Helvetica"/>
+              </a:rPr>
+              <a:t>What we've indexed — third-party APIs</a:t>
+            </a:r>
+          </a:p>
+        </p:txBody>
+      </p:sp>
+      <p:sp>
+        <p:nvSpPr>
+          <p:cNvPr id="4" name="TextBox 3"/>
+          <p:cNvSpPr txBox="1"/>
+          <p:nvPr/>
+        </p:nvSpPr>
+        <p:spPr>
+          <a:xfrm>
+            <a:off x="548640" y="1143000"/>
+            <a:ext cx="11094415" cy="548640"/>
+          </a:xfrm>
+          <a:prstGeom prst="rect">
+            <a:avLst/>
+          </a:prstGeom>
+          <a:noFill/>
+        </p:spPr>
+        <p:txBody>
+          <a:bodyPr wrap="square">
+            <a:spAutoFit/>
+          </a:bodyPr>
+          <a:lstStyle/>
+          <a:p>
+            <a:pPr algn="l"/>
+            <a:r>
+              <a:rPr sz="1400" b="0">
+                <a:solidFill>
+                  <a:srgbClr val="4A4A4A"/>
+                </a:solidFill>
+                <a:latin typeface="Helvetica"/>
+              </a:rPr>
+              <a:t>The HTTP virtual-connector corpus: thousands of vendors reachable without a native connector.</a:t>
+            </a:r>
+          </a:p>
+        </p:txBody>
+      </p:sp>
+      <p:sp>
+        <p:nvSpPr>
+          <p:cNvPr id="5" name="Rounded Rectangle 4"/>
+          <p:cNvSpPr/>
+          <p:nvPr/>
+        </p:nvSpPr>
+        <p:spPr>
+          <a:xfrm>
+            <a:off x="700887" y="1920240"/>
+            <a:ext cx="3474720" cy="1280160"/>
+          </a:xfrm>
+          <a:prstGeom prst="roundRect">
+            <a:avLst/>
+          </a:prstGeom>
+          <a:solidFill>
+            <a:srgbClr val="0F1E3D"/>
+          </a:solidFill>
+          <a:ln>
+            <a:noFill/>
+          </a:ln>
+        </p:spPr>
+        <p:style>
+          <a:lnRef idx="1">
+            <a:schemeClr val="accent1"/>
+          </a:lnRef>
+          <a:fillRef idx="3">
+            <a:schemeClr val="accent1"/>
+          </a:fillRef>
+          <a:effectRef idx="2">
+            <a:schemeClr val="accent1"/>
+          </a:effectRef>
+          <a:fontRef idx="minor">
+            <a:schemeClr val="lt1"/>
+          </a:fontRef>
+        </p:style>
+        <p:txBody>
+          <a:bodyPr rtlCol="0" anchor="ctr" wrap="square" lIns="182880" rIns="182880" tIns="137160" bIns="91440"/>
+          <a:lstStyle/>
+          <a:p>
+            <a:pPr algn="ctr"/>
+            <a:r>
+              <a:rPr sz="3600" b="1">
+                <a:solidFill>
+                  <a:srgbClr val="FFFFFF"/>
+                </a:solidFill>
+                <a:latin typeface="Helvetica"/>
+              </a:rPr>
+              <a:t>6,927</a:t>
+            </a:r>
+          </a:p>
+          <a:p>
+            <a:pPr algn="ctr"/>
+            <a:r>
+              <a:rPr sz="1300">
+                <a:solidFill>
+                  <a:srgbClr val="CCCCD4"/>
+                </a:solidFill>
+                <a:latin typeface="Helvetica"/>
+              </a:rPr>
+              <a:t>Products covered</a:t>
+            </a:r>
+          </a:p>
+        </p:txBody>
+      </p:sp>
+      <p:sp>
+        <p:nvSpPr>
+          <p:cNvPr id="6" name="Rounded Rectangle 5"/>
+          <p:cNvSpPr/>
+          <p:nvPr/>
+        </p:nvSpPr>
+        <p:spPr>
+          <a:xfrm>
+            <a:off x="4358487" y="1920240"/>
+            <a:ext cx="3474720" cy="1280160"/>
+          </a:xfrm>
+          <a:prstGeom prst="roundRect">
+            <a:avLst/>
+          </a:prstGeom>
+          <a:solidFill>
+            <a:srgbClr val="0F1E3D"/>
+          </a:solidFill>
+          <a:ln>
+            <a:noFill/>
+          </a:ln>
+        </p:spPr>
+        <p:style>
+          <a:lnRef idx="1">
+            <a:schemeClr val="accent1"/>
+          </a:lnRef>
+          <a:fillRef idx="3">
+            <a:schemeClr val="accent1"/>
+          </a:fillRef>
+          <a:effectRef idx="2">
+            <a:schemeClr val="accent1"/>
+          </a:effectRef>
+          <a:fontRef idx="minor">
+            <a:schemeClr val="lt1"/>
+          </a:fontRef>
+        </p:style>
+        <p:txBody>
+          <a:bodyPr rtlCol="0" anchor="ctr" wrap="square" lIns="182880" rIns="182880" tIns="137160" bIns="91440"/>
+          <a:lstStyle/>
+          <a:p>
+            <a:pPr algn="ctr"/>
+            <a:r>
+              <a:rPr sz="3600" b="1">
+                <a:solidFill>
+                  <a:srgbClr val="FFFFFF"/>
+                </a:solidFill>
+                <a:latin typeface="Helvetica"/>
+              </a:rPr>
+              <a:t>207,419</a:t>
+            </a:r>
+          </a:p>
+          <a:p>
+            <a:pPr algn="ctr"/>
+            <a:r>
+              <a:rPr sz="1300">
+                <a:solidFill>
+                  <a:srgbClr val="CCCCD4"/>
+                </a:solidFill>
+                <a:latin typeface="Helvetica"/>
+              </a:rPr>
+              <a:t>API examples</a:t>
+            </a:r>
+          </a:p>
+        </p:txBody>
+      </p:sp>
+      <p:sp>
+        <p:nvSpPr>
+          <p:cNvPr id="7" name="Rounded Rectangle 6"/>
+          <p:cNvSpPr/>
+          <p:nvPr/>
+        </p:nvSpPr>
+        <p:spPr>
+          <a:xfrm>
+            <a:off x="8016087" y="1920240"/>
+            <a:ext cx="3474720" cy="1280160"/>
+          </a:xfrm>
+          <a:prstGeom prst="roundRect">
+            <a:avLst/>
+          </a:prstGeom>
+          <a:solidFill>
+            <a:srgbClr val="0F1E3D"/>
+          </a:solidFill>
+          <a:ln>
+            <a:noFill/>
+          </a:ln>
+        </p:spPr>
+        <p:style>
+          <a:lnRef idx="1">
+            <a:schemeClr val="accent1"/>
+          </a:lnRef>
+          <a:fillRef idx="3">
+            <a:schemeClr val="accent1"/>
+          </a:fillRef>
+          <a:effectRef idx="2">
+            <a:schemeClr val="accent1"/>
+          </a:effectRef>
+          <a:fontRef idx="minor">
+            <a:schemeClr val="lt1"/>
+          </a:fontRef>
+        </p:style>
+        <p:txBody>
+          <a:bodyPr rtlCol="0" anchor="ctr" wrap="square" lIns="182880" rIns="182880" tIns="137160" bIns="91440"/>
+          <a:lstStyle/>
+          <a:p>
+            <a:pPr algn="ctr"/>
+            <a:r>
+              <a:rPr sz="3600" b="1">
+                <a:solidFill>
+                  <a:srgbClr val="FFFFFF"/>
+                </a:solidFill>
+                <a:latin typeface="Helvetica"/>
+              </a:rPr>
+              <a:t>6,272</a:t>
+            </a:r>
+          </a:p>
+          <a:p>
+            <a:pPr algn="ctr"/>
+            <a:r>
+              <a:rPr sz="1300">
+                <a:solidFill>
+                  <a:srgbClr val="CCCCD4"/>
+                </a:solidFill>
+                <a:latin typeface="Helvetica"/>
+              </a:rPr>
+              <a:t>Lifecycle records</a:t>
+            </a:r>
+          </a:p>
+        </p:txBody>
+      </p:sp>
+      <p:sp>
+        <p:nvSpPr>
+          <p:cNvPr id="8" name="Rounded Rectangle 7"/>
+          <p:cNvSpPr/>
+          <p:nvPr/>
+        </p:nvSpPr>
+        <p:spPr>
+          <a:xfrm>
+            <a:off x="700887" y="3383280"/>
+            <a:ext cx="3474720" cy="1280160"/>
+          </a:xfrm>
+          <a:prstGeom prst="roundRect">
+            <a:avLst/>
+          </a:prstGeom>
+          <a:solidFill>
+            <a:srgbClr val="0F1E3D"/>
+          </a:solidFill>
+          <a:ln>
+            <a:noFill/>
+          </a:ln>
+        </p:spPr>
+        <p:style>
+          <a:lnRef idx="1">
+            <a:schemeClr val="accent1"/>
+          </a:lnRef>
+          <a:fillRef idx="3">
+            <a:schemeClr val="accent1"/>
+          </a:fillRef>
+          <a:effectRef idx="2">
+            <a:schemeClr val="accent1"/>
+          </a:effectRef>
+          <a:fontRef idx="minor">
+            <a:schemeClr val="lt1"/>
+          </a:fontRef>
+        </p:style>
+        <p:txBody>
+          <a:bodyPr rtlCol="0" anchor="ctr" wrap="square" lIns="182880" rIns="182880" tIns="137160" bIns="91440"/>
+          <a:lstStyle/>
+          <a:p>
+            <a:pPr algn="ctr"/>
+            <a:r>
+              <a:rPr sz="3600" b="1">
+                <a:solidFill>
+                  <a:srgbClr val="FFFFFF"/>
+                </a:solidFill>
+                <a:latin typeface="Helvetica"/>
+              </a:rPr>
+              <a:t>33,783</a:t>
+            </a:r>
+          </a:p>
+          <a:p>
+            <a:pPr algn="ctr"/>
+            <a:r>
+              <a:rPr sz="1300">
+                <a:solidFill>
+                  <a:srgbClr val="CCCCD4"/>
+                </a:solidFill>
+                <a:latin typeface="Helvetica"/>
+              </a:rPr>
+              <a:t>Microsoft Graph alone</a:t>
+            </a:r>
+          </a:p>
+        </p:txBody>
+      </p:sp>
+      <p:sp>
+        <p:nvSpPr>
+          <p:cNvPr id="9" name="Rounded Rectangle 8"/>
+          <p:cNvSpPr/>
+          <p:nvPr/>
+        </p:nvSpPr>
+        <p:spPr>
+          <a:xfrm>
+            <a:off x="4358487" y="3383280"/>
+            <a:ext cx="3474720" cy="1280160"/>
+          </a:xfrm>
+          <a:prstGeom prst="roundRect">
+            <a:avLst/>
+          </a:prstGeom>
+          <a:solidFill>
+            <a:srgbClr val="0F1E3D"/>
+          </a:solidFill>
+          <a:ln>
+            <a:noFill/>
+          </a:ln>
+        </p:spPr>
+        <p:style>
+          <a:lnRef idx="1">
+            <a:schemeClr val="accent1"/>
+          </a:lnRef>
+          <a:fillRef idx="3">
+            <a:schemeClr val="accent1"/>
+          </a:fillRef>
+          <a:effectRef idx="2">
+            <a:schemeClr val="accent1"/>
+          </a:effectRef>
+          <a:fontRef idx="minor">
+            <a:schemeClr val="lt1"/>
+          </a:fontRef>
+        </p:style>
+        <p:txBody>
+          <a:bodyPr rtlCol="0" anchor="ctr" wrap="square" lIns="182880" rIns="182880" tIns="137160" bIns="91440"/>
+          <a:lstStyle/>
+          <a:p>
+            <a:pPr algn="ctr"/>
+            <a:r>
+              <a:rPr sz="3600" b="1">
+                <a:solidFill>
+                  <a:srgbClr val="FFFFFF"/>
+                </a:solidFill>
+                <a:latin typeface="Helvetica"/>
+              </a:rPr>
+              <a:t>13,818</a:t>
+            </a:r>
+          </a:p>
+          <a:p>
+            <a:pPr algn="ctr"/>
+            <a:r>
+              <a:rPr sz="1300">
+                <a:solidFill>
+                  <a:srgbClr val="CCCCD4"/>
+                </a:solidFill>
+                <a:latin typeface="Helvetica"/>
+              </a:rPr>
+              <a:t>GitHub v3 REST</a:t>
+            </a:r>
+          </a:p>
+        </p:txBody>
+      </p:sp>
+      <p:sp>
+        <p:nvSpPr>
+          <p:cNvPr id="10" name="Rounded Rectangle 9"/>
+          <p:cNvSpPr/>
+          <p:nvPr/>
+        </p:nvSpPr>
+        <p:spPr>
+          <a:xfrm>
+            <a:off x="8016087" y="3383280"/>
+            <a:ext cx="3474720" cy="1280160"/>
+          </a:xfrm>
+          <a:prstGeom prst="roundRect">
+            <a:avLst/>
+          </a:prstGeom>
+          <a:solidFill>
+            <a:srgbClr val="0F1E3D"/>
+          </a:solidFill>
+          <a:ln>
+            <a:noFill/>
+          </a:ln>
+        </p:spPr>
+        <p:style>
+          <a:lnRef idx="1">
+            <a:schemeClr val="accent1"/>
+          </a:lnRef>
+          <a:fillRef idx="3">
+            <a:schemeClr val="accent1"/>
+          </a:fillRef>
+          <a:effectRef idx="2">
+            <a:schemeClr val="accent1"/>
+          </a:effectRef>
+          <a:fontRef idx="minor">
+            <a:schemeClr val="lt1"/>
+          </a:fontRef>
+        </p:style>
+        <p:txBody>
+          <a:bodyPr rtlCol="0" anchor="ctr" wrap="square" lIns="182880" rIns="182880" tIns="137160" bIns="91440"/>
+          <a:lstStyle/>
+          <a:p>
+            <a:pPr algn="ctr"/>
+            <a:r>
+              <a:rPr sz="3600" b="1">
+                <a:solidFill>
+                  <a:srgbClr val="FFFFFF"/>
+                </a:solidFill>
+                <a:latin typeface="Helvetica"/>
+              </a:rPr>
+              <a:t>FTS5</a:t>
+            </a:r>
+          </a:p>
+          <a:p>
+            <a:pPr algn="ctr"/>
+            <a:r>
+              <a:rPr sz="1300">
+                <a:solidFill>
+                  <a:srgbClr val="CCCCD4"/>
+                </a:solidFill>
+                <a:latin typeface="Helvetica"/>
+              </a:rPr>
+              <a:t>Full-text indexed</a:t>
+            </a:r>
+          </a:p>
+        </p:txBody>
+      </p:sp>
+      <p:sp>
+        <p:nvSpPr>
+          <p:cNvPr id="11" name="TextBox 10"/>
+          <p:cNvSpPr txBox="1"/>
+          <p:nvPr/>
+        </p:nvSpPr>
+        <p:spPr>
+          <a:xfrm>
+            <a:off x="548640" y="4937760"/>
+            <a:ext cx="11094415" cy="731520"/>
+          </a:xfrm>
+          <a:prstGeom prst="rect">
+            <a:avLst/>
+          </a:prstGeom>
+          <a:noFill/>
+        </p:spPr>
+        <p:txBody>
+          <a:bodyPr wrap="square">
+            <a:spAutoFit/>
+          </a:bodyPr>
+          <a:lstStyle/>
+          <a:p>
+            <a:pPr algn="l"/>
+            <a:r>
+              <a:rPr sz="1300" b="1">
+                <a:solidFill>
+                  <a:srgbClr val="E83E3E"/>
+                </a:solidFill>
+                <a:latin typeface="Helvetica"/>
+              </a:rPr>
+              <a:t>search_api_examples + synthesize_http_step turn any of these into a working http_request step. Deterministic — no LLM in the translation.</a:t>
+            </a:r>
+          </a:p>
+        </p:txBody>
+      </p:sp>
+    </p:spTree>
+  </p:cSld>
+  <p:clrMapOvr>
+    <a:masterClrMapping/>
+  </p:clrMapOvr>
+</p:sld>
+</file>
+
+<file path=ppt/slides/slide28.xml><?xml version="1.0" encoding="utf-8"?>
+<p:sld xmlns:a="http://schemas.openxmlformats.org/drawingml/2006/main" xmlns:p="http://schemas.openxmlformats.org/presentationml/2006/main" xmlns:r="http://schemas.openxmlformats.org/officeDocument/2006/relationships">
+  <p:cSld>
+    <p:bg>
+      <p:bgPr>
+        <a:solidFill>
+          <a:srgbClr val="F4F4F6"/>
+        </a:solidFill>
+        <a:effectLst/>
+      </p:bgPr>
+    </p:bg>
+    <p:spTree>
+      <p:nvGrpSpPr>
+        <p:cNvPr id="1" name=""/>
+        <p:cNvGrpSpPr/>
+        <p:nvPr/>
+      </p:nvGrpSpPr>
+      <p:grpSpPr/>
+      <p:sp>
+        <p:nvSpPr>
+          <p:cNvPr id="2" name="Rectangle 1"/>
+          <p:cNvSpPr/>
+          <p:nvPr/>
+        </p:nvSpPr>
+        <p:spPr>
+          <a:xfrm>
+            <a:off x="0" y="0"/>
+            <a:ext cx="12191695" cy="45720"/>
+          </a:xfrm>
+          <a:prstGeom prst="rect">
+            <a:avLst/>
+          </a:prstGeom>
+          <a:solidFill>
+            <a:srgbClr val="E83E3E"/>
+          </a:solidFill>
+          <a:ln>
+            <a:noFill/>
+          </a:ln>
+        </p:spPr>
+        <p:style>
+          <a:lnRef idx="1">
+            <a:schemeClr val="accent1"/>
+          </a:lnRef>
+          <a:fillRef idx="3">
+            <a:schemeClr val="accent1"/>
+          </a:fillRef>
+          <a:effectRef idx="2">
+            <a:schemeClr val="accent1"/>
+          </a:effectRef>
+          <a:fontRef idx="minor">
+            <a:schemeClr val="lt1"/>
+          </a:fontRef>
+        </p:style>
+        <p:txBody>
+          <a:bodyPr rtlCol="0" anchor="ctr"/>
+          <a:lstStyle/>
+          <a:p>
+            <a:pPr algn="ctr"/>
+          </a:p>
+        </p:txBody>
+      </p:sp>
+      <p:sp>
+        <p:nvSpPr>
+          <p:cNvPr id="3" name="TextBox 2"/>
+          <p:cNvSpPr txBox="1"/>
+          <p:nvPr/>
+        </p:nvSpPr>
+        <p:spPr>
+          <a:xfrm>
+            <a:off x="548640" y="365760"/>
+            <a:ext cx="11094415" cy="822960"/>
+          </a:xfrm>
+          <a:prstGeom prst="rect">
+            <a:avLst/>
+          </a:prstGeom>
+          <a:noFill/>
+        </p:spPr>
+        <p:txBody>
+          <a:bodyPr wrap="square">
+            <a:spAutoFit/>
+          </a:bodyPr>
+          <a:lstStyle/>
+          <a:p>
+            <a:pPr algn="l"/>
+            <a:r>
+              <a:rPr sz="3000" b="1">
+                <a:solidFill>
+                  <a:srgbClr val="0F1E3D"/>
+                </a:solidFill>
+                <a:latin typeface="Helvetica"/>
+              </a:rPr>
+              <a:t>What's already shipped</a:t>
+            </a:r>
+          </a:p>
+        </p:txBody>
+      </p:sp>
+      <p:sp>
+        <p:nvSpPr>
+          <p:cNvPr id="4" name="TextBox 3"/>
+          <p:cNvSpPr txBox="1"/>
+          <p:nvPr/>
+        </p:nvSpPr>
+        <p:spPr>
+          <a:xfrm>
+            <a:off x="548640" y="1371600"/>
+            <a:ext cx="11094415" cy="4937760"/>
+          </a:xfrm>
+          <a:prstGeom prst="rect">
+            <a:avLst/>
+          </a:prstGeom>
+          <a:noFill/>
+        </p:spPr>
+        <p:txBody>
+          <a:bodyPr wrap="square">
+            <a:spAutoFit/>
+          </a:bodyPr>
+          <a:lstStyle/>
+          <a:p>
+            <a:pPr algn="l">
+              <a:spcAft>
+                <a:spcPts val="800"/>
+              </a:spcAft>
+            </a:pPr>
+            <a:r>
+              <a:rPr sz="2000">
+                <a:solidFill>
+                  <a:srgbClr val="4A4A4A"/>
+                </a:solidFill>
+                <a:latin typeface="Helvetica"/>
+              </a:rPr>
+              <a:t>•  714 connectors / 6,773 ops / 7,442 corpus playbook-steps indexed in SQLite</a:t>
+            </a:r>
+          </a:p>
+          <a:p>
+            <a:pPr algn="l">
+              <a:spcAft>
+                <a:spcPts val="800"/>
+              </a:spcAft>
+            </a:pPr>
+            <a:r>
+              <a:rPr sz="2000">
+                <a:solidFill>
+                  <a:srgbClr val="4A4A4A"/>
+                </a:solidFill>
+                <a:latin typeface="Helvetica"/>
+              </a:rPr>
+              <a:t>•  Compiler v1: parser → resolver → validator → emitter (round-trip lossless)</a:t>
+            </a:r>
+          </a:p>
+          <a:p>
+            <a:pPr algn="l">
+              <a:spcAft>
+                <a:spcPts val="800"/>
+              </a:spcAft>
+            </a:pPr>
+            <a:r>
+              <a:rPr sz="2000">
+                <a:solidFill>
+                  <a:srgbClr val="4A4A4A"/>
+                </a:solidFill>
+                <a:latin typeface="Helvetica"/>
+              </a:rPr>
+              <a:t>•  Render-path validator: simulator + 4 heuristic checks (C1-C4) + suggest_fix_for_diagnostic</a:t>
+            </a:r>
+          </a:p>
+          <a:p>
+            <a:pPr algn="l">
+              <a:spcAft>
+                <a:spcPts val="800"/>
+              </a:spcAft>
+            </a:pPr>
+            <a:r>
+              <a:rPr sz="2000">
+                <a:solidFill>
+                  <a:srgbClr val="4A4A4A"/>
+                </a:solidFill>
+                <a:latin typeface="Helvetica"/>
+              </a:rPr>
+              <a:t>•  9 live-FSR probe scenarios + 22 fixture-backed parity tests pinning runtime semantics</a:t>
+            </a:r>
+          </a:p>
+          <a:p>
+            <a:pPr algn="l">
+              <a:spcAft>
+                <a:spcPts val="800"/>
+              </a:spcAft>
+            </a:pPr>
+            <a:r>
+              <a:rPr sz="2000">
+                <a:solidFill>
+                  <a:srgbClr val="4A4A4A"/>
+                </a:solidFill>
+                <a:latin typeface="Helvetica"/>
+              </a:rPr>
+              <a:t>•  Step-param audit (docs/step_params/) — 23 reports, surfacing real resolver gaps</a:t>
+            </a:r>
+          </a:p>
+          <a:p>
+            <a:pPr algn="l">
+              <a:spcAft>
+                <a:spcPts val="800"/>
+              </a:spcAft>
+            </a:pPr>
+            <a:r>
+              <a:rPr sz="2000">
+                <a:solidFill>
+                  <a:srgbClr val="4A4A4A"/>
+                </a:solidFill>
+                <a:latin typeface="Helvetica"/>
+              </a:rPr>
+              <a:t>•  Visual editor diagnostics: per-node badges + drawer + suggest-fix Apply loop</a:t>
+            </a:r>
+          </a:p>
+          <a:p>
+            <a:pPr algn="l">
+              <a:spcAft>
+                <a:spcPts val="800"/>
+              </a:spcAft>
+            </a:pPr>
+            <a:r>
+              <a:rPr sz="2000">
+                <a:solidFill>
+                  <a:srgbClr val="4A4A4A"/>
+                </a:solidFill>
+                <a:latin typeface="Helvetica"/>
+              </a:rPr>
+              <a:t>•  30+ MCP tools; agent prompt with mandatory analyze gate; 407 Python + 214 JS tests green</a:t>
+            </a:r>
+          </a:p>
+          <a:p>
+            <a:pPr algn="l">
+              <a:spcAft>
+                <a:spcPts val="800"/>
+              </a:spcAft>
+            </a:pPr>
+            <a:r>
+              <a:rPr sz="2000">
+                <a:solidFill>
+                  <a:srgbClr val="4A4A4A"/>
+                </a:solidFill>
+                <a:latin typeface="Helvetica"/>
+              </a:rPr>
+              <a:t>•  fsrpb CLI: validate · analyze · compile · push · diff · dump-step-params</a:t>
+            </a:r>
+          </a:p>
+        </p:txBody>
+      </p:sp>
+    </p:spTree>
+  </p:cSld>
+  <p:clrMapOvr>
+    <a:masterClrMapping/>
+  </p:clrMapOvr>
+</p:sld>
+</file>
+
+<file path=ppt/slides/slide29.xml><?xml version="1.0" encoding="utf-8"?>
+<p:sld xmlns:a="http://schemas.openxmlformats.org/drawingml/2006/main" xmlns:p="http://schemas.openxmlformats.org/presentationml/2006/main" xmlns:r="http://schemas.openxmlformats.org/officeDocument/2006/relationships">
+  <p:cSld>
+    <p:bg>
+      <p:bgPr>
+        <a:solidFill>
+          <a:srgbClr val="F4F4F6"/>
+        </a:solidFill>
+        <a:effectLst/>
+      </p:bgPr>
+    </p:bg>
+    <p:spTree>
+      <p:nvGrpSpPr>
+        <p:cNvPr id="1" name=""/>
+        <p:cNvGrpSpPr/>
+        <p:nvPr/>
+      </p:nvGrpSpPr>
+      <p:grpSpPr/>
+      <p:sp>
+        <p:nvSpPr>
+          <p:cNvPr id="2" name="Rectangle 1"/>
+          <p:cNvSpPr/>
+          <p:nvPr/>
+        </p:nvSpPr>
+        <p:spPr>
+          <a:xfrm>
+            <a:off x="0" y="0"/>
+            <a:ext cx="12191695" cy="45720"/>
+          </a:xfrm>
+          <a:prstGeom prst="rect">
+            <a:avLst/>
+          </a:prstGeom>
+          <a:solidFill>
+            <a:srgbClr val="E83E3E"/>
+          </a:solidFill>
+          <a:ln>
+            <a:noFill/>
+          </a:ln>
+        </p:spPr>
+        <p:style>
+          <a:lnRef idx="1">
+            <a:schemeClr val="accent1"/>
+          </a:lnRef>
+          <a:fillRef idx="3">
+            <a:schemeClr val="accent1"/>
+          </a:fillRef>
+          <a:effectRef idx="2">
+            <a:schemeClr val="accent1"/>
+          </a:effectRef>
+          <a:fontRef idx="minor">
+            <a:schemeClr val="lt1"/>
+          </a:fontRef>
+        </p:style>
+        <p:txBody>
+          <a:bodyPr rtlCol="0" anchor="ctr"/>
+          <a:lstStyle/>
+          <a:p>
+            <a:pPr algn="ctr"/>
+          </a:p>
+        </p:txBody>
+      </p:sp>
+      <p:sp>
+        <p:nvSpPr>
+          <p:cNvPr id="3" name="TextBox 2"/>
+          <p:cNvSpPr txBox="1"/>
+          <p:nvPr/>
+        </p:nvSpPr>
+        <p:spPr>
+          <a:xfrm>
+            <a:off x="548640" y="365760"/>
+            <a:ext cx="11094415" cy="822960"/>
+          </a:xfrm>
+          <a:prstGeom prst="rect">
+            <a:avLst/>
+          </a:prstGeom>
+          <a:noFill/>
+        </p:spPr>
+        <p:txBody>
+          <a:bodyPr wrap="square">
+            <a:spAutoFit/>
+          </a:bodyPr>
+          <a:lstStyle/>
+          <a:p>
+            <a:pPr algn="l"/>
+            <a:r>
+              <a:rPr sz="3000" b="1">
+                <a:solidFill>
+                  <a:srgbClr val="0F1E3D"/>
+                </a:solidFill>
+                <a:latin typeface="Helvetica"/>
+              </a:rPr>
+              <a:t>What's next</a:t>
+            </a:r>
+          </a:p>
+        </p:txBody>
+      </p:sp>
+      <p:sp>
+        <p:nvSpPr>
+          <p:cNvPr id="4" name="TextBox 3"/>
+          <p:cNvSpPr txBox="1"/>
+          <p:nvPr/>
+        </p:nvSpPr>
+        <p:spPr>
+          <a:xfrm>
+            <a:off x="548640" y="1371600"/>
+            <a:ext cx="11094415" cy="4937760"/>
+          </a:xfrm>
+          <a:prstGeom prst="rect">
+            <a:avLst/>
+          </a:prstGeom>
+          <a:noFill/>
+        </p:spPr>
+        <p:txBody>
+          <a:bodyPr wrap="square">
+            <a:spAutoFit/>
+          </a:bodyPr>
+          <a:lstStyle/>
+          <a:p>
+            <a:pPr algn="l">
+              <a:spcAft>
+                <a:spcPts val="800"/>
+              </a:spcAft>
+            </a:pPr>
+            <a:r>
+              <a:rPr sz="2000">
+                <a:solidFill>
+                  <a:srgbClr val="4A4A4A"/>
+                </a:solidFill>
+                <a:latin typeface="Helvetica"/>
+              </a:rPr>
+              <a:t>•  Phase 5 analyzer checks: type mismatch, index-into-non-list, dead-step detection</a:t>
+            </a:r>
+          </a:p>
+          <a:p>
+            <a:pPr algn="l">
+              <a:spcAft>
+                <a:spcPts val="800"/>
+              </a:spcAft>
+            </a:pPr>
+            <a:r>
+              <a:rPr sz="2000">
+                <a:solidFill>
+                  <a:srgbClr val="4A4A4A"/>
+                </a:solidFill>
+                <a:latin typeface="Helvetica"/>
+              </a:rPr>
+              <a:t>•  Recursive output_shape — catch typos in nested paths (vars.steps.X.data.foo)</a:t>
+            </a:r>
+          </a:p>
+          <a:p>
+            <a:pPr algn="l">
+              <a:spcAft>
+                <a:spcPts val="800"/>
+              </a:spcAft>
+            </a:pPr>
+            <a:r>
+              <a:rPr sz="2000">
+                <a:solidFill>
+                  <a:srgbClr val="4A4A4A"/>
+                </a:solidFill>
+                <a:latin typeface="Helvetica"/>
+              </a:rPr>
+              <a:t>•  Resolver gap close-out — the dump-step-params reports already list each by row count</a:t>
+            </a:r>
+          </a:p>
+          <a:p>
+            <a:pPr algn="l">
+              <a:spcAft>
+                <a:spcPts val="800"/>
+              </a:spcAft>
+            </a:pPr>
+            <a:r>
+              <a:rPr sz="2000">
+                <a:solidFill>
+                  <a:srgbClr val="4A4A4A"/>
+                </a:solidFill>
+                <a:latin typeface="Helvetica"/>
+              </a:rPr>
+              <a:t>•  Inspector "Render path" tab: rendered args + simulated output + consumed paths inline</a:t>
+            </a:r>
+          </a:p>
+          <a:p>
+            <a:pPr algn="l">
+              <a:spcAft>
+                <a:spcPts val="800"/>
+              </a:spcAft>
+            </a:pPr>
+            <a:r>
+              <a:rPr sz="2000">
+                <a:solidFill>
+                  <a:srgbClr val="4A4A4A"/>
+                </a:solidFill>
+                <a:latin typeface="Helvetica"/>
+              </a:rPr>
+              <a:t>•  Bulk fix: same typo across N steps → one click patches all</a:t>
+            </a:r>
+          </a:p>
+          <a:p>
+            <a:pPr algn="l">
+              <a:spcAft>
+                <a:spcPts val="800"/>
+              </a:spcAft>
+            </a:pPr>
+            <a:r>
+              <a:rPr sz="2000">
+                <a:solidFill>
+                  <a:srgbClr val="4A4A4A"/>
+                </a:solidFill>
+                <a:latin typeface="Helvetica"/>
+              </a:rPr>
+              <a:t>•  LLM evaluation harness — measure "any model works" with repeatable scenarios</a:t>
+            </a:r>
+          </a:p>
+          <a:p>
+            <a:pPr algn="l">
+              <a:spcAft>
+                <a:spcPts val="800"/>
+              </a:spcAft>
+            </a:pPr>
+            <a:r>
+              <a:rPr sz="2000">
+                <a:solidFill>
+                  <a:srgbClr val="4A4A4A"/>
+                </a:solidFill>
+                <a:latin typeface="Helvetica"/>
+              </a:rPr>
+              <a:t>•  Vendor doc ingest (see preceding slide) — zero-day SaaS support</a:t>
+            </a:r>
+          </a:p>
+          <a:p>
+            <a:pPr algn="l">
+              <a:spcAft>
+                <a:spcPts val="800"/>
+              </a:spcAft>
+            </a:pPr>
+            <a:r>
+              <a:rPr sz="2000">
+                <a:solidFill>
+                  <a:srgbClr val="4A4A4A"/>
+                </a:solidFill>
+                <a:latin typeface="Helvetica"/>
+              </a:rPr>
+              <a:t>•  Recipe expansion: enrichment, triage, containment, approval-gated workflows</a:t>
             </a:r>
           </a:p>
         </p:txBody>
@@ -7408,6 +11303,229 @@
 </p:sld>
 </file>
 
+<file path=ppt/slides/slide30.xml><?xml version="1.0" encoding="utf-8"?>
+<p:sld xmlns:a="http://schemas.openxmlformats.org/drawingml/2006/main" xmlns:p="http://schemas.openxmlformats.org/presentationml/2006/main" xmlns:r="http://schemas.openxmlformats.org/officeDocument/2006/relationships">
+  <p:cSld>
+    <p:bg>
+      <p:bgPr>
+        <a:solidFill>
+          <a:srgbClr val="F4F4F6"/>
+        </a:solidFill>
+        <a:effectLst/>
+      </p:bgPr>
+    </p:bg>
+    <p:spTree>
+      <p:nvGrpSpPr>
+        <p:cNvPr id="1" name=""/>
+        <p:cNvGrpSpPr/>
+        <p:nvPr/>
+      </p:nvGrpSpPr>
+      <p:grpSpPr/>
+      <p:sp>
+        <p:nvSpPr>
+          <p:cNvPr id="2" name="Rectangle 1"/>
+          <p:cNvSpPr/>
+          <p:nvPr/>
+        </p:nvSpPr>
+        <p:spPr>
+          <a:xfrm>
+            <a:off x="0" y="0"/>
+            <a:ext cx="12191695" cy="45720"/>
+          </a:xfrm>
+          <a:prstGeom prst="rect">
+            <a:avLst/>
+          </a:prstGeom>
+          <a:solidFill>
+            <a:srgbClr val="E83E3E"/>
+          </a:solidFill>
+          <a:ln>
+            <a:noFill/>
+          </a:ln>
+        </p:spPr>
+        <p:style>
+          <a:lnRef idx="1">
+            <a:schemeClr val="accent1"/>
+          </a:lnRef>
+          <a:fillRef idx="3">
+            <a:schemeClr val="accent1"/>
+          </a:fillRef>
+          <a:effectRef idx="2">
+            <a:schemeClr val="accent1"/>
+          </a:effectRef>
+          <a:fontRef idx="minor">
+            <a:schemeClr val="lt1"/>
+          </a:fontRef>
+        </p:style>
+        <p:txBody>
+          <a:bodyPr rtlCol="0" anchor="ctr"/>
+          <a:lstStyle/>
+          <a:p>
+            <a:pPr algn="ctr"/>
+          </a:p>
+        </p:txBody>
+      </p:sp>
+      <p:sp>
+        <p:nvSpPr>
+          <p:cNvPr id="3" name="TextBox 2"/>
+          <p:cNvSpPr txBox="1"/>
+          <p:nvPr/>
+        </p:nvSpPr>
+        <p:spPr>
+          <a:xfrm>
+            <a:off x="548640" y="365760"/>
+            <a:ext cx="11094415" cy="822960"/>
+          </a:xfrm>
+          <a:prstGeom prst="rect">
+            <a:avLst/>
+          </a:prstGeom>
+          <a:noFill/>
+        </p:spPr>
+        <p:txBody>
+          <a:bodyPr wrap="square">
+            <a:spAutoFit/>
+          </a:bodyPr>
+          <a:lstStyle/>
+          <a:p>
+            <a:pPr algn="l"/>
+            <a:r>
+              <a:rPr sz="3000" b="1">
+                <a:solidFill>
+                  <a:srgbClr val="0F1E3D"/>
+                </a:solidFill>
+                <a:latin typeface="Helvetica"/>
+              </a:rPr>
+              <a:t>Takeaways</a:t>
+            </a:r>
+          </a:p>
+        </p:txBody>
+      </p:sp>
+      <p:sp>
+        <p:nvSpPr>
+          <p:cNvPr id="4" name="TextBox 3"/>
+          <p:cNvSpPr txBox="1"/>
+          <p:nvPr/>
+        </p:nvSpPr>
+        <p:spPr>
+          <a:xfrm>
+            <a:off x="548640" y="1371600"/>
+            <a:ext cx="11094415" cy="4937760"/>
+          </a:xfrm>
+          <a:prstGeom prst="rect">
+            <a:avLst/>
+          </a:prstGeom>
+          <a:noFill/>
+        </p:spPr>
+        <p:txBody>
+          <a:bodyPr wrap="square">
+            <a:spAutoFit/>
+          </a:bodyPr>
+          <a:lstStyle/>
+          <a:p>
+            <a:pPr algn="l">
+              <a:spcAft>
+                <a:spcPts val="800"/>
+              </a:spcAft>
+            </a:pPr>
+            <a:r>
+              <a:rPr sz="2000">
+                <a:solidFill>
+                  <a:srgbClr val="4A4A4A"/>
+                </a:solidFill>
+                <a:latin typeface="Helvetica"/>
+              </a:rPr>
+              <a:t>•  AI is the right driver, but only because the cornerstones underneath are deterministic</a:t>
+            </a:r>
+          </a:p>
+          <a:p>
+            <a:pPr algn="l">
+              <a:spcAft>
+                <a:spcPts val="800"/>
+              </a:spcAft>
+            </a:pPr>
+            <a:r>
+              <a:rPr sz="2000">
+                <a:solidFill>
+                  <a:srgbClr val="4A4A4A"/>
+                </a:solidFill>
+                <a:latin typeface="Helvetica"/>
+              </a:rPr>
+              <a:t>•  Every cornerstone (compiler, validator, probes, audit) stands alone as a useful tool</a:t>
+            </a:r>
+          </a:p>
+          <a:p>
+            <a:pPr algn="l">
+              <a:spcAft>
+                <a:spcPts val="800"/>
+              </a:spcAft>
+            </a:pPr>
+            <a:r>
+              <a:rPr sz="2000">
+                <a:solidFill>
+                  <a:srgbClr val="4A4A4A"/>
+                </a:solidFill>
+                <a:latin typeface="Helvetica"/>
+              </a:rPr>
+              <a:t>•  The agent prompt's analyze gate is the system's seatbelt — verifiable, not aspirational</a:t>
+            </a:r>
+          </a:p>
+          <a:p>
+            <a:pPr algn="l">
+              <a:spcAft>
+                <a:spcPts val="800"/>
+              </a:spcAft>
+            </a:pPr>
+            <a:r>
+              <a:rPr sz="2000">
+                <a:solidFill>
+                  <a:srgbClr val="4A4A4A"/>
+                </a:solidFill>
+                <a:latin typeface="Helvetica"/>
+              </a:rPr>
+              <a:t>•  Same MCP tools serve chat, CLI, and visual editor — one source of truth</a:t>
+            </a:r>
+          </a:p>
+          <a:p>
+            <a:pPr algn="l">
+              <a:spcAft>
+                <a:spcPts val="800"/>
+              </a:spcAft>
+            </a:pPr>
+            <a:r>
+              <a:rPr sz="2000">
+                <a:solidFill>
+                  <a:srgbClr val="4A4A4A"/>
+                </a:solidFill>
+                <a:latin typeface="Helvetica"/>
+              </a:rPr>
+              <a:t>•  YAML in git + analyze-before-push = playbooks that can be reviewed, promoted, rolled back</a:t>
+            </a:r>
+          </a:p>
+          <a:p>
+            <a:pPr algn="l">
+              <a:spcAft>
+                <a:spcPts val="800"/>
+              </a:spcAft>
+            </a:pPr>
+            <a:r>
+              <a:rPr sz="2000">
+                <a:solidFill>
+                  <a:srgbClr val="4A4A4A"/>
+                </a:solidFill>
+                <a:latin typeface="Helvetica"/>
+              </a:rPr>
+              <a:t>•  If you swap the LLM tomorrow, everything still works. That's the value of the chassis.</a:t>
+            </a:r>
+          </a:p>
+        </p:txBody>
+      </p:sp>
+    </p:spTree>
+  </p:cSld>
+  <p:clrMapOvr>
+    <a:masterClrMapping/>
+  </p:clrMapOvr>
+</p:sld>
+</file>
+
 <file path=ppt/slides/slide4.xml><?xml version="1.0" encoding="utf-8"?>
 <p:sld xmlns:a="http://schemas.openxmlformats.org/drawingml/2006/main" xmlns:p="http://schemas.openxmlformats.org/presentationml/2006/main" xmlns:r="http://schemas.openxmlformats.org/officeDocument/2006/relationships">
   <p:cSld>
@@ -7499,7 +11617,7 @@
                 </a:solidFill>
                 <a:latin typeface="Helvetica"/>
               </a:rPr>
-              <a:t>Why now: agents are good enough</a:t>
+              <a:t>Why AI is the right driver here</a:t>
             </a:r>
           </a:p>
         </p:txBody>
@@ -7538,55 +11656,71 @@
                 </a:solidFill>
                 <a:latin typeface="Helvetica"/>
               </a:rPr>
-              <a:t>•  Frontier LLMs handle structured authoring well — given the right tools</a:t>
-            </a:r>
-          </a:p>
-          <a:p>
-            <a:pPr algn="l">
-              <a:spcAft>
-                <a:spcPts val="800"/>
-              </a:spcAft>
-            </a:pPr>
-            <a:r>
-              <a:rPr sz="2000">
-                <a:solidFill>
-                  <a:srgbClr val="4A4A4A"/>
-                </a:solidFill>
-                <a:latin typeface="Helvetica"/>
-              </a:rPr>
-              <a:t>•  Agents need: a queryable spec, a deterministic compiler, fast feedback</a:t>
-            </a:r>
-          </a:p>
-          <a:p>
-            <a:pPr algn="l">
-              <a:spcAft>
-                <a:spcPts val="800"/>
-              </a:spcAft>
-            </a:pPr>
-            <a:r>
-              <a:rPr sz="2000">
-                <a:solidFill>
-                  <a:srgbClr val="4A4A4A"/>
-                </a:solidFill>
-                <a:latin typeface="Helvetica"/>
-              </a:rPr>
-              <a:t>•  No fine-tuning required — tool use plus good cheatsheets is sufficient</a:t>
-            </a:r>
-          </a:p>
-          <a:p>
-            <a:pPr algn="l">
-              <a:spcAft>
-                <a:spcPts val="800"/>
-              </a:spcAft>
-            </a:pPr>
-            <a:r>
-              <a:rPr sz="2000">
-                <a:solidFill>
-                  <a:srgbClr val="4A4A4A"/>
-                </a:solidFill>
-                <a:latin typeface="Helvetica"/>
-              </a:rPr>
-              <a:t>•  Bottleneck moved from "can the model write YAML" to "can it verify what it wrote"</a:t>
+              <a:t>•  Playbook authoring is structured + bounded — exactly where modern LLMs shine</a:t>
+            </a:r>
+          </a:p>
+          <a:p>
+            <a:pPr algn="l">
+              <a:spcAft>
+                <a:spcPts val="800"/>
+              </a:spcAft>
+            </a:pPr>
+            <a:r>
+              <a:rPr sz="2000">
+                <a:solidFill>
+                  <a:srgbClr val="4A4A4A"/>
+                </a:solidFill>
+                <a:latin typeface="Helvetica"/>
+              </a:rPr>
+              <a:t>•  The hard parts are knowing which connector / op / picklist exists, not invention</a:t>
+            </a:r>
+          </a:p>
+          <a:p>
+            <a:pPr algn="l">
+              <a:spcAft>
+                <a:spcPts val="800"/>
+              </a:spcAft>
+            </a:pPr>
+            <a:r>
+              <a:rPr sz="2000">
+                <a:solidFill>
+                  <a:srgbClr val="4A4A4A"/>
+                </a:solidFill>
+                <a:latin typeface="Helvetica"/>
+              </a:rPr>
+              <a:t>•  Natural language → YAML is the right abstraction step; LLMs skip the click-through</a:t>
+            </a:r>
+          </a:p>
+          <a:p>
+            <a:pPr algn="l">
+              <a:spcAft>
+                <a:spcPts val="800"/>
+              </a:spcAft>
+            </a:pPr>
+            <a:r>
+              <a:rPr sz="2000">
+                <a:solidFill>
+                  <a:srgbClr val="4A4A4A"/>
+                </a:solidFill>
+                <a:latin typeface="Helvetica"/>
+              </a:rPr>
+              <a:t>•  Agentic tool use means the model asks the system instead of guessing</a:t>
+            </a:r>
+          </a:p>
+          <a:p>
+            <a:pPr algn="l">
+              <a:spcAft>
+                <a:spcPts val="800"/>
+              </a:spcAft>
+            </a:pPr>
+            <a:r>
+              <a:rPr sz="2000">
+                <a:solidFill>
+                  <a:srgbClr val="4A4A4A"/>
+                </a:solidFill>
+                <a:latin typeface="Helvetica"/>
+              </a:rPr>
+              <a:t>•  Bottleneck moved: not "can the model write YAML" but "can it verify what it wrote"</a:t>
             </a:r>
           </a:p>
         </p:txBody>
@@ -7690,7 +11824,7 @@
                 </a:solidFill>
                 <a:latin typeface="Helvetica"/>
               </a:rPr>
-              <a:t>The core idea</a:t>
+              <a:t>But this is more than "just AI"</a:t>
             </a:r>
           </a:p>
         </p:txBody>
@@ -7729,313 +11863,71 @@
                 </a:solidFill>
                 <a:latin typeface="Helvetica"/>
               </a:rPr>
-              <a:t>•  One simplified YAML IR. Three authoring surfaces (CLI, agent-via-MCP, future visual editor)</a:t>
-            </a:r>
-          </a:p>
-          <a:p>
-            <a:pPr algn="l">
-              <a:spcAft>
-                <a:spcPts val="800"/>
-              </a:spcAft>
-            </a:pPr>
-            <a:r>
-              <a:rPr sz="2000">
-                <a:solidFill>
-                  <a:srgbClr val="4A4A4A"/>
-                </a:solidFill>
-                <a:latin typeface="Helvetica"/>
-              </a:rPr>
-              <a:t>•  All three compile through the same pipeline to native FSR WorkflowCollection JSON</a:t>
-            </a:r>
-          </a:p>
-          <a:p>
-            <a:pPr algn="l">
-              <a:spcAft>
-                <a:spcPts val="800"/>
-              </a:spcAft>
-            </a:pPr>
-            <a:r>
-              <a:rPr sz="2000">
-                <a:solidFill>
-                  <a:srgbClr val="4A4A4A"/>
-                </a:solidFill>
-                <a:latin typeface="Helvetica"/>
-              </a:rPr>
-              <a:t>•  FortiSOAR stays the execution engine — we never replace it, we author into it</a:t>
-            </a:r>
-          </a:p>
-          <a:p>
-            <a:pPr algn="l">
-              <a:spcAft>
-                <a:spcPts val="800"/>
-              </a:spcAft>
-            </a:pPr>
-            <a:r>
-              <a:rPr sz="2000">
-                <a:solidFill>
-                  <a:srgbClr val="4A4A4A"/>
-                </a:solidFill>
-                <a:latin typeface="Helvetica"/>
-              </a:rPr>
-              <a:t>•  Same IR across surfaces → output is interoperable</a:t>
-            </a:r>
-          </a:p>
-        </p:txBody>
-      </p:sp>
-      <p:sp>
-        <p:nvSpPr>
-          <p:cNvPr id="5" name="Rounded Rectangle 4"/>
-          <p:cNvSpPr/>
-          <p:nvPr/>
-        </p:nvSpPr>
-        <p:spPr>
-          <a:xfrm>
-            <a:off x="3078327" y="4206240"/>
-            <a:ext cx="1828800" cy="640080"/>
-          </a:xfrm>
-          <a:prstGeom prst="roundRect">
-            <a:avLst/>
-          </a:prstGeom>
-          <a:solidFill>
-            <a:srgbClr val="0F1E3D"/>
-          </a:solidFill>
-          <a:ln>
-            <a:noFill/>
-          </a:ln>
-        </p:spPr>
-        <p:style>
-          <a:lnRef idx="1">
-            <a:schemeClr val="accent1"/>
-          </a:lnRef>
-          <a:fillRef idx="3">
-            <a:schemeClr val="accent1"/>
-          </a:fillRef>
-          <a:effectRef idx="2">
-            <a:schemeClr val="accent1"/>
-          </a:effectRef>
-          <a:fontRef idx="minor">
-            <a:schemeClr val="lt1"/>
-          </a:fontRef>
-        </p:style>
-        <p:txBody>
-          <a:bodyPr rtlCol="0" anchor="ctr"/>
-          <a:lstStyle/>
-          <a:p>
-            <a:pPr algn="ctr"/>
-            <a:r>
-              <a:rPr sz="1300">
-                <a:solidFill>
-                  <a:srgbClr val="FFFFFF"/>
-                </a:solidFill>
-                <a:latin typeface="Helvetica"/>
-              </a:rPr>
-              <a:t>Human (CLI)</a:t>
-            </a:r>
-          </a:p>
-        </p:txBody>
-      </p:sp>
-      <p:sp>
-        <p:nvSpPr>
-          <p:cNvPr id="6" name="Rounded Rectangle 5"/>
-          <p:cNvSpPr/>
-          <p:nvPr/>
-        </p:nvSpPr>
-        <p:spPr>
-          <a:xfrm>
-            <a:off x="5181447" y="4206240"/>
-            <a:ext cx="1828800" cy="640080"/>
-          </a:xfrm>
-          <a:prstGeom prst="roundRect">
-            <a:avLst/>
-          </a:prstGeom>
-          <a:solidFill>
-            <a:srgbClr val="0F1E3D"/>
-          </a:solidFill>
-          <a:ln>
-            <a:noFill/>
-          </a:ln>
-        </p:spPr>
-        <p:style>
-          <a:lnRef idx="1">
-            <a:schemeClr val="accent1"/>
-          </a:lnRef>
-          <a:fillRef idx="3">
-            <a:schemeClr val="accent1"/>
-          </a:fillRef>
-          <a:effectRef idx="2">
-            <a:schemeClr val="accent1"/>
-          </a:effectRef>
-          <a:fontRef idx="minor">
-            <a:schemeClr val="lt1"/>
-          </a:fontRef>
-        </p:style>
-        <p:txBody>
-          <a:bodyPr rtlCol="0" anchor="ctr"/>
-          <a:lstStyle/>
-          <a:p>
-            <a:pPr algn="ctr"/>
-            <a:r>
-              <a:rPr sz="1300">
-                <a:solidFill>
-                  <a:srgbClr val="FFFFFF"/>
-                </a:solidFill>
-                <a:latin typeface="Helvetica"/>
-              </a:rPr>
-              <a:t>Agent (MCP)</a:t>
-            </a:r>
-          </a:p>
-        </p:txBody>
-      </p:sp>
-      <p:sp>
-        <p:nvSpPr>
-          <p:cNvPr id="7" name="Rounded Rectangle 6"/>
-          <p:cNvSpPr/>
-          <p:nvPr/>
-        </p:nvSpPr>
-        <p:spPr>
-          <a:xfrm>
-            <a:off x="7284567" y="4206240"/>
-            <a:ext cx="1828800" cy="640080"/>
-          </a:xfrm>
-          <a:prstGeom prst="roundRect">
-            <a:avLst/>
-          </a:prstGeom>
-          <a:solidFill>
-            <a:srgbClr val="0F1E3D"/>
-          </a:solidFill>
-          <a:ln>
-            <a:noFill/>
-          </a:ln>
-        </p:spPr>
-        <p:style>
-          <a:lnRef idx="1">
-            <a:schemeClr val="accent1"/>
-          </a:lnRef>
-          <a:fillRef idx="3">
-            <a:schemeClr val="accent1"/>
-          </a:fillRef>
-          <a:effectRef idx="2">
-            <a:schemeClr val="accent1"/>
-          </a:effectRef>
-          <a:fontRef idx="minor">
-            <a:schemeClr val="lt1"/>
-          </a:fontRef>
-        </p:style>
-        <p:txBody>
-          <a:bodyPr rtlCol="0" anchor="ctr"/>
-          <a:lstStyle/>
-          <a:p>
-            <a:pPr algn="ctr"/>
-            <a:r>
-              <a:rPr sz="1300">
-                <a:solidFill>
-                  <a:srgbClr val="FFFFFF"/>
-                </a:solidFill>
-                <a:latin typeface="Helvetica"/>
-              </a:rPr>
-              <a:t>Visual editor</a:t>
-            </a:r>
-          </a:p>
-        </p:txBody>
-      </p:sp>
-      <p:sp>
-        <p:nvSpPr>
-          <p:cNvPr id="8" name="Rounded Rectangle 7"/>
-          <p:cNvSpPr/>
-          <p:nvPr/>
-        </p:nvSpPr>
-        <p:spPr>
-          <a:xfrm>
-            <a:off x="3901287" y="5120640"/>
-            <a:ext cx="1828800" cy="640080"/>
-          </a:xfrm>
-          <a:prstGeom prst="roundRect">
-            <a:avLst/>
-          </a:prstGeom>
-          <a:solidFill>
-            <a:srgbClr val="E83E3E"/>
-          </a:solidFill>
-          <a:ln>
-            <a:noFill/>
-          </a:ln>
-        </p:spPr>
-        <p:style>
-          <a:lnRef idx="1">
-            <a:schemeClr val="accent1"/>
-          </a:lnRef>
-          <a:fillRef idx="3">
-            <a:schemeClr val="accent1"/>
-          </a:fillRef>
-          <a:effectRef idx="2">
-            <a:schemeClr val="accent1"/>
-          </a:effectRef>
-          <a:fontRef idx="minor">
-            <a:schemeClr val="lt1"/>
-          </a:fontRef>
-        </p:style>
-        <p:txBody>
-          <a:bodyPr rtlCol="0" anchor="ctr"/>
-          <a:lstStyle/>
-          <a:p>
-            <a:pPr algn="ctr"/>
-            <a:r>
-              <a:rPr sz="1300" b="1">
-                <a:solidFill>
-                  <a:srgbClr val="FFFFFF"/>
-                </a:solidFill>
-              </a:rPr>
-              <a:t>YAML IR</a:t>
-            </a:r>
-          </a:p>
-        </p:txBody>
-      </p:sp>
-      <p:sp>
-        <p:nvSpPr>
-          <p:cNvPr id="9" name="Rounded Rectangle 8"/>
-          <p:cNvSpPr/>
-          <p:nvPr/>
-        </p:nvSpPr>
-        <p:spPr>
-          <a:xfrm>
-            <a:off x="6461607" y="5120640"/>
-            <a:ext cx="1828800" cy="640080"/>
-          </a:xfrm>
-          <a:prstGeom prst="roundRect">
-            <a:avLst/>
-          </a:prstGeom>
-          <a:solidFill>
-            <a:srgbClr val="0F1E3D"/>
-          </a:solidFill>
-          <a:ln>
-            <a:noFill/>
-          </a:ln>
-        </p:spPr>
-        <p:style>
-          <a:lnRef idx="1">
-            <a:schemeClr val="accent1"/>
-          </a:lnRef>
-          <a:fillRef idx="3">
-            <a:schemeClr val="accent1"/>
-          </a:fillRef>
-          <a:effectRef idx="2">
-            <a:schemeClr val="accent1"/>
-          </a:effectRef>
-          <a:fontRef idx="minor">
-            <a:schemeClr val="lt1"/>
-          </a:fontRef>
-        </p:style>
-        <p:txBody>
-          <a:bodyPr rtlCol="0" anchor="ctr"/>
-          <a:lstStyle/>
-          <a:p>
-            <a:pPr algn="ctr"/>
-            <a:r>
-              <a:rPr sz="1300">
-                <a:solidFill>
-                  <a:srgbClr val="FFFFFF"/>
-                </a:solidFill>
-              </a:rPr>
-              <a:t>Compiler → FSR JSON</a:t>
+              <a:t>•  An LLM alone hallucinates connectors, invents picklist values, mistypes vars.steps paths</a:t>
+            </a:r>
+          </a:p>
+          <a:p>
+            <a:pPr algn="l">
+              <a:spcAft>
+                <a:spcPts val="800"/>
+              </a:spcAft>
+            </a:pPr>
+            <a:r>
+              <a:rPr sz="2000">
+                <a:solidFill>
+                  <a:srgbClr val="4A4A4A"/>
+                </a:solidFill>
+                <a:latin typeface="Helvetica"/>
+              </a:rPr>
+              <a:t>•  Without verification it's a faster way to ship broken playbooks</a:t>
+            </a:r>
+          </a:p>
+          <a:p>
+            <a:pPr algn="l">
+              <a:spcAft>
+                <a:spcPts val="800"/>
+              </a:spcAft>
+            </a:pPr>
+            <a:r>
+              <a:rPr sz="2000">
+                <a:solidFill>
+                  <a:srgbClr val="4A4A4A"/>
+                </a:solidFill>
+                <a:latin typeface="Helvetica"/>
+              </a:rPr>
+              <a:t>•  The cornerstones below are deterministic, queryable, and ground-truth — they make AI safe</a:t>
+            </a:r>
+          </a:p>
+          <a:p>
+            <a:pPr algn="l">
+              <a:spcAft>
+                <a:spcPts val="800"/>
+              </a:spcAft>
+            </a:pPr>
+            <a:r>
+              <a:rPr sz="2000">
+                <a:solidFill>
+                  <a:srgbClr val="4A4A4A"/>
+                </a:solidFill>
+                <a:latin typeface="Helvetica"/>
+              </a:rPr>
+              <a:t>•  Each one stands alone as a tool a human can run; together they close the loop on AI</a:t>
+            </a:r>
+          </a:p>
+          <a:p>
+            <a:pPr algn="l">
+              <a:spcAft>
+                <a:spcPts val="800"/>
+              </a:spcAft>
+            </a:pPr>
+            <a:r>
+              <a:rPr sz="2000">
+                <a:solidFill>
+                  <a:srgbClr val="4A4A4A"/>
+                </a:solidFill>
+                <a:latin typeface="Helvetica"/>
+              </a:rPr>
+              <a:t>•  If you remove the AI tomorrow, every cornerstone is still a useful authoring + audit tool</a:t>
             </a:r>
           </a:p>
         </p:txBody>
@@ -8139,7 +12031,7 @@
                 </a:solidFill>
                 <a:latin typeface="Helvetica"/>
               </a:rPr>
-              <a:t>Why YAML is the right IR</a:t>
+              <a:t>The cornerstones (six pillars under the AI layer)</a:t>
             </a:r>
           </a:p>
         </p:txBody>
@@ -8178,55 +12070,87 @@
                 </a:solidFill>
                 <a:latin typeface="Helvetica"/>
               </a:rPr>
-              <a:t>•  Human-readable, diff-able, review-able in a PR</a:t>
-            </a:r>
-          </a:p>
-          <a:p>
-            <a:pPr algn="l">
-              <a:spcAft>
-                <a:spcPts val="800"/>
-              </a:spcAft>
-            </a:pPr>
-            <a:r>
-              <a:rPr sz="2000">
-                <a:solidFill>
-                  <a:srgbClr val="4A4A4A"/>
-                </a:solidFill>
-                <a:latin typeface="Helvetica"/>
-              </a:rPr>
-              <a:t>•  Trivially round-trippable: pull from FSR → YAML → edit → push</a:t>
-            </a:r>
-          </a:p>
-          <a:p>
-            <a:pPr algn="l">
-              <a:spcAft>
-                <a:spcPts val="800"/>
-              </a:spcAft>
-            </a:pPr>
-            <a:r>
-              <a:rPr sz="2000">
-                <a:solidFill>
-                  <a:srgbClr val="4A4A4A"/>
-                </a:solidFill>
-                <a:latin typeface="Helvetica"/>
-              </a:rPr>
-              <a:t>•  Easy for an LLM to emit and reason about</a:t>
-            </a:r>
-          </a:p>
-          <a:p>
-            <a:pPr algn="l">
-              <a:spcAft>
-                <a:spcPts val="800"/>
-              </a:spcAft>
-            </a:pPr>
-            <a:r>
-              <a:rPr sz="2000">
-                <a:solidFill>
-                  <a:srgbClr val="4A4A4A"/>
-                </a:solidFill>
-                <a:latin typeface="Helvetica"/>
-              </a:rPr>
-              <a:t>•  No vendor JSON ceremony (UUIDs, port coords, layout metadata) leaks into authoring</a:t>
+              <a:t>•  1.  SQLite reference store — connectors, ops, picklists, step types, Jinja, recipes</a:t>
+            </a:r>
+          </a:p>
+          <a:p>
+            <a:pPr algn="l">
+              <a:spcAft>
+                <a:spcPts val="800"/>
+              </a:spcAft>
+            </a:pPr>
+            <a:r>
+              <a:rPr sz="2000">
+                <a:solidFill>
+                  <a:srgbClr val="4A4A4A"/>
+                </a:solidFill>
+                <a:latin typeface="Helvetica"/>
+              </a:rPr>
+              <a:t>•  2.  Library-first compiler — parser → resolver → validator → emitter, errors as data</a:t>
+            </a:r>
+          </a:p>
+          <a:p>
+            <a:pPr algn="l">
+              <a:spcAft>
+                <a:spcPts val="800"/>
+              </a:spcAft>
+            </a:pPr>
+            <a:r>
+              <a:rPr sz="2000">
+                <a:solidFill>
+                  <a:srgbClr val="4A4A4A"/>
+                </a:solidFill>
+                <a:latin typeface="Helvetica"/>
+              </a:rPr>
+              <a:t>•  3.  Render-path validator — simulate playbooks offline, surface data-access bugs</a:t>
+            </a:r>
+          </a:p>
+          <a:p>
+            <a:pPr algn="l">
+              <a:spcAft>
+                <a:spcPts val="800"/>
+              </a:spcAft>
+            </a:pPr>
+            <a:r>
+              <a:rPr sz="2000">
+                <a:solidFill>
+                  <a:srgbClr val="4A4A4A"/>
+                </a:solidFill>
+                <a:latin typeface="Helvetica"/>
+              </a:rPr>
+              <a:t>•  4.  Live-FSR probes — capture real runtime semantics into reusable fixtures</a:t>
+            </a:r>
+          </a:p>
+          <a:p>
+            <a:pPr algn="l">
+              <a:spcAft>
+                <a:spcPts val="800"/>
+              </a:spcAft>
+            </a:pPr>
+            <a:r>
+              <a:rPr sz="2000">
+                <a:solidFill>
+                  <a:srgbClr val="4A4A4A"/>
+                </a:solidFill>
+                <a:latin typeface="Helvetica"/>
+              </a:rPr>
+              <a:t>•  5.  Step-param audit — corpus-driven param truth, surfaces resolver gaps</a:t>
+            </a:r>
+          </a:p>
+          <a:p>
+            <a:pPr algn="l">
+              <a:spcAft>
+                <a:spcPts val="800"/>
+              </a:spcAft>
+            </a:pPr>
+            <a:r>
+              <a:rPr sz="2000">
+                <a:solidFill>
+                  <a:srgbClr val="4A4A4A"/>
+                </a:solidFill>
+                <a:latin typeface="Helvetica"/>
+              </a:rPr>
+              <a:t>•  6.  MCP toolbelt — every cornerstone is callable by the agent or a human</a:t>
             </a:r>
           </a:p>
         </p:txBody>
@@ -8330,7 +12254,7 @@
                 </a:solidFill>
                 <a:latin typeface="Helvetica"/>
               </a:rPr>
-              <a:t>Design 1 — SQLite-first reference store</a:t>
+              <a:t>The core idea</a:t>
             </a:r>
           </a:p>
         </p:txBody>
@@ -8369,55 +12293,313 @@
                 </a:solidFill>
                 <a:latin typeface="Helvetica"/>
               </a:rPr>
-              <a:t>•  714 connectors, 6,773 ops, 26K params, 43 step types, 172 Jinja filters, 1,664 playbooks</a:t>
-            </a:r>
-          </a:p>
-          <a:p>
-            <a:pPr algn="l">
-              <a:spcAft>
-                <a:spcPts val="800"/>
-              </a:spcAft>
-            </a:pPr>
-            <a:r>
-              <a:rPr sz="2000">
-                <a:solidFill>
-                  <a:srgbClr val="4A4A4A"/>
-                </a:solidFill>
-                <a:latin typeface="Helvetica"/>
-              </a:rPr>
-              <a:t>•  FTS-indexed; one SQL query per agent question — no LLM where a lookup will do</a:t>
-            </a:r>
-          </a:p>
-          <a:p>
-            <a:pPr algn="l">
-              <a:spcAft>
-                <a:spcPts val="800"/>
-              </a:spcAft>
-            </a:pPr>
-            <a:r>
-              <a:rPr sz="2000">
-                <a:solidFill>
-                  <a:srgbClr val="4A4A4A"/>
-                </a:solidFill>
-                <a:latin typeface="Helvetica"/>
-              </a:rPr>
-              <a:t>•  Probes refresh from the live appliance — compiler stays stable while the world changes</a:t>
-            </a:r>
-          </a:p>
-          <a:p>
-            <a:pPr algn="l">
-              <a:spcAft>
-                <a:spcPts val="800"/>
-              </a:spcAft>
-            </a:pPr>
-            <a:r>
-              <a:rPr sz="2000">
-                <a:solidFill>
-                  <a:srgbClr val="4A4A4A"/>
-                </a:solidFill>
-                <a:latin typeface="Helvetica"/>
-              </a:rPr>
-              <a:t>•  Trust ladder (live_*, tested_pass → is_trusted=1) flags unverified data</a:t>
+              <a:t>•  One simplified YAML IR. Three authoring surfaces (CLI, agent-via-MCP, future visual editor)</a:t>
+            </a:r>
+          </a:p>
+          <a:p>
+            <a:pPr algn="l">
+              <a:spcAft>
+                <a:spcPts val="800"/>
+              </a:spcAft>
+            </a:pPr>
+            <a:r>
+              <a:rPr sz="2000">
+                <a:solidFill>
+                  <a:srgbClr val="4A4A4A"/>
+                </a:solidFill>
+                <a:latin typeface="Helvetica"/>
+              </a:rPr>
+              <a:t>•  All three compile through the same pipeline to native FSR WorkflowCollection JSON</a:t>
+            </a:r>
+          </a:p>
+          <a:p>
+            <a:pPr algn="l">
+              <a:spcAft>
+                <a:spcPts val="800"/>
+              </a:spcAft>
+            </a:pPr>
+            <a:r>
+              <a:rPr sz="2000">
+                <a:solidFill>
+                  <a:srgbClr val="4A4A4A"/>
+                </a:solidFill>
+                <a:latin typeface="Helvetica"/>
+              </a:rPr>
+              <a:t>•  FortiSOAR stays the execution engine — we never replace it, we author into it</a:t>
+            </a:r>
+          </a:p>
+          <a:p>
+            <a:pPr algn="l">
+              <a:spcAft>
+                <a:spcPts val="800"/>
+              </a:spcAft>
+            </a:pPr>
+            <a:r>
+              <a:rPr sz="2000">
+                <a:solidFill>
+                  <a:srgbClr val="4A4A4A"/>
+                </a:solidFill>
+                <a:latin typeface="Helvetica"/>
+              </a:rPr>
+              <a:t>•  Same IR across surfaces → output is interoperable</a:t>
+            </a:r>
+          </a:p>
+        </p:txBody>
+      </p:sp>
+      <p:sp>
+        <p:nvSpPr>
+          <p:cNvPr id="5" name="Rounded Rectangle 4"/>
+          <p:cNvSpPr/>
+          <p:nvPr/>
+        </p:nvSpPr>
+        <p:spPr>
+          <a:xfrm>
+            <a:off x="3078327" y="4206240"/>
+            <a:ext cx="1828800" cy="640080"/>
+          </a:xfrm>
+          <a:prstGeom prst="roundRect">
+            <a:avLst/>
+          </a:prstGeom>
+          <a:solidFill>
+            <a:srgbClr val="0F1E3D"/>
+          </a:solidFill>
+          <a:ln>
+            <a:noFill/>
+          </a:ln>
+        </p:spPr>
+        <p:style>
+          <a:lnRef idx="1">
+            <a:schemeClr val="accent1"/>
+          </a:lnRef>
+          <a:fillRef idx="3">
+            <a:schemeClr val="accent1"/>
+          </a:fillRef>
+          <a:effectRef idx="2">
+            <a:schemeClr val="accent1"/>
+          </a:effectRef>
+          <a:fontRef idx="minor">
+            <a:schemeClr val="lt1"/>
+          </a:fontRef>
+        </p:style>
+        <p:txBody>
+          <a:bodyPr rtlCol="0" anchor="ctr"/>
+          <a:lstStyle/>
+          <a:p>
+            <a:pPr algn="ctr"/>
+            <a:r>
+              <a:rPr sz="1300">
+                <a:solidFill>
+                  <a:srgbClr val="FFFFFF"/>
+                </a:solidFill>
+                <a:latin typeface="Helvetica"/>
+              </a:rPr>
+              <a:t>Human (CLI)</a:t>
+            </a:r>
+          </a:p>
+        </p:txBody>
+      </p:sp>
+      <p:sp>
+        <p:nvSpPr>
+          <p:cNvPr id="6" name="Rounded Rectangle 5"/>
+          <p:cNvSpPr/>
+          <p:nvPr/>
+        </p:nvSpPr>
+        <p:spPr>
+          <a:xfrm>
+            <a:off x="5181447" y="4206240"/>
+            <a:ext cx="1828800" cy="640080"/>
+          </a:xfrm>
+          <a:prstGeom prst="roundRect">
+            <a:avLst/>
+          </a:prstGeom>
+          <a:solidFill>
+            <a:srgbClr val="0F1E3D"/>
+          </a:solidFill>
+          <a:ln>
+            <a:noFill/>
+          </a:ln>
+        </p:spPr>
+        <p:style>
+          <a:lnRef idx="1">
+            <a:schemeClr val="accent1"/>
+          </a:lnRef>
+          <a:fillRef idx="3">
+            <a:schemeClr val="accent1"/>
+          </a:fillRef>
+          <a:effectRef idx="2">
+            <a:schemeClr val="accent1"/>
+          </a:effectRef>
+          <a:fontRef idx="minor">
+            <a:schemeClr val="lt1"/>
+          </a:fontRef>
+        </p:style>
+        <p:txBody>
+          <a:bodyPr rtlCol="0" anchor="ctr"/>
+          <a:lstStyle/>
+          <a:p>
+            <a:pPr algn="ctr"/>
+            <a:r>
+              <a:rPr sz="1300">
+                <a:solidFill>
+                  <a:srgbClr val="FFFFFF"/>
+                </a:solidFill>
+                <a:latin typeface="Helvetica"/>
+              </a:rPr>
+              <a:t>Agent (MCP)</a:t>
+            </a:r>
+          </a:p>
+        </p:txBody>
+      </p:sp>
+      <p:sp>
+        <p:nvSpPr>
+          <p:cNvPr id="7" name="Rounded Rectangle 6"/>
+          <p:cNvSpPr/>
+          <p:nvPr/>
+        </p:nvSpPr>
+        <p:spPr>
+          <a:xfrm>
+            <a:off x="7284567" y="4206240"/>
+            <a:ext cx="1828800" cy="640080"/>
+          </a:xfrm>
+          <a:prstGeom prst="roundRect">
+            <a:avLst/>
+          </a:prstGeom>
+          <a:solidFill>
+            <a:srgbClr val="0F1E3D"/>
+          </a:solidFill>
+          <a:ln>
+            <a:noFill/>
+          </a:ln>
+        </p:spPr>
+        <p:style>
+          <a:lnRef idx="1">
+            <a:schemeClr val="accent1"/>
+          </a:lnRef>
+          <a:fillRef idx="3">
+            <a:schemeClr val="accent1"/>
+          </a:fillRef>
+          <a:effectRef idx="2">
+            <a:schemeClr val="accent1"/>
+          </a:effectRef>
+          <a:fontRef idx="minor">
+            <a:schemeClr val="lt1"/>
+          </a:fontRef>
+        </p:style>
+        <p:txBody>
+          <a:bodyPr rtlCol="0" anchor="ctr"/>
+          <a:lstStyle/>
+          <a:p>
+            <a:pPr algn="ctr"/>
+            <a:r>
+              <a:rPr sz="1300">
+                <a:solidFill>
+                  <a:srgbClr val="FFFFFF"/>
+                </a:solidFill>
+                <a:latin typeface="Helvetica"/>
+              </a:rPr>
+              <a:t>Visual editor</a:t>
+            </a:r>
+          </a:p>
+        </p:txBody>
+      </p:sp>
+      <p:sp>
+        <p:nvSpPr>
+          <p:cNvPr id="8" name="Rounded Rectangle 7"/>
+          <p:cNvSpPr/>
+          <p:nvPr/>
+        </p:nvSpPr>
+        <p:spPr>
+          <a:xfrm>
+            <a:off x="3901287" y="5120640"/>
+            <a:ext cx="1828800" cy="640080"/>
+          </a:xfrm>
+          <a:prstGeom prst="roundRect">
+            <a:avLst/>
+          </a:prstGeom>
+          <a:solidFill>
+            <a:srgbClr val="E83E3E"/>
+          </a:solidFill>
+          <a:ln>
+            <a:noFill/>
+          </a:ln>
+        </p:spPr>
+        <p:style>
+          <a:lnRef idx="1">
+            <a:schemeClr val="accent1"/>
+          </a:lnRef>
+          <a:fillRef idx="3">
+            <a:schemeClr val="accent1"/>
+          </a:fillRef>
+          <a:effectRef idx="2">
+            <a:schemeClr val="accent1"/>
+          </a:effectRef>
+          <a:fontRef idx="minor">
+            <a:schemeClr val="lt1"/>
+          </a:fontRef>
+        </p:style>
+        <p:txBody>
+          <a:bodyPr rtlCol="0" anchor="ctr"/>
+          <a:lstStyle/>
+          <a:p>
+            <a:pPr algn="ctr"/>
+            <a:r>
+              <a:rPr sz="1300" b="1">
+                <a:solidFill>
+                  <a:srgbClr val="FFFFFF"/>
+                </a:solidFill>
+              </a:rPr>
+              <a:t>YAML IR</a:t>
+            </a:r>
+          </a:p>
+        </p:txBody>
+      </p:sp>
+      <p:sp>
+        <p:nvSpPr>
+          <p:cNvPr id="9" name="Rounded Rectangle 8"/>
+          <p:cNvSpPr/>
+          <p:nvPr/>
+        </p:nvSpPr>
+        <p:spPr>
+          <a:xfrm>
+            <a:off x="6461607" y="5120640"/>
+            <a:ext cx="1828800" cy="640080"/>
+          </a:xfrm>
+          <a:prstGeom prst="roundRect">
+            <a:avLst/>
+          </a:prstGeom>
+          <a:solidFill>
+            <a:srgbClr val="0F1E3D"/>
+          </a:solidFill>
+          <a:ln>
+            <a:noFill/>
+          </a:ln>
+        </p:spPr>
+        <p:style>
+          <a:lnRef idx="1">
+            <a:schemeClr val="accent1"/>
+          </a:lnRef>
+          <a:fillRef idx="3">
+            <a:schemeClr val="accent1"/>
+          </a:fillRef>
+          <a:effectRef idx="2">
+            <a:schemeClr val="accent1"/>
+          </a:effectRef>
+          <a:fontRef idx="minor">
+            <a:schemeClr val="lt1"/>
+          </a:fontRef>
+        </p:style>
+        <p:txBody>
+          <a:bodyPr rtlCol="0" anchor="ctr"/>
+          <a:lstStyle/>
+          <a:p>
+            <a:pPr algn="ctr"/>
+            <a:r>
+              <a:rPr sz="1300">
+                <a:solidFill>
+                  <a:srgbClr val="FFFFFF"/>
+                </a:solidFill>
+              </a:rPr>
+              <a:t>Compiler → FSR JSON</a:t>
             </a:r>
           </a:p>
         </p:txBody>
@@ -8521,7 +12703,7 @@
                 </a:solidFill>
                 <a:latin typeface="Helvetica"/>
               </a:rPr>
-              <a:t>Design 2 — Library-first compiler</a:t>
+              <a:t>Why YAML is the right IR</a:t>
             </a:r>
           </a:p>
         </p:txBody>
@@ -8560,55 +12742,55 @@
                 </a:solidFill>
                 <a:latin typeface="Helvetica"/>
               </a:rPr>
-              <a:t>•  Pipeline: parser → resolver → validator → emitter</a:t>
-            </a:r>
-          </a:p>
-          <a:p>
-            <a:pPr algn="l">
-              <a:spcAft>
-                <a:spcPts val="800"/>
-              </a:spcAft>
-            </a:pPr>
-            <a:r>
-              <a:rPr sz="2000">
-                <a:solidFill>
-                  <a:srgbClr val="4A4A4A"/>
-                </a:solidFill>
-                <a:latin typeface="Helvetica"/>
-              </a:rPr>
-              <a:t>•  Compiler is a Python library; CLI, MCP server, web app are thin wrappers</a:t>
-            </a:r>
-          </a:p>
-          <a:p>
-            <a:pPr algn="l">
-              <a:spcAft>
-                <a:spcPts val="800"/>
-              </a:spcAft>
-            </a:pPr>
-            <a:r>
-              <a:rPr sz="2000">
-                <a:solidFill>
-                  <a:srgbClr val="4A4A4A"/>
-                </a:solidFill>
-                <a:latin typeface="Helvetica"/>
-              </a:rPr>
-              <a:t>•  Errors are data, not strings — every diagnostic has a code, line/col, suggested fix</a:t>
-            </a:r>
-          </a:p>
-          <a:p>
-            <a:pPr algn="l">
-              <a:spcAft>
-                <a:spcPts val="800"/>
-              </a:spcAft>
-            </a:pPr>
-            <a:r>
-              <a:rPr sz="2000">
-                <a:solidFill>
-                  <a:srgbClr val="4A4A4A"/>
-                </a:solidFill>
-                <a:latin typeface="Helvetica"/>
-              </a:rPr>
-              <a:t>•  Round-trip (compile → decompile) is lossless modulo formatting</a:t>
+              <a:t>•  Human-readable, diff-able, review-able in a PR</a:t>
+            </a:r>
+          </a:p>
+          <a:p>
+            <a:pPr algn="l">
+              <a:spcAft>
+                <a:spcPts val="800"/>
+              </a:spcAft>
+            </a:pPr>
+            <a:r>
+              <a:rPr sz="2000">
+                <a:solidFill>
+                  <a:srgbClr val="4A4A4A"/>
+                </a:solidFill>
+                <a:latin typeface="Helvetica"/>
+              </a:rPr>
+              <a:t>•  Trivially round-trippable: pull from FSR → YAML → edit → push</a:t>
+            </a:r>
+          </a:p>
+          <a:p>
+            <a:pPr algn="l">
+              <a:spcAft>
+                <a:spcPts val="800"/>
+              </a:spcAft>
+            </a:pPr>
+            <a:r>
+              <a:rPr sz="2000">
+                <a:solidFill>
+                  <a:srgbClr val="4A4A4A"/>
+                </a:solidFill>
+                <a:latin typeface="Helvetica"/>
+              </a:rPr>
+              <a:t>•  Easy for an LLM to emit and reason about</a:t>
+            </a:r>
+          </a:p>
+          <a:p>
+            <a:pPr algn="l">
+              <a:spcAft>
+                <a:spcPts val="800"/>
+              </a:spcAft>
+            </a:pPr>
+            <a:r>
+              <a:rPr sz="2000">
+                <a:solidFill>
+                  <a:srgbClr val="4A4A4A"/>
+                </a:solidFill>
+                <a:latin typeface="Helvetica"/>
+              </a:rPr>
+              <a:t>•  No vendor JSON ceremony (UUIDs, port coords, layout metadata) leaks into authoring</a:t>
             </a:r>
           </a:p>
         </p:txBody>
@@ -8712,7 +12894,7 @@
                 </a:solidFill>
                 <a:latin typeface="Helvetica"/>
               </a:rPr>
-              <a:t>Design 3 — MCP as the agent contract</a:t>
+              <a:t>Design 1 — SQLite-first reference store</a:t>
             </a:r>
           </a:p>
         </p:txBody>
@@ -8751,71 +12933,55 @@
                 </a:solidFill>
                 <a:latin typeface="Helvetica"/>
               </a:rPr>
-              <a:t>•  20+ MCP tools: find_connector, get_op_schema, validate_yaml, compile_yaml,</a:t>
-            </a:r>
-          </a:p>
-          <a:p>
-            <a:pPr algn="l">
-              <a:spcAft>
-                <a:spcPts val="800"/>
-              </a:spcAft>
-            </a:pPr>
-            <a:r>
-              <a:rPr sz="2000">
-                <a:solidFill>
-                  <a:srgbClr val="4A4A4A"/>
-                </a:solidFill>
-                <a:latin typeface="Helvetica"/>
-              </a:rPr>
-              <a:t>•      render_jinja, run_op, get_run_env, resolve_picklist_value,</a:t>
-            </a:r>
-          </a:p>
-          <a:p>
-            <a:pPr algn="l">
-              <a:spcAft>
-                <a:spcPts val="800"/>
-              </a:spcAft>
-            </a:pPr>
-            <a:r>
-              <a:rPr sz="2000">
-                <a:solidFill>
-                  <a:srgbClr val="4A4A4A"/>
-                </a:solidFill>
-                <a:latin typeface="Helvetica"/>
-              </a:rPr>
-              <a:t>•      search_api_examples, synthesize_http_step, …</a:t>
-            </a:r>
-          </a:p>
-          <a:p>
-            <a:pPr algn="l">
-              <a:spcAft>
-                <a:spcPts val="800"/>
-              </a:spcAft>
-            </a:pPr>
-            <a:r>
-              <a:rPr sz="2000">
-                <a:solidFill>
-                  <a:srgbClr val="4A4A4A"/>
-                </a:solidFill>
-                <a:latin typeface="Helvetica"/>
-              </a:rPr>
-              <a:t>•  The LLM never writes FSR JSON — it writes YAML and trusts the compiler</a:t>
-            </a:r>
-          </a:p>
-          <a:p>
-            <a:pPr algn="l">
-              <a:spcAft>
-                <a:spcPts val="800"/>
-              </a:spcAft>
-            </a:pPr>
-            <a:r>
-              <a:rPr sz="2000">
-                <a:solidFill>
-                  <a:srgbClr val="4A4A4A"/>
-                </a:solidFill>
-                <a:latin typeface="Helvetica"/>
-              </a:rPr>
-              <a:t>•  LLM-agnostic by construction: structured I/O, externalized prompt, token discipline</a:t>
+              <a:t>•  714 connectors, 6,773 ops, 26K params, 43 step types, 172 Jinja filters, 1,664 playbooks</a:t>
+            </a:r>
+          </a:p>
+          <a:p>
+            <a:pPr algn="l">
+              <a:spcAft>
+                <a:spcPts val="800"/>
+              </a:spcAft>
+            </a:pPr>
+            <a:r>
+              <a:rPr sz="2000">
+                <a:solidFill>
+                  <a:srgbClr val="4A4A4A"/>
+                </a:solidFill>
+                <a:latin typeface="Helvetica"/>
+              </a:rPr>
+              <a:t>•  FTS-indexed; one SQL query per agent question — no LLM where a lookup will do</a:t>
+            </a:r>
+          </a:p>
+          <a:p>
+            <a:pPr algn="l">
+              <a:spcAft>
+                <a:spcPts val="800"/>
+              </a:spcAft>
+            </a:pPr>
+            <a:r>
+              <a:rPr sz="2000">
+                <a:solidFill>
+                  <a:srgbClr val="4A4A4A"/>
+                </a:solidFill>
+                <a:latin typeface="Helvetica"/>
+              </a:rPr>
+              <a:t>•  Probes refresh from the live appliance — compiler stays stable while the world changes</a:t>
+            </a:r>
+          </a:p>
+          <a:p>
+            <a:pPr algn="l">
+              <a:spcAft>
+                <a:spcPts val="800"/>
+              </a:spcAft>
+            </a:pPr>
+            <a:r>
+              <a:rPr sz="2000">
+                <a:solidFill>
+                  <a:srgbClr val="4A4A4A"/>
+                </a:solidFill>
+                <a:latin typeface="Helvetica"/>
+              </a:rPr>
+              <a:t>•  Trust ladder (live_*, tested_pass → is_trusted=1) flags unverified data</a:t>
             </a:r>
           </a:p>
         </p:txBody>
